--- a/slides/datasets-in-10-minutes-dyck.pptx
+++ b/slides/datasets-in-10-minutes-dyck.pptx
@@ -19,16 +19,11 @@
     <p:sldId id="267" r:id="rId17"/>
     <p:sldId id="268" r:id="rId18"/>
     <p:sldId id="269" r:id="rId19"/>
-    <p:sldId id="270" r:id="rId20"/>
-    <p:sldId id="271" r:id="rId21"/>
-    <p:sldId id="272" r:id="rId22"/>
-    <p:sldId id="273" r:id="rId23"/>
     <p:sldId id="274" r:id="rId24"/>
     <p:sldId id="275" r:id="rId25"/>
     <p:sldId id="276" r:id="rId26"/>
     <p:sldId id="277" r:id="rId27"/>
     <p:sldId id="278" r:id="rId28"/>
-    <p:sldId id="279" r:id="rId29"/>
     <p:sldId id="280" r:id="rId30"/>
     <p:sldId id="281" r:id="rId31"/>
     <p:sldId id="282" r:id="rId32"/>
@@ -48,9 +43,6 @@
     <p:sldId id="296" r:id="rId46"/>
     <p:sldId id="297" r:id="rId47"/>
     <p:sldId id="298" r:id="rId48"/>
-    <p:sldId id="299" r:id="rId49"/>
-    <p:sldId id="300" r:id="rId50"/>
-    <p:sldId id="301" r:id="rId51"/>
     <p:sldId id="302" r:id="rId52"/>
     <p:sldId id="303" r:id="rId53"/>
   </p:sldIdLst>
@@ -7337,11 +7329,11 @@
         <p:spPr>
           <a:xfrm>
             <a:off x="548640" y="1888452"/>
-            <a:ext cx="8046720" cy="902970"/>
-          </a:xfrm>
-        </p:spPr>
-        <p:txBody>
-          <a:bodyPr wrap="square" lIns="0" rIns="0" tIns="0" bIns="0">
+            <a:ext cx="8046720" cy="1004570"/>
+          </a:xfrm>
+        </p:spPr>
+        <p:txBody>
+          <a:bodyPr wrap="square" lIns="0" rIns="0" tIns="0" bIns="101600">
             <a:noAutofit/>
           </a:bodyPr>
           <a:lstStyle/>
@@ -7663,7 +7655,7 @@
                 <a:ea typeface="Noto Sans CJK JP"/>
                 <a:cs typeface="Noto Sans"/>
               </a:rPr>
-              <a:t>正解に開く括弧は含めない。対応する閉じ括弧だけを、残った数だけ出す。</a:t>
+              <a:t>入力を読み終えたときにスタックに残った括弧を、逆順に閉じれば最短の補完が得られる。</a:t>
             </a:r>
           </a:p>
           <a:p>
@@ -7693,7 +7685,7 @@
                 <a:ea typeface="Noto Sans CJK JP"/>
                 <a:cs typeface="Noto Sans"/>
               </a:rPr>
-              <a:t>生成器は正解をスタックから計算する。人が注釈して複数の回答を集める課題ではない。</a:t>
+              <a:t>生成器も同じ方法で正解を計算するため、括弧の種類と順序が合う答えが一つに決まる。</a:t>
             </a:r>
           </a:p>
         </p:txBody>
@@ -7795,19 +7787,28 @@
                 <a:ea typeface="Noto Sans CJK JP"/>
                 <a:cs typeface="Noto Sans"/>
               </a:rPr>
-              <a:t>[1] HELM v0.3.0. DyckLanguageScenario.</a:t>
-            </a:r>
-            <a:r>
-              <a:rPr sz="810" b="0" lang="ja-JP" altLang="en-US">
-                <a:solidFill>
-                  <a:srgbClr val="626669"/>
-                </a:solidFill>
-                <a:latin typeface="Noto Sans"/>
-                <a:ea typeface="Noto Sans CJK JP"/>
-                <a:cs typeface="Noto Sans"/>
-              </a:rPr>
-              <a:t>  </a:t>
-            </a:r>
+              <a:t>[1] Stanford CRFM. DyckLanguageScenario — 括弧列の生成と正解計算。</a:t>
+            </a:r>
+          </a:p>
+          <a:p>
+            <a:pPr algn="l">
+              <a:lnSpc>
+                <a:spcPts val="1200"/>
+              </a:lnSpc>
+              <a:spcBef>
+                <a:spcPts val="0"/>
+              </a:spcBef>
+              <a:spcAft>
+                <a:spcPts val="0"/>
+              </a:spcAft>
+              <a:buNone/>
+              <a:defRPr sz="810" b="0">
+                <a:solidFill>
+                  <a:srgbClr val="303437"/>
+                </a:solidFill>
+                <a:latin typeface="Noto Sans"/>
+              </a:defRPr>
+            </a:pPr>
             <a:r>
               <a:rPr sz="810" b="0" lang="ja-JP" altLang="en-US">
                 <a:solidFill>
@@ -7884,7 +7885,7 @@
                 <a:ea typeface="Noto Sans CJK JP"/>
                 <a:cs typeface="Noto Sans"/>
               </a:rPr>
-              <a:t>HELMの採点と公開成績</a:t>
+              <a:t>正解の求め方と出力例</a:t>
             </a:r>
           </a:p>
         </p:txBody>
@@ -7932,7 +7933,7 @@
                 <a:ea typeface="Noto Sans CJK JP"/>
                 <a:cs typeface="Noto Sans"/>
               </a:rPr>
-              <a:t>2. HELMの採点と公開成績</a:t>
+              <a:t>2. 正解の求め方と出力例</a:t>
             </a:r>
           </a:p>
         </p:txBody>
@@ -7998,7 +7999,7 @@
                 <a:ea typeface="Noto Sans CJK JP"/>
                 <a:cs typeface="Noto Sans"/>
               </a:rPr>
-              <a:t>英語の指示と3件の完成例を提示する</a:t>
+              <a:t>括弧を正しく閉じるよう指示する</a:t>
             </a:r>
           </a:p>
         </p:txBody>
@@ -8046,7 +8047,7 @@
                 <a:ea typeface="Noto Sans CJK JP"/>
                 <a:cs typeface="Noto Sans"/>
               </a:rPr>
-              <a:t>2. HELMの採点と公開成績</a:t>
+              <a:t>2. 正解の求め方と出力例</a:t>
             </a:r>
           </a:p>
         </p:txBody>
@@ -8100,7 +8101,7 @@
                 <a:ea typeface="Noto Sans CJK JP"/>
                 <a:cs typeface="Noto Sans"/>
               </a:rPr>
-              <a:t>公開runの指示全文と日本語訳</a:t>
+              <a:t>補完問題に添える英語の指示と日本語訳</a:t>
             </a:r>
           </a:p>
         </p:txBody>
@@ -8282,7 +8283,7 @@
                 <a:ea typeface="Noto Sans CJK JP"/>
                 <a:cs typeface="Noto Sans"/>
               </a:rPr>
-              <a:t>[1] HELM v0.3.0、seed=42の生成器で再現し、公開text-davinci-003入力と全500件を照合。</a:t>
+              <a:t>[1] Stanford CRFM (2023). Dyck Language — 公開問題と既存出力。</a:t>
             </a:r>
           </a:p>
           <a:p>
@@ -8308,7 +8309,7 @@
                 <a:cs typeface="Noto Sans"/>
                 <a:hlinkClick r:id="rId2"/>
               </a:rPr>
-              <a:t>https://crfm.stanford.edu/helm/classic/v0.4.0/#/runs/dyck_language_np=3:model=openai_text-davinci-003</a:t>
+              <a:t>https://crfm.stanford.edu/helm/classic/v0.4.0/#/groups/dyck_language</a:t>
             </a:r>
           </a:p>
         </p:txBody>
@@ -8374,7 +8375,7 @@
                 <a:ea typeface="Noto Sans CJK JP"/>
                 <a:cs typeface="Noto Sans"/>
               </a:rPr>
-              <a:t>公開指標は、最後の空白区切り要素を比べる</a:t>
+              <a:t>必要な閉じ括弧が、順序どおりにそろうか</a:t>
             </a:r>
           </a:p>
         </p:txBody>
@@ -8427,7 +8428,7 @@
                 <a:ea typeface="Noto Sans CJK JP"/>
                 <a:cs typeface="Noto Sans"/>
               </a:rPr>
-              <a:t>HELMの設定はexact_match_indicatorを指定する。実装は予測と正解を空白で分け、最後の要素だけを取り出して比較する。</a:t>
+              <a:t>補完の正しさは、必要な閉じ括弧が種類・順序・個数のすべてで合うかで決まる。列全体を正解と比較すれば、余分な括弧や途中の取り違えも分かる。</a:t>
             </a:r>
           </a:p>
           <a:p>
@@ -8457,37 +8458,7 @@
                 <a:ea typeface="Noto Sans CJK JP"/>
                 <a:cs typeface="Noto Sans"/>
               </a:rPr>
-              <a:t>最後の要素が一致すれば1点、異なれば0点。500件の得点を平均する。</a:t>
-            </a:r>
-          </a:p>
-          <a:p>
-            <a:pPr marL="457200" indent="-355600">
-              <a:lnSpc>
-                <a:spcPts val="2499"/>
-              </a:lnSpc>
-              <a:spcAft>
-                <a:spcPts val="0"/>
-              </a:spcAft>
-              <a:buSzPct val="63333"/>
-              <a:buFont typeface="Noto Sans CJK JP"/>
-              <a:buChar char="●"/>
-              <a:defRPr sz="2100" b="0">
-                <a:solidFill>
-                  <a:srgbClr val="303437"/>
-                </a:solidFill>
-                <a:latin typeface="Noto Sans"/>
-              </a:defRPr>
-            </a:pPr>
-            <a:r>
-              <a:rPr sz="2100" b="0" lang="ja-JP" altLang="en-US">
-                <a:solidFill>
-                  <a:srgbClr val="303437"/>
-                </a:solidFill>
-                <a:latin typeface="Noto Sans"/>
-                <a:ea typeface="Noto Sans CJK JP"/>
-                <a:cs typeface="Noto Sans"/>
-              </a:rPr>
-              <a:t>正解列のすべてが合うかを測る、列全体の完全一致とは異なる。</a:t>
+              <a:t>短い正解でも、入力に深い入れ子や対応済みの括弧対が多く含まれるため、開いたままの括弧を最後まで保持する必要がある。</a:t>
             </a:r>
           </a:p>
         </p:txBody>
@@ -8535,7 +8506,7 @@
                 <a:ea typeface="Noto Sans CJK JP"/>
                 <a:cs typeface="Noto Sans"/>
               </a:rPr>
-              <a:t>2. HELMの採点と公開成績</a:t>
+              <a:t>2. 正解の求め方と出力例</a:t>
             </a:r>
           </a:p>
         </p:txBody>
@@ -8589,8 +8560,28 @@
                 <a:ea typeface="Noto Sans CJK JP"/>
                 <a:cs typeface="Noto Sans"/>
               </a:rPr>
-              <a:t>[1] HELM v0.3.0. exact_match_indicator.</a:t>
-            </a:r>
+              <a:t>[1] Stanford CRFM. DyckLanguageScenario — 括弧列の生成と正解計算。</a:t>
+            </a:r>
+          </a:p>
+          <a:p>
+            <a:pPr algn="l">
+              <a:lnSpc>
+                <a:spcPts val="1200"/>
+              </a:lnSpc>
+              <a:spcBef>
+                <a:spcPts val="0"/>
+              </a:spcBef>
+              <a:spcAft>
+                <a:spcPts val="0"/>
+              </a:spcAft>
+              <a:buNone/>
+              <a:defRPr sz="810" b="0">
+                <a:solidFill>
+                  <a:srgbClr val="303437"/>
+                </a:solidFill>
+                <a:latin typeface="Noto Sans"/>
+              </a:defRPr>
+            </a:pPr>
             <a:r>
               <a:rPr sz="810" b="0" lang="ja-JP" altLang="en-US">
                 <a:solidFill>
@@ -8599,20 +8590,9 @@
                 <a:latin typeface="Noto Sans"/>
                 <a:ea typeface="Noto Sans CJK JP"/>
                 <a:cs typeface="Noto Sans"/>
-              </a:rPr>
-              <a:t>  </a:t>
-            </a:r>
-            <a:r>
-              <a:rPr sz="810" b="0" lang="ja-JP" altLang="en-US">
-                <a:solidFill>
-                  <a:srgbClr val="626669"/>
-                </a:solidFill>
-                <a:latin typeface="Noto Sans"/>
-                <a:ea typeface="Noto Sans CJK JP"/>
-                <a:cs typeface="Noto Sans"/>
-                <a:hlinkClick r:id="rId2"/>
-              </a:rPr>
-              <a:t>https://github.com/stanford-crfm/helm/blob/v0.3.0/src/helm/benchmark/metrics/basic_metrics.py</a:t>
+                <a:hlinkClick r:id="rId3"/>
+              </a:rPr>
+              <a:t>https://github.com/stanford-crfm/helm/blob/v0.3.0/src/helm/benchmark/scenarios/dyck_language_scenario.py</a:t>
             </a:r>
           </a:p>
         </p:txBody>
@@ -8678,7 +8658,7 @@
                 <a:ea typeface="Noto Sans CJK JP"/>
                 <a:cs typeface="Noto Sans"/>
               </a:rPr>
-              <a:t>余分な括弧があっても、末尾は一致する</a:t>
+              <a:t>余分な括弧も、補完の誤りになる</a:t>
             </a:r>
           </a:p>
         </p:txBody>
@@ -8726,7 +8706,7 @@
                 <a:ea typeface="Noto Sans CJK JP"/>
                 <a:cs typeface="Noto Sans"/>
               </a:rPr>
-              <a:t>2. HELMの採点と公開成績</a:t>
+              <a:t>2. 正解の求め方と出力例</a:t>
             </a:r>
           </a:p>
         </p:txBody>
@@ -8780,7 +8760,7 @@
                 <a:ea typeface="Noto Sans CJK JP"/>
                 <a:cs typeface="Noto Sans"/>
               </a:rPr>
-              <a:t>実例3の公開予測：text-davinci-003、試行0</a:t>
+              <a:t>実例3への既存の出力例：text-davinci-003（2023年公開）</a:t>
             </a:r>
           </a:p>
         </p:txBody>
@@ -8942,7 +8922,7 @@
                 <a:ea typeface="Noto Sans CJK JP"/>
                 <a:cs typeface="Noto Sans"/>
               </a:rPr>
-              <a:t>最後の「]」は一致するため公開指標は1点。余分な「]」が先頭にあるため、列全体の完全一致は0点になる。</a:t>
+              <a:t>予測の先頭には、正解にない「]」が一つある。必要な3記号を含んでいても、この出力では括弧列を正しく完成できない。</a:t>
             </a:r>
           </a:p>
         </p:txBody>
@@ -8996,7 +8976,7 @@
                 <a:ea typeface="Noto Sans CJK JP"/>
                 <a:cs typeface="Noto Sans"/>
               </a:rPr>
-              <a:t>[1] HELM v0.3.0、seed=42の生成器で再現し、公開text-davinci-003入力と全500件を照合。</a:t>
+              <a:t>[1] Stanford CRFM (2023). Dyck Language — 公開問題と既存出力。</a:t>
             </a:r>
           </a:p>
           <a:p>
@@ -9021,2561 +9001,6 @@
                 <a:ea typeface="Noto Sans CJK JP"/>
                 <a:cs typeface="Noto Sans"/>
                 <a:hlinkClick r:id="rId2"/>
-              </a:rPr>
-              <a:t>https://crfm.stanford.edu/helm/classic/v0.4.0/#/runs/dyck_language_np=3:model=openai_text-davinci-003</a:t>
-            </a:r>
-          </a:p>
-          <a:p>
-            <a:pPr>
-              <a:lnSpc>
-                <a:spcPts val="1200"/>
-              </a:lnSpc>
-              <a:spcAft>
-                <a:spcPts val="0"/>
-              </a:spcAft>
-              <a:buNone/>
-              <a:defRPr sz="810" b="0">
-                <a:solidFill>
-                  <a:srgbClr val="303437"/>
-                </a:solidFill>
-                <a:latin typeface="Noto Sans"/>
-              </a:defRPr>
-            </a:pPr>
-            <a:r>
-              <a:rPr sz="810" b="0" lang="ja-JP" altLang="en-US">
-                <a:solidFill>
-                  <a:srgbClr val="626669"/>
-                </a:solidFill>
-                <a:latin typeface="Noto Sans"/>
-                <a:ea typeface="Noto Sans CJK JP"/>
-                <a:cs typeface="Noto Sans"/>
-              </a:rPr>
-              <a:t>[2] HELM v0.3.0. exact_match_indicator. id9 / train_trial_index=0</a:t>
-            </a:r>
-            <a:r>
-              <a:rPr sz="810" b="0" lang="ja-JP" altLang="en-US">
-                <a:solidFill>
-                  <a:srgbClr val="626669"/>
-                </a:solidFill>
-                <a:latin typeface="Noto Sans"/>
-                <a:ea typeface="Noto Sans CJK JP"/>
-                <a:cs typeface="Noto Sans"/>
-              </a:rPr>
-              <a:t>  </a:t>
-            </a:r>
-            <a:r>
-              <a:rPr sz="810" b="0" lang="ja-JP" altLang="en-US">
-                <a:solidFill>
-                  <a:srgbClr val="626669"/>
-                </a:solidFill>
-                <a:latin typeface="Noto Sans"/>
-                <a:ea typeface="Noto Sans CJK JP"/>
-                <a:cs typeface="Noto Sans"/>
-                <a:hlinkClick r:id="rId3"/>
-              </a:rPr>
-              <a:t>https://github.com/stanford-crfm/helm/blob/v0.3.0/src/helm/benchmark/metrics/basic_metrics.py</a:t>
-            </a:r>
-          </a:p>
-        </p:txBody>
-      </p:sp>
-    </p:spTree>
-  </p:cSld>
-  <p:clrMapOvr>
-    <a:masterClrMapping/>
-  </p:clrMapOvr>
-</p:sld>
-</file>
-
-<file path=ppt/slides/slide15.xml><?xml version="1.0" encoding="utf-8"?>
-<p:sld xmlns:a="http://schemas.openxmlformats.org/drawingml/2006/main" xmlns:p="http://schemas.openxmlformats.org/presentationml/2006/main" xmlns:r="http://schemas.openxmlformats.org/officeDocument/2006/relationships">
-  <p:cSld>
-    <p:spTree>
-      <p:nvGrpSpPr>
-        <p:cNvPr id="1" name=""/>
-        <p:cNvGrpSpPr/>
-        <p:nvPr/>
-      </p:nvGrpSpPr>
-      <p:grpSpPr/>
-      <p:sp>
-        <p:nvSpPr>
-          <p:cNvPr id="2" name="Title 1"/>
-          <p:cNvSpPr>
-            <a:spLocks noGrp="1"/>
-          </p:cNvSpPr>
-          <p:nvPr>
-            <p:ph type="title"/>
-          </p:nvPr>
-        </p:nvSpPr>
-        <p:spPr>
-          <a:xfrm>
-            <a:off x="468172" y="650138"/>
-            <a:ext cx="8206740" cy="616305"/>
-          </a:xfrm>
-        </p:spPr>
-        <p:txBody>
-          <a:bodyPr wrap="square" lIns="0" rIns="0" tIns="0" bIns="0">
-            <a:noAutofit/>
-          </a:bodyPr>
-          <a:lstStyle/>
-          <a:p>
-            <a:pPr algn="l">
-              <a:lnSpc>
-                <a:spcPct val="110000"/>
-              </a:lnSpc>
-              <a:buNone/>
-              <a:defRPr sz="2800" b="0">
-                <a:solidFill>
-                  <a:srgbClr val="303437"/>
-                </a:solidFill>
-                <a:latin typeface="Noto Sans"/>
-              </a:defRPr>
-            </a:pPr>
-            <a:r>
-              <a:rPr sz="2800" b="1" lang="ja-JP" altLang="en-US">
-                <a:solidFill>
-                  <a:srgbClr val="303437"/>
-                </a:solidFill>
-                <a:latin typeface="Noto Sans"/>
-                <a:ea typeface="Noto Sans CJK JP"/>
-                <a:cs typeface="Noto Sans"/>
-              </a:rPr>
-              <a:t>HELMの公開得点：末尾要素の一致率</a:t>
-            </a:r>
-          </a:p>
-        </p:txBody>
-      </p:sp>
-      <p:sp>
-        <p:nvSpPr>
-          <p:cNvPr id="3" name="Title 2"/>
-          <p:cNvSpPr>
-            <a:spLocks noGrp="1"/>
-          </p:cNvSpPr>
-          <p:nvPr>
-            <p:ph type="title" idx="2"/>
-          </p:nvPr>
-        </p:nvSpPr>
-        <p:spPr>
-          <a:xfrm>
-            <a:off x="75895" y="0"/>
-            <a:ext cx="8115300" cy="480060"/>
-          </a:xfrm>
-        </p:spPr>
-        <p:txBody>
-          <a:bodyPr wrap="square" lIns="0" rIns="0" tIns="0" bIns="0" anchor="ctr">
-            <a:noAutofit/>
-          </a:bodyPr>
-          <a:lstStyle/>
-          <a:p>
-            <a:pPr algn="l">
-              <a:lnSpc>
-                <a:spcPct val="110000"/>
-              </a:lnSpc>
-              <a:buNone/>
-              <a:defRPr sz="1400" b="0">
-                <a:solidFill>
-                  <a:srgbClr val="303437"/>
-                </a:solidFill>
-                <a:latin typeface="Noto Sans"/>
-              </a:defRPr>
-            </a:pPr>
-            <a:r>
-              <a:rPr sz="1400" b="1" lang="ja-JP" altLang="en-US">
-                <a:solidFill>
-                  <a:srgbClr val="FFFEF8"/>
-                </a:solidFill>
-                <a:latin typeface="Noto Sans"/>
-                <a:ea typeface="Noto Sans CJK JP"/>
-                <a:cs typeface="Noto Sans"/>
-              </a:rPr>
-              <a:t>2. HELMの採点と公開成績</a:t>
-            </a:r>
-          </a:p>
-        </p:txBody>
-      </p:sp>
-      <p:graphicFrame>
-        <p:nvGraphicFramePr>
-          <p:cNvPr id="4" name="Table 3"/>
-          <p:cNvGraphicFramePr>
-            <a:graphicFrameLocks noGrp="1"/>
-          </p:cNvGraphicFramePr>
-          <p:nvPr/>
-        </p:nvGraphicFramePr>
-        <p:xfrm>
-          <a:off x="548640" y="1508760"/>
-          <a:ext cx="8046720" cy="1828800"/>
-        </p:xfrm>
-        <a:graphic>
-          <a:graphicData uri="http://schemas.openxmlformats.org/drawingml/2006/table">
-            <a:tbl>
-              <a:tblPr firstRow="0" bandRow="0"/>
-              <a:tblGrid>
-                <a:gridCol w="5669280"/>
-                <a:gridCol w="2377440"/>
-              </a:tblGrid>
-              <a:tr h="457200">
-                <a:tc>
-                  <a:txBody>
-                    <a:bodyPr wrap="square">
-                      <a:noAutofit/>
-                    </a:bodyPr>
-                    <a:lstStyle/>
-                    <a:p>
-                      <a:pPr algn="l">
-                        <a:lnSpc>
-                          <a:spcPts val="2529"/>
-                        </a:lnSpc>
-                        <a:buNone/>
-                        <a:defRPr sz="2200" b="0">
-                          <a:solidFill>
-                            <a:srgbClr val="303437"/>
-                          </a:solidFill>
-                          <a:latin typeface="Noto Sans"/>
-                        </a:defRPr>
-                      </a:pPr>
-                      <a:r>
-                        <a:rPr sz="2200" b="0" lang="ja-JP" altLang="en-US">
-                          <a:solidFill>
-                            <a:srgbClr val="303437"/>
-                          </a:solidFill>
-                          <a:latin typeface="Noto Sans"/>
-                          <a:ea typeface="Noto Sans CJK JP"/>
-                          <a:cs typeface="Noto Sans"/>
-                        </a:rPr>
-                        <a:t>モデル</a:t>
-                      </a:r>
-                    </a:p>
-                  </a:txBody>
-                  <a:tcPr marL="63500" marR="63500" marT="38100" marB="38100" anchor="ctr">
-                    <a:lnL w="7620">
-                      <a:noFill/>
-                    </a:lnL>
-                    <a:lnR w="7620">
-                      <a:noFill/>
-                    </a:lnR>
-                    <a:lnT w="15240">
-                      <a:solidFill>
-                        <a:srgbClr val="626669"/>
-                      </a:solidFill>
-                      <a:prstDash val="solid"/>
-                    </a:lnT>
-                    <a:lnB w="7620">
-                      <a:solidFill>
-                        <a:srgbClr val="626669"/>
-                      </a:solidFill>
-                      <a:prstDash val="solid"/>
-                    </a:lnB>
-                    <a:solidFill>
-                      <a:srgbClr val="FFFEF8"/>
-                    </a:solidFill>
-                  </a:tcPr>
-                </a:tc>
-                <a:tc>
-                  <a:txBody>
-                    <a:bodyPr wrap="square">
-                      <a:noAutofit/>
-                    </a:bodyPr>
-                    <a:lstStyle/>
-                    <a:p>
-                      <a:pPr algn="r">
-                        <a:lnSpc>
-                          <a:spcPts val="2529"/>
-                        </a:lnSpc>
-                        <a:buNone/>
-                        <a:defRPr sz="2200" b="0">
-                          <a:solidFill>
-                            <a:srgbClr val="303437"/>
-                          </a:solidFill>
-                          <a:latin typeface="Noto Sans"/>
-                        </a:defRPr>
-                      </a:pPr>
-                      <a:r>
-                        <a:rPr sz="2200" b="0" lang="ja-JP" altLang="en-US">
-                          <a:solidFill>
-                            <a:srgbClr val="303437"/>
-                          </a:solidFill>
-                          <a:latin typeface="Noto Sans"/>
-                          <a:ea typeface="Noto Sans CJK JP"/>
-                          <a:cs typeface="Noto Sans"/>
-                        </a:rPr>
-                        <a:t>一致率</a:t>
-                      </a:r>
-                    </a:p>
-                  </a:txBody>
-                  <a:tcPr marL="63500" marR="63500" marT="38100" marB="38100" anchor="ctr">
-                    <a:lnL w="7620">
-                      <a:noFill/>
-                    </a:lnL>
-                    <a:lnR w="7620">
-                      <a:noFill/>
-                    </a:lnR>
-                    <a:lnT w="15240">
-                      <a:solidFill>
-                        <a:srgbClr val="626669"/>
-                      </a:solidFill>
-                      <a:prstDash val="solid"/>
-                    </a:lnT>
-                    <a:lnB w="7620">
-                      <a:solidFill>
-                        <a:srgbClr val="626669"/>
-                      </a:solidFill>
-                      <a:prstDash val="solid"/>
-                    </a:lnB>
-                    <a:solidFill>
-                      <a:srgbClr val="FFFEF8"/>
-                    </a:solidFill>
-                  </a:tcPr>
-                </a:tc>
-              </a:tr>
-              <a:tr h="457200">
-                <a:tc>
-                  <a:txBody>
-                    <a:bodyPr wrap="square">
-                      <a:noAutofit/>
-                    </a:bodyPr>
-                    <a:lstStyle/>
-                    <a:p>
-                      <a:pPr algn="l">
-                        <a:lnSpc>
-                          <a:spcPts val="2529"/>
-                        </a:lnSpc>
-                        <a:buNone/>
-                        <a:defRPr sz="2200" b="0">
-                          <a:solidFill>
-                            <a:srgbClr val="303437"/>
-                          </a:solidFill>
-                          <a:latin typeface="Noto Sans"/>
-                        </a:defRPr>
-                      </a:pPr>
-                      <a:r>
-                        <a:rPr sz="2200" b="0" lang="ja-JP" altLang="en-US">
-                          <a:solidFill>
-                            <a:srgbClr val="303437"/>
-                          </a:solidFill>
-                          <a:latin typeface="Noto Sans"/>
-                          <a:ea typeface="Noto Sans CJK JP"/>
-                          <a:cs typeface="Noto Sans"/>
-                        </a:rPr>
-                        <a:t>Anthropic-LM (2022)</a:t>
-                      </a:r>
-                    </a:p>
-                  </a:txBody>
-                  <a:tcPr marL="63500" marR="63500" marT="38100" marB="38100" anchor="ctr">
-                    <a:lnL w="7620">
-                      <a:noFill/>
-                    </a:lnL>
-                    <a:lnR w="7620">
-                      <a:noFill/>
-                    </a:lnR>
-                    <a:lnT w="7620">
-                      <a:solidFill>
-                        <a:srgbClr val="626669"/>
-                      </a:solidFill>
-                      <a:prstDash val="solid"/>
-                    </a:lnT>
-                    <a:lnB w="7620">
-                      <a:noFill/>
-                    </a:lnB>
-                    <a:solidFill>
-                      <a:srgbClr val="FFFEF8"/>
-                    </a:solidFill>
-                  </a:tcPr>
-                </a:tc>
-                <a:tc>
-                  <a:txBody>
-                    <a:bodyPr wrap="square">
-                      <a:noAutofit/>
-                    </a:bodyPr>
-                    <a:lstStyle/>
-                    <a:p>
-                      <a:pPr algn="r">
-                        <a:lnSpc>
-                          <a:spcPts val="2529"/>
-                        </a:lnSpc>
-                        <a:buNone/>
-                        <a:defRPr sz="2200" b="0">
-                          <a:solidFill>
-                            <a:srgbClr val="303437"/>
-                          </a:solidFill>
-                          <a:latin typeface="Noto Sans"/>
-                        </a:defRPr>
-                      </a:pPr>
-                      <a:r>
-                        <a:rPr sz="2200" b="0" lang="ja-JP" altLang="en-US">
-                          <a:solidFill>
-                            <a:srgbClr val="303437"/>
-                          </a:solidFill>
-                          <a:latin typeface="Noto Sans"/>
-                          <a:ea typeface="Noto Sans CJK JP"/>
-                          <a:cs typeface="Noto Sans"/>
-                        </a:rPr>
-                        <a:t>84.87%</a:t>
-                      </a:r>
-                    </a:p>
-                  </a:txBody>
-                  <a:tcPr marL="63500" marR="63500" marT="38100" marB="38100" anchor="ctr">
-                    <a:lnL w="7620">
-                      <a:noFill/>
-                    </a:lnL>
-                    <a:lnR w="7620">
-                      <a:noFill/>
-                    </a:lnR>
-                    <a:lnT w="7620">
-                      <a:solidFill>
-                        <a:srgbClr val="626669"/>
-                      </a:solidFill>
-                      <a:prstDash val="solid"/>
-                    </a:lnT>
-                    <a:lnB w="7620">
-                      <a:noFill/>
-                    </a:lnB>
-                    <a:solidFill>
-                      <a:srgbClr val="FFFEF8"/>
-                    </a:solidFill>
-                  </a:tcPr>
-                </a:tc>
-              </a:tr>
-              <a:tr h="457200">
-                <a:tc>
-                  <a:txBody>
-                    <a:bodyPr wrap="square">
-                      <a:noAutofit/>
-                    </a:bodyPr>
-                    <a:lstStyle/>
-                    <a:p>
-                      <a:pPr algn="l">
-                        <a:lnSpc>
-                          <a:spcPts val="2529"/>
-                        </a:lnSpc>
-                        <a:buNone/>
-                        <a:defRPr sz="2200" b="0">
-                          <a:solidFill>
-                            <a:srgbClr val="303437"/>
-                          </a:solidFill>
-                          <a:latin typeface="Noto Sans"/>
-                        </a:defRPr>
-                      </a:pPr>
-                      <a:r>
-                        <a:rPr sz="2200" b="0" lang="ja-JP" altLang="en-US">
-                          <a:solidFill>
-                            <a:srgbClr val="303437"/>
-                          </a:solidFill>
-                          <a:latin typeface="Noto Sans"/>
-                          <a:ea typeface="Noto Sans CJK JP"/>
-                          <a:cs typeface="Noto Sans"/>
-                        </a:rPr>
-                        <a:t>text-davinci-003 (2022)</a:t>
-                      </a:r>
-                    </a:p>
-                  </a:txBody>
-                  <a:tcPr marL="63500" marR="63500" marT="38100" marB="38100" anchor="ctr">
-                    <a:lnL w="7620">
-                      <a:noFill/>
-                    </a:lnL>
-                    <a:lnR w="7620">
-                      <a:noFill/>
-                    </a:lnR>
-                    <a:lnT w="7620">
-                      <a:noFill/>
-                    </a:lnT>
-                    <a:lnB w="7620">
-                      <a:noFill/>
-                    </a:lnB>
-                    <a:solidFill>
-                      <a:srgbClr val="FFFEF8"/>
-                    </a:solidFill>
-                  </a:tcPr>
-                </a:tc>
-                <a:tc>
-                  <a:txBody>
-                    <a:bodyPr wrap="square">
-                      <a:noAutofit/>
-                    </a:bodyPr>
-                    <a:lstStyle/>
-                    <a:p>
-                      <a:pPr algn="r">
-                        <a:lnSpc>
-                          <a:spcPts val="2529"/>
-                        </a:lnSpc>
-                        <a:buNone/>
-                        <a:defRPr sz="2200" b="0">
-                          <a:solidFill>
-                            <a:srgbClr val="303437"/>
-                          </a:solidFill>
-                          <a:latin typeface="Noto Sans"/>
-                        </a:defRPr>
-                      </a:pPr>
-                      <a:r>
-                        <a:rPr sz="2200" b="0" lang="ja-JP" altLang="en-US">
-                          <a:solidFill>
-                            <a:srgbClr val="303437"/>
-                          </a:solidFill>
-                          <a:latin typeface="Noto Sans"/>
-                          <a:ea typeface="Noto Sans CJK JP"/>
-                          <a:cs typeface="Noto Sans"/>
-                        </a:rPr>
-                        <a:t>75.07%</a:t>
-                      </a:r>
-                    </a:p>
-                  </a:txBody>
-                  <a:tcPr marL="63500" marR="63500" marT="38100" marB="38100" anchor="ctr">
-                    <a:lnL w="7620">
-                      <a:noFill/>
-                    </a:lnL>
-                    <a:lnR w="7620">
-                      <a:noFill/>
-                    </a:lnR>
-                    <a:lnT w="7620">
-                      <a:noFill/>
-                    </a:lnT>
-                    <a:lnB w="7620">
-                      <a:noFill/>
-                    </a:lnB>
-                    <a:solidFill>
-                      <a:srgbClr val="FFFEF8"/>
-                    </a:solidFill>
-                  </a:tcPr>
-                </a:tc>
-              </a:tr>
-              <a:tr h="457200">
-                <a:tc>
-                  <a:txBody>
-                    <a:bodyPr wrap="square">
-                      <a:noAutofit/>
-                    </a:bodyPr>
-                    <a:lstStyle/>
-                    <a:p>
-                      <a:pPr algn="l">
-                        <a:lnSpc>
-                          <a:spcPts val="2529"/>
-                        </a:lnSpc>
-                        <a:buNone/>
-                        <a:defRPr sz="2200" b="0">
-                          <a:solidFill>
-                            <a:srgbClr val="303437"/>
-                          </a:solidFill>
-                          <a:latin typeface="Noto Sans"/>
-                        </a:defRPr>
-                      </a:pPr>
-                      <a:r>
-                        <a:rPr sz="2200" b="0" lang="ja-JP" altLang="en-US">
-                          <a:solidFill>
-                            <a:srgbClr val="303437"/>
-                          </a:solidFill>
-                          <a:latin typeface="Noto Sans"/>
-                          <a:ea typeface="Noto Sans CJK JP"/>
-                          <a:cs typeface="Noto Sans"/>
-                        </a:rPr>
-                        <a:t>OPT-175B (2022)</a:t>
-                      </a:r>
-                    </a:p>
-                  </a:txBody>
-                  <a:tcPr marL="63500" marR="63500" marT="38100" marB="38100" anchor="ctr">
-                    <a:lnL w="7620">
-                      <a:noFill/>
-                    </a:lnL>
-                    <a:lnR w="7620">
-                      <a:noFill/>
-                    </a:lnR>
-                    <a:lnT w="7620">
-                      <a:noFill/>
-                    </a:lnT>
-                    <a:lnB w="15240">
-                      <a:solidFill>
-                        <a:srgbClr val="626669"/>
-                      </a:solidFill>
-                      <a:prstDash val="solid"/>
-                    </a:lnB>
-                    <a:solidFill>
-                      <a:srgbClr val="FFFEF8"/>
-                    </a:solidFill>
-                  </a:tcPr>
-                </a:tc>
-                <a:tc>
-                  <a:txBody>
-                    <a:bodyPr wrap="square">
-                      <a:noAutofit/>
-                    </a:bodyPr>
-                    <a:lstStyle/>
-                    <a:p>
-                      <a:pPr algn="r">
-                        <a:lnSpc>
-                          <a:spcPts val="2529"/>
-                        </a:lnSpc>
-                        <a:buNone/>
-                        <a:defRPr sz="2200" b="0">
-                          <a:solidFill>
-                            <a:srgbClr val="303437"/>
-                          </a:solidFill>
-                          <a:latin typeface="Noto Sans"/>
-                        </a:defRPr>
-                      </a:pPr>
-                      <a:r>
-                        <a:rPr sz="2200" b="0" lang="ja-JP" altLang="en-US">
-                          <a:solidFill>
-                            <a:srgbClr val="303437"/>
-                          </a:solidFill>
-                          <a:latin typeface="Noto Sans"/>
-                          <a:ea typeface="Noto Sans CJK JP"/>
-                          <a:cs typeface="Noto Sans"/>
-                        </a:rPr>
-                        <a:t>49.40%</a:t>
-                      </a:r>
-                    </a:p>
-                  </a:txBody>
-                  <a:tcPr marL="63500" marR="63500" marT="38100" marB="38100" anchor="ctr">
-                    <a:lnL w="7620">
-                      <a:noFill/>
-                    </a:lnL>
-                    <a:lnR w="7620">
-                      <a:noFill/>
-                    </a:lnR>
-                    <a:lnT w="7620">
-                      <a:noFill/>
-                    </a:lnT>
-                    <a:lnB w="15240">
-                      <a:solidFill>
-                        <a:srgbClr val="626669"/>
-                      </a:solidFill>
-                      <a:prstDash val="solid"/>
-                    </a:lnB>
-                    <a:solidFill>
-                      <a:srgbClr val="FFFEF8"/>
-                    </a:solidFill>
-                  </a:tcPr>
-                </a:tc>
-              </a:tr>
-            </a:tbl>
-          </a:graphicData>
-        </a:graphic>
-      </p:graphicFrame>
-      <p:sp>
-        <p:nvSpPr>
-          <p:cNvPr id="5" name="TextBox 4"/>
-          <p:cNvSpPr txBox="1"/>
-          <p:nvPr/>
-        </p:nvSpPr>
-        <p:spPr>
-          <a:xfrm>
-            <a:off x="594360" y="3538728"/>
-            <a:ext cx="7955279" cy="658368"/>
-          </a:xfrm>
-          <a:prstGeom prst="rect">
-            <a:avLst/>
-          </a:prstGeom>
-          <a:noFill/>
-        </p:spPr>
-        <p:txBody>
-          <a:bodyPr wrap="square" lIns="0" rIns="0" tIns="0" bIns="0">
-            <a:noAutofit/>
-          </a:bodyPr>
-          <a:lstStyle/>
-          <a:p>
-            <a:pPr algn="l">
-              <a:lnSpc>
-                <a:spcPts val="2047"/>
-              </a:lnSpc>
-              <a:spcBef>
-                <a:spcPts val="0"/>
-              </a:spcBef>
-              <a:spcAft>
-                <a:spcPts val="0"/>
-              </a:spcAft>
-              <a:buNone/>
-              <a:defRPr sz="1750" b="0">
-                <a:solidFill>
-                  <a:srgbClr val="303437"/>
-                </a:solidFill>
-                <a:latin typeface="Noto Sans"/>
-              </a:defRPr>
-            </a:pPr>
-            <a:r>
-              <a:rPr sz="1750" b="0" lang="ja-JP" altLang="en-US">
-                <a:solidFill>
-                  <a:srgbClr val="303437"/>
-                </a:solidFill>
-                <a:latin typeface="Noto Sans"/>
-                <a:ea typeface="Noto Sans CJK JP"/>
-                <a:cs typeface="Noto Sans"/>
-              </a:rPr>
-              <a:t>test 500件、各3試行の平均。Classic v0.4.0掲載、run suite v0.3.0。</a:t>
-            </a:r>
-          </a:p>
-        </p:txBody>
-      </p:sp>
-      <p:sp>
-        <p:nvSpPr>
-          <p:cNvPr id="6" name="sources"/>
-          <p:cNvSpPr txBox="1"/>
-          <p:nvPr/>
-        </p:nvSpPr>
-        <p:spPr>
-          <a:xfrm>
-            <a:off x="502920" y="4700016"/>
-            <a:ext cx="8183879" cy="621792"/>
-          </a:xfrm>
-          <a:prstGeom prst="rect">
-            <a:avLst/>
-          </a:prstGeom>
-          <a:noFill/>
-        </p:spPr>
-        <p:txBody>
-          <a:bodyPr wrap="square" lIns="0" rIns="0" tIns="0" bIns="0">
-            <a:noAutofit/>
-          </a:bodyPr>
-          <a:lstStyle/>
-          <a:p>
-            <a:pPr algn="l">
-              <a:lnSpc>
-                <a:spcPts val="1200"/>
-              </a:lnSpc>
-              <a:spcBef>
-                <a:spcPts val="0"/>
-              </a:spcBef>
-              <a:spcAft>
-                <a:spcPts val="0"/>
-              </a:spcAft>
-              <a:buNone/>
-              <a:defRPr sz="810" b="0">
-                <a:solidFill>
-                  <a:srgbClr val="303437"/>
-                </a:solidFill>
-                <a:latin typeface="Noto Sans"/>
-              </a:defRPr>
-            </a:pPr>
-            <a:r>
-              <a:rPr sz="810" b="0" lang="ja-JP" altLang="en-US">
-                <a:solidFill>
-                  <a:srgbClr val="626669"/>
-                </a:solidFill>
-                <a:latin typeface="Noto Sans"/>
-                <a:ea typeface="Noto Sans CJK JP"/>
-                <a:cs typeface="Noto Sans"/>
-              </a:rPr>
-              <a:t>[1] HELM Classic v0.4.0, Dyck Language. 公開run suite v0.3.0、括弧3種類。</a:t>
-            </a:r>
-            <a:r>
-              <a:rPr sz="810" b="0" lang="ja-JP" altLang="en-US">
-                <a:solidFill>
-                  <a:srgbClr val="626669"/>
-                </a:solidFill>
-                <a:latin typeface="Noto Sans"/>
-                <a:ea typeface="Noto Sans CJK JP"/>
-                <a:cs typeface="Noto Sans"/>
-              </a:rPr>
-              <a:t>  </a:t>
-            </a:r>
-            <a:r>
-              <a:rPr sz="810" b="0" lang="ja-JP" altLang="en-US">
-                <a:solidFill>
-                  <a:srgbClr val="626669"/>
-                </a:solidFill>
-                <a:latin typeface="Noto Sans"/>
-                <a:ea typeface="Noto Sans CJK JP"/>
-                <a:cs typeface="Noto Sans"/>
-                <a:hlinkClick r:id="rId2"/>
-              </a:rPr>
-              <a:t>https://crfm.stanford.edu/helm/classic/v0.4.0/#/groups/dyck_language</a:t>
-            </a:r>
-          </a:p>
-        </p:txBody>
-      </p:sp>
-    </p:spTree>
-  </p:cSld>
-  <p:clrMapOvr>
-    <a:masterClrMapping/>
-  </p:clrMapOvr>
-</p:sld>
-</file>
-
-<file path=ppt/slides/slide16.xml><?xml version="1.0" encoding="utf-8"?>
-<p:sld xmlns:a="http://schemas.openxmlformats.org/drawingml/2006/main" xmlns:p="http://schemas.openxmlformats.org/presentationml/2006/main" xmlns:r="http://schemas.openxmlformats.org/officeDocument/2006/relationships">
-  <p:cSld>
-    <p:spTree>
-      <p:nvGrpSpPr>
-        <p:cNvPr id="1" name=""/>
-        <p:cNvGrpSpPr/>
-        <p:nvPr/>
-      </p:nvGrpSpPr>
-      <p:grpSpPr/>
-      <p:sp>
-        <p:nvSpPr>
-          <p:cNvPr id="2" name="Title 1"/>
-          <p:cNvSpPr>
-            <a:spLocks noGrp="1"/>
-          </p:cNvSpPr>
-          <p:nvPr>
-            <p:ph type="title"/>
-          </p:nvPr>
-        </p:nvSpPr>
-        <p:spPr>
-          <a:xfrm>
-            <a:off x="468172" y="650138"/>
-            <a:ext cx="8206740" cy="616305"/>
-          </a:xfrm>
-        </p:spPr>
-        <p:txBody>
-          <a:bodyPr wrap="square" lIns="0" rIns="0" tIns="0" bIns="0">
-            <a:noAutofit/>
-          </a:bodyPr>
-          <a:lstStyle/>
-          <a:p>
-            <a:pPr algn="l">
-              <a:lnSpc>
-                <a:spcPct val="110000"/>
-              </a:lnSpc>
-              <a:buNone/>
-              <a:defRPr sz="2800" b="0">
-                <a:solidFill>
-                  <a:srgbClr val="303437"/>
-                </a:solidFill>
-                <a:latin typeface="Noto Sans"/>
-              </a:defRPr>
-            </a:pPr>
-            <a:r>
-              <a:rPr sz="2800" b="1" lang="ja-JP" altLang="en-US">
-                <a:solidFill>
-                  <a:srgbClr val="303437"/>
-                </a:solidFill>
-                <a:latin typeface="Noto Sans"/>
-                <a:ea typeface="Noto Sans CJK JP"/>
-                <a:cs typeface="Noto Sans"/>
-              </a:rPr>
-              <a:t>同じ公開出力を、列全体でも再採点する</a:t>
-            </a:r>
-          </a:p>
-        </p:txBody>
-      </p:sp>
-      <p:sp>
-        <p:nvSpPr>
-          <p:cNvPr id="3" name="Title 2"/>
-          <p:cNvSpPr>
-            <a:spLocks noGrp="1"/>
-          </p:cNvSpPr>
-          <p:nvPr>
-            <p:ph type="title" idx="2"/>
-          </p:nvPr>
-        </p:nvSpPr>
-        <p:spPr>
-          <a:xfrm>
-            <a:off x="75895" y="0"/>
-            <a:ext cx="8115300" cy="480060"/>
-          </a:xfrm>
-        </p:spPr>
-        <p:txBody>
-          <a:bodyPr wrap="square" lIns="0" rIns="0" tIns="0" bIns="0" anchor="ctr">
-            <a:noAutofit/>
-          </a:bodyPr>
-          <a:lstStyle/>
-          <a:p>
-            <a:pPr algn="l">
-              <a:lnSpc>
-                <a:spcPct val="110000"/>
-              </a:lnSpc>
-              <a:buNone/>
-              <a:defRPr sz="1400" b="0">
-                <a:solidFill>
-                  <a:srgbClr val="303437"/>
-                </a:solidFill>
-                <a:latin typeface="Noto Sans"/>
-              </a:defRPr>
-            </a:pPr>
-            <a:r>
-              <a:rPr sz="1400" b="1" lang="ja-JP" altLang="en-US">
-                <a:solidFill>
-                  <a:srgbClr val="FFFEF8"/>
-                </a:solidFill>
-                <a:latin typeface="Noto Sans"/>
-                <a:ea typeface="Noto Sans CJK JP"/>
-                <a:cs typeface="Noto Sans"/>
-              </a:rPr>
-              <a:t>2. HELMの採点と公開成績</a:t>
-            </a:r>
-          </a:p>
-        </p:txBody>
-      </p:sp>
-      <p:graphicFrame>
-        <p:nvGraphicFramePr>
-          <p:cNvPr id="4" name="Table 3"/>
-          <p:cNvGraphicFramePr>
-            <a:graphicFrameLocks noGrp="1"/>
-          </p:cNvGraphicFramePr>
-          <p:nvPr/>
-        </p:nvGraphicFramePr>
-        <p:xfrm>
-          <a:off x="548640" y="1508760"/>
-          <a:ext cx="8046720" cy="2286000"/>
-        </p:xfrm>
-        <a:graphic>
-          <a:graphicData uri="http://schemas.openxmlformats.org/drawingml/2006/table">
-            <a:tbl>
-              <a:tblPr firstRow="0" bandRow="0"/>
-              <a:tblGrid>
-                <a:gridCol w="3474720"/>
-                <a:gridCol w="2286000"/>
-                <a:gridCol w="2286000"/>
-              </a:tblGrid>
-              <a:tr h="457200">
-                <a:tc>
-                  <a:txBody>
-                    <a:bodyPr wrap="square">
-                      <a:noAutofit/>
-                    </a:bodyPr>
-                    <a:lstStyle/>
-                    <a:p>
-                      <a:pPr algn="l">
-                        <a:lnSpc>
-                          <a:spcPts val="2300"/>
-                        </a:lnSpc>
-                        <a:buNone/>
-                        <a:defRPr sz="2000" b="0">
-                          <a:solidFill>
-                            <a:srgbClr val="303437"/>
-                          </a:solidFill>
-                          <a:latin typeface="Noto Sans"/>
-                        </a:defRPr>
-                      </a:pPr>
-                      <a:r>
-                        <a:rPr sz="2000" b="0" lang="ja-JP" altLang="en-US">
-                          <a:solidFill>
-                            <a:srgbClr val="303437"/>
-                          </a:solidFill>
-                          <a:latin typeface="Noto Sans"/>
-                          <a:ea typeface="Noto Sans CJK JP"/>
-                          <a:cs typeface="Noto Sans"/>
-                        </a:rPr>
-                        <a:t>text-davinci-003</a:t>
-                      </a:r>
-                    </a:p>
-                  </a:txBody>
-                  <a:tcPr marL="63500" marR="63500" marT="38100" marB="38100" anchor="ctr">
-                    <a:lnL w="7620">
-                      <a:noFill/>
-                    </a:lnL>
-                    <a:lnR w="7620">
-                      <a:noFill/>
-                    </a:lnR>
-                    <a:lnT w="15240">
-                      <a:solidFill>
-                        <a:srgbClr val="626669"/>
-                      </a:solidFill>
-                      <a:prstDash val="solid"/>
-                    </a:lnT>
-                    <a:lnB w="7620">
-                      <a:solidFill>
-                        <a:srgbClr val="626669"/>
-                      </a:solidFill>
-                      <a:prstDash val="solid"/>
-                    </a:lnB>
-                    <a:solidFill>
-                      <a:srgbClr val="FFFEF8"/>
-                    </a:solidFill>
-                  </a:tcPr>
-                </a:tc>
-                <a:tc>
-                  <a:txBody>
-                    <a:bodyPr wrap="square">
-                      <a:noAutofit/>
-                    </a:bodyPr>
-                    <a:lstStyle/>
-                    <a:p>
-                      <a:pPr algn="r">
-                        <a:lnSpc>
-                          <a:spcPts val="2300"/>
-                        </a:lnSpc>
-                        <a:buNone/>
-                        <a:defRPr sz="2000" b="0">
-                          <a:solidFill>
-                            <a:srgbClr val="303437"/>
-                          </a:solidFill>
-                          <a:latin typeface="Noto Sans"/>
-                        </a:defRPr>
-                      </a:pPr>
-                      <a:r>
-                        <a:rPr sz="2000" b="0" lang="ja-JP" altLang="en-US">
-                          <a:solidFill>
-                            <a:srgbClr val="303437"/>
-                          </a:solidFill>
-                          <a:latin typeface="Noto Sans"/>
-                          <a:ea typeface="Noto Sans CJK JP"/>
-                          <a:cs typeface="Noto Sans"/>
-                        </a:rPr>
-                        <a:t>末尾要素</a:t>
-                      </a:r>
-                    </a:p>
-                  </a:txBody>
-                  <a:tcPr marL="63500" marR="63500" marT="38100" marB="38100" anchor="ctr">
-                    <a:lnL w="7620">
-                      <a:noFill/>
-                    </a:lnL>
-                    <a:lnR w="7620">
-                      <a:noFill/>
-                    </a:lnR>
-                    <a:lnT w="15240">
-                      <a:solidFill>
-                        <a:srgbClr val="626669"/>
-                      </a:solidFill>
-                      <a:prstDash val="solid"/>
-                    </a:lnT>
-                    <a:lnB w="7620">
-                      <a:solidFill>
-                        <a:srgbClr val="626669"/>
-                      </a:solidFill>
-                      <a:prstDash val="solid"/>
-                    </a:lnB>
-                    <a:solidFill>
-                      <a:srgbClr val="FFFEF8"/>
-                    </a:solidFill>
-                  </a:tcPr>
-                </a:tc>
-                <a:tc>
-                  <a:txBody>
-                    <a:bodyPr wrap="square">
-                      <a:noAutofit/>
-                    </a:bodyPr>
-                    <a:lstStyle/>
-                    <a:p>
-                      <a:pPr algn="r">
-                        <a:lnSpc>
-                          <a:spcPts val="2300"/>
-                        </a:lnSpc>
-                        <a:buNone/>
-                        <a:defRPr sz="2000" b="0">
-                          <a:solidFill>
-                            <a:srgbClr val="303437"/>
-                          </a:solidFill>
-                          <a:latin typeface="Noto Sans"/>
-                        </a:defRPr>
-                      </a:pPr>
-                      <a:r>
-                        <a:rPr sz="2000" b="0" lang="ja-JP" altLang="en-US">
-                          <a:solidFill>
-                            <a:srgbClr val="303437"/>
-                          </a:solidFill>
-                          <a:latin typeface="Noto Sans"/>
-                          <a:ea typeface="Noto Sans CJK JP"/>
-                          <a:cs typeface="Noto Sans"/>
-                        </a:rPr>
-                        <a:t>列全体</a:t>
-                      </a:r>
-                    </a:p>
-                  </a:txBody>
-                  <a:tcPr marL="63500" marR="63500" marT="38100" marB="38100" anchor="ctr">
-                    <a:lnL w="7620">
-                      <a:noFill/>
-                    </a:lnL>
-                    <a:lnR w="7620">
-                      <a:noFill/>
-                    </a:lnR>
-                    <a:lnT w="15240">
-                      <a:solidFill>
-                        <a:srgbClr val="626669"/>
-                      </a:solidFill>
-                      <a:prstDash val="solid"/>
-                    </a:lnT>
-                    <a:lnB w="7620">
-                      <a:solidFill>
-                        <a:srgbClr val="626669"/>
-                      </a:solidFill>
-                      <a:prstDash val="solid"/>
-                    </a:lnB>
-                    <a:solidFill>
-                      <a:srgbClr val="FFFEF8"/>
-                    </a:solidFill>
-                  </a:tcPr>
-                </a:tc>
-              </a:tr>
-              <a:tr h="457200">
-                <a:tc>
-                  <a:txBody>
-                    <a:bodyPr wrap="square">
-                      <a:noAutofit/>
-                    </a:bodyPr>
-                    <a:lstStyle/>
-                    <a:p>
-                      <a:pPr algn="l">
-                        <a:lnSpc>
-                          <a:spcPts val="2300"/>
-                        </a:lnSpc>
-                        <a:buNone/>
-                        <a:defRPr sz="2000" b="0">
-                          <a:solidFill>
-                            <a:srgbClr val="303437"/>
-                          </a:solidFill>
-                          <a:latin typeface="Noto Sans"/>
-                        </a:defRPr>
-                      </a:pPr>
-                      <a:r>
-                        <a:rPr sz="2000" b="0" lang="ja-JP" altLang="en-US">
-                          <a:solidFill>
-                            <a:srgbClr val="303437"/>
-                          </a:solidFill>
-                          <a:latin typeface="Noto Sans"/>
-                          <a:ea typeface="Noto Sans CJK JP"/>
-                          <a:cs typeface="Noto Sans"/>
-                        </a:rPr>
-                        <a:t>試行0</a:t>
-                      </a:r>
-                    </a:p>
-                  </a:txBody>
-                  <a:tcPr marL="63500" marR="63500" marT="38100" marB="38100" anchor="ctr">
-                    <a:lnL w="7620">
-                      <a:noFill/>
-                    </a:lnL>
-                    <a:lnR w="7620">
-                      <a:noFill/>
-                    </a:lnR>
-                    <a:lnT w="7620">
-                      <a:solidFill>
-                        <a:srgbClr val="626669"/>
-                      </a:solidFill>
-                      <a:prstDash val="solid"/>
-                    </a:lnT>
-                    <a:lnB w="7620">
-                      <a:noFill/>
-                    </a:lnB>
-                    <a:solidFill>
-                      <a:srgbClr val="FFFEF8"/>
-                    </a:solidFill>
-                  </a:tcPr>
-                </a:tc>
-                <a:tc>
-                  <a:txBody>
-                    <a:bodyPr wrap="square">
-                      <a:noAutofit/>
-                    </a:bodyPr>
-                    <a:lstStyle/>
-                    <a:p>
-                      <a:pPr algn="r">
-                        <a:lnSpc>
-                          <a:spcPts val="2300"/>
-                        </a:lnSpc>
-                        <a:buNone/>
-                        <a:defRPr sz="2000" b="0">
-                          <a:solidFill>
-                            <a:srgbClr val="303437"/>
-                          </a:solidFill>
-                          <a:latin typeface="Noto Sans"/>
-                        </a:defRPr>
-                      </a:pPr>
-                      <a:r>
-                        <a:rPr sz="2000" b="0" lang="ja-JP" altLang="en-US">
-                          <a:solidFill>
-                            <a:srgbClr val="303437"/>
-                          </a:solidFill>
-                          <a:latin typeface="Noto Sans"/>
-                          <a:ea typeface="Noto Sans CJK JP"/>
-                          <a:cs typeface="Noto Sans"/>
-                        </a:rPr>
-                        <a:t>73.2%</a:t>
-                      </a:r>
-                    </a:p>
-                  </a:txBody>
-                  <a:tcPr marL="63500" marR="63500" marT="38100" marB="38100" anchor="ctr">
-                    <a:lnL w="7620">
-                      <a:noFill/>
-                    </a:lnL>
-                    <a:lnR w="7620">
-                      <a:noFill/>
-                    </a:lnR>
-                    <a:lnT w="7620">
-                      <a:solidFill>
-                        <a:srgbClr val="626669"/>
-                      </a:solidFill>
-                      <a:prstDash val="solid"/>
-                    </a:lnT>
-                    <a:lnB w="7620">
-                      <a:noFill/>
-                    </a:lnB>
-                    <a:solidFill>
-                      <a:srgbClr val="FFFEF8"/>
-                    </a:solidFill>
-                  </a:tcPr>
-                </a:tc>
-                <a:tc>
-                  <a:txBody>
-                    <a:bodyPr wrap="square">
-                      <a:noAutofit/>
-                    </a:bodyPr>
-                    <a:lstStyle/>
-                    <a:p>
-                      <a:pPr algn="r">
-                        <a:lnSpc>
-                          <a:spcPts val="2300"/>
-                        </a:lnSpc>
-                        <a:buNone/>
-                        <a:defRPr sz="2000" b="0">
-                          <a:solidFill>
-                            <a:srgbClr val="303437"/>
-                          </a:solidFill>
-                          <a:latin typeface="Noto Sans"/>
-                        </a:defRPr>
-                      </a:pPr>
-                      <a:r>
-                        <a:rPr sz="2000" b="0" lang="ja-JP" altLang="en-US">
-                          <a:solidFill>
-                            <a:srgbClr val="303437"/>
-                          </a:solidFill>
-                          <a:latin typeface="Noto Sans"/>
-                          <a:ea typeface="Noto Sans CJK JP"/>
-                          <a:cs typeface="Noto Sans"/>
-                        </a:rPr>
-                        <a:t>40.6%</a:t>
-                      </a:r>
-                    </a:p>
-                  </a:txBody>
-                  <a:tcPr marL="63500" marR="63500" marT="38100" marB="38100" anchor="ctr">
-                    <a:lnL w="7620">
-                      <a:noFill/>
-                    </a:lnL>
-                    <a:lnR w="7620">
-                      <a:noFill/>
-                    </a:lnR>
-                    <a:lnT w="7620">
-                      <a:solidFill>
-                        <a:srgbClr val="626669"/>
-                      </a:solidFill>
-                      <a:prstDash val="solid"/>
-                    </a:lnT>
-                    <a:lnB w="7620">
-                      <a:noFill/>
-                    </a:lnB>
-                    <a:solidFill>
-                      <a:srgbClr val="FFFEF8"/>
-                    </a:solidFill>
-                  </a:tcPr>
-                </a:tc>
-              </a:tr>
-              <a:tr h="457200">
-                <a:tc>
-                  <a:txBody>
-                    <a:bodyPr wrap="square">
-                      <a:noAutofit/>
-                    </a:bodyPr>
-                    <a:lstStyle/>
-                    <a:p>
-                      <a:pPr algn="l">
-                        <a:lnSpc>
-                          <a:spcPts val="2300"/>
-                        </a:lnSpc>
-                        <a:buNone/>
-                        <a:defRPr sz="2000" b="0">
-                          <a:solidFill>
-                            <a:srgbClr val="303437"/>
-                          </a:solidFill>
-                          <a:latin typeface="Noto Sans"/>
-                        </a:defRPr>
-                      </a:pPr>
-                      <a:r>
-                        <a:rPr sz="2000" b="0" lang="ja-JP" altLang="en-US">
-                          <a:solidFill>
-                            <a:srgbClr val="303437"/>
-                          </a:solidFill>
-                          <a:latin typeface="Noto Sans"/>
-                          <a:ea typeface="Noto Sans CJK JP"/>
-                          <a:cs typeface="Noto Sans"/>
-                        </a:rPr>
-                        <a:t>試行1</a:t>
-                      </a:r>
-                    </a:p>
-                  </a:txBody>
-                  <a:tcPr marL="63500" marR="63500" marT="38100" marB="38100" anchor="ctr">
-                    <a:lnL w="7620">
-                      <a:noFill/>
-                    </a:lnL>
-                    <a:lnR w="7620">
-                      <a:noFill/>
-                    </a:lnR>
-                    <a:lnT w="7620">
-                      <a:noFill/>
-                    </a:lnT>
-                    <a:lnB w="7620">
-                      <a:noFill/>
-                    </a:lnB>
-                    <a:solidFill>
-                      <a:srgbClr val="FFFEF8"/>
-                    </a:solidFill>
-                  </a:tcPr>
-                </a:tc>
-                <a:tc>
-                  <a:txBody>
-                    <a:bodyPr wrap="square">
-                      <a:noAutofit/>
-                    </a:bodyPr>
-                    <a:lstStyle/>
-                    <a:p>
-                      <a:pPr algn="r">
-                        <a:lnSpc>
-                          <a:spcPts val="2300"/>
-                        </a:lnSpc>
-                        <a:buNone/>
-                        <a:defRPr sz="2000" b="0">
-                          <a:solidFill>
-                            <a:srgbClr val="303437"/>
-                          </a:solidFill>
-                          <a:latin typeface="Noto Sans"/>
-                        </a:defRPr>
-                      </a:pPr>
-                      <a:r>
-                        <a:rPr sz="2000" b="0" lang="ja-JP" altLang="en-US">
-                          <a:solidFill>
-                            <a:srgbClr val="303437"/>
-                          </a:solidFill>
-                          <a:latin typeface="Noto Sans"/>
-                          <a:ea typeface="Noto Sans CJK JP"/>
-                          <a:cs typeface="Noto Sans"/>
-                        </a:rPr>
-                        <a:t>76.0%</a:t>
-                      </a:r>
-                    </a:p>
-                  </a:txBody>
-                  <a:tcPr marL="63500" marR="63500" marT="38100" marB="38100" anchor="ctr">
-                    <a:lnL w="7620">
-                      <a:noFill/>
-                    </a:lnL>
-                    <a:lnR w="7620">
-                      <a:noFill/>
-                    </a:lnR>
-                    <a:lnT w="7620">
-                      <a:noFill/>
-                    </a:lnT>
-                    <a:lnB w="7620">
-                      <a:noFill/>
-                    </a:lnB>
-                    <a:solidFill>
-                      <a:srgbClr val="FFFEF8"/>
-                    </a:solidFill>
-                  </a:tcPr>
-                </a:tc>
-                <a:tc>
-                  <a:txBody>
-                    <a:bodyPr wrap="square">
-                      <a:noAutofit/>
-                    </a:bodyPr>
-                    <a:lstStyle/>
-                    <a:p>
-                      <a:pPr algn="r">
-                        <a:lnSpc>
-                          <a:spcPts val="2300"/>
-                        </a:lnSpc>
-                        <a:buNone/>
-                        <a:defRPr sz="2000" b="0">
-                          <a:solidFill>
-                            <a:srgbClr val="303437"/>
-                          </a:solidFill>
-                          <a:latin typeface="Noto Sans"/>
-                        </a:defRPr>
-                      </a:pPr>
-                      <a:r>
-                        <a:rPr sz="2000" b="0" lang="ja-JP" altLang="en-US">
-                          <a:solidFill>
-                            <a:srgbClr val="303437"/>
-                          </a:solidFill>
-                          <a:latin typeface="Noto Sans"/>
-                          <a:ea typeface="Noto Sans CJK JP"/>
-                          <a:cs typeface="Noto Sans"/>
-                        </a:rPr>
-                        <a:t>49.2%</a:t>
-                      </a:r>
-                    </a:p>
-                  </a:txBody>
-                  <a:tcPr marL="63500" marR="63500" marT="38100" marB="38100" anchor="ctr">
-                    <a:lnL w="7620">
-                      <a:noFill/>
-                    </a:lnL>
-                    <a:lnR w="7620">
-                      <a:noFill/>
-                    </a:lnR>
-                    <a:lnT w="7620">
-                      <a:noFill/>
-                    </a:lnT>
-                    <a:lnB w="7620">
-                      <a:noFill/>
-                    </a:lnB>
-                    <a:solidFill>
-                      <a:srgbClr val="FFFEF8"/>
-                    </a:solidFill>
-                  </a:tcPr>
-                </a:tc>
-              </a:tr>
-              <a:tr h="457200">
-                <a:tc>
-                  <a:txBody>
-                    <a:bodyPr wrap="square">
-                      <a:noAutofit/>
-                    </a:bodyPr>
-                    <a:lstStyle/>
-                    <a:p>
-                      <a:pPr algn="l">
-                        <a:lnSpc>
-                          <a:spcPts val="2300"/>
-                        </a:lnSpc>
-                        <a:buNone/>
-                        <a:defRPr sz="2000" b="0">
-                          <a:solidFill>
-                            <a:srgbClr val="303437"/>
-                          </a:solidFill>
-                          <a:latin typeface="Noto Sans"/>
-                        </a:defRPr>
-                      </a:pPr>
-                      <a:r>
-                        <a:rPr sz="2000" b="0" lang="ja-JP" altLang="en-US">
-                          <a:solidFill>
-                            <a:srgbClr val="303437"/>
-                          </a:solidFill>
-                          <a:latin typeface="Noto Sans"/>
-                          <a:ea typeface="Noto Sans CJK JP"/>
-                          <a:cs typeface="Noto Sans"/>
-                        </a:rPr>
-                        <a:t>試行2</a:t>
-                      </a:r>
-                    </a:p>
-                  </a:txBody>
-                  <a:tcPr marL="63500" marR="63500" marT="38100" marB="38100" anchor="ctr">
-                    <a:lnL w="7620">
-                      <a:noFill/>
-                    </a:lnL>
-                    <a:lnR w="7620">
-                      <a:noFill/>
-                    </a:lnR>
-                    <a:lnT w="7620">
-                      <a:noFill/>
-                    </a:lnT>
-                    <a:lnB w="7620">
-                      <a:noFill/>
-                    </a:lnB>
-                    <a:solidFill>
-                      <a:srgbClr val="FFFEF8"/>
-                    </a:solidFill>
-                  </a:tcPr>
-                </a:tc>
-                <a:tc>
-                  <a:txBody>
-                    <a:bodyPr wrap="square">
-                      <a:noAutofit/>
-                    </a:bodyPr>
-                    <a:lstStyle/>
-                    <a:p>
-                      <a:pPr algn="r">
-                        <a:lnSpc>
-                          <a:spcPts val="2300"/>
-                        </a:lnSpc>
-                        <a:buNone/>
-                        <a:defRPr sz="2000" b="0">
-                          <a:solidFill>
-                            <a:srgbClr val="303437"/>
-                          </a:solidFill>
-                          <a:latin typeface="Noto Sans"/>
-                        </a:defRPr>
-                      </a:pPr>
-                      <a:r>
-                        <a:rPr sz="2000" b="0" lang="ja-JP" altLang="en-US">
-                          <a:solidFill>
-                            <a:srgbClr val="303437"/>
-                          </a:solidFill>
-                          <a:latin typeface="Noto Sans"/>
-                          <a:ea typeface="Noto Sans CJK JP"/>
-                          <a:cs typeface="Noto Sans"/>
-                        </a:rPr>
-                        <a:t>76.0%</a:t>
-                      </a:r>
-                    </a:p>
-                  </a:txBody>
-                  <a:tcPr marL="63500" marR="63500" marT="38100" marB="38100" anchor="ctr">
-                    <a:lnL w="7620">
-                      <a:noFill/>
-                    </a:lnL>
-                    <a:lnR w="7620">
-                      <a:noFill/>
-                    </a:lnR>
-                    <a:lnT w="7620">
-                      <a:noFill/>
-                    </a:lnT>
-                    <a:lnB w="7620">
-                      <a:noFill/>
-                    </a:lnB>
-                    <a:solidFill>
-                      <a:srgbClr val="FFFEF8"/>
-                    </a:solidFill>
-                  </a:tcPr>
-                </a:tc>
-                <a:tc>
-                  <a:txBody>
-                    <a:bodyPr wrap="square">
-                      <a:noAutofit/>
-                    </a:bodyPr>
-                    <a:lstStyle/>
-                    <a:p>
-                      <a:pPr algn="r">
-                        <a:lnSpc>
-                          <a:spcPts val="2300"/>
-                        </a:lnSpc>
-                        <a:buNone/>
-                        <a:defRPr sz="2000" b="0">
-                          <a:solidFill>
-                            <a:srgbClr val="303437"/>
-                          </a:solidFill>
-                          <a:latin typeface="Noto Sans"/>
-                        </a:defRPr>
-                      </a:pPr>
-                      <a:r>
-                        <a:rPr sz="2000" b="0" lang="ja-JP" altLang="en-US">
-                          <a:solidFill>
-                            <a:srgbClr val="303437"/>
-                          </a:solidFill>
-                          <a:latin typeface="Noto Sans"/>
-                          <a:ea typeface="Noto Sans CJK JP"/>
-                          <a:cs typeface="Noto Sans"/>
-                        </a:rPr>
-                        <a:t>49.2%</a:t>
-                      </a:r>
-                    </a:p>
-                  </a:txBody>
-                  <a:tcPr marL="63500" marR="63500" marT="38100" marB="38100" anchor="ctr">
-                    <a:lnL w="7620">
-                      <a:noFill/>
-                    </a:lnL>
-                    <a:lnR w="7620">
-                      <a:noFill/>
-                    </a:lnR>
-                    <a:lnT w="7620">
-                      <a:noFill/>
-                    </a:lnT>
-                    <a:lnB w="7620">
-                      <a:noFill/>
-                    </a:lnB>
-                    <a:solidFill>
-                      <a:srgbClr val="FFFEF8"/>
-                    </a:solidFill>
-                  </a:tcPr>
-                </a:tc>
-              </a:tr>
-              <a:tr h="457200">
-                <a:tc>
-                  <a:txBody>
-                    <a:bodyPr wrap="square">
-                      <a:noAutofit/>
-                    </a:bodyPr>
-                    <a:lstStyle/>
-                    <a:p>
-                      <a:pPr algn="l">
-                        <a:lnSpc>
-                          <a:spcPts val="2300"/>
-                        </a:lnSpc>
-                        <a:buNone/>
-                        <a:defRPr sz="2000" b="0">
-                          <a:solidFill>
-                            <a:srgbClr val="303437"/>
-                          </a:solidFill>
-                          <a:latin typeface="Noto Sans"/>
-                        </a:defRPr>
-                      </a:pPr>
-                      <a:r>
-                        <a:rPr sz="2000" b="0" lang="ja-JP" altLang="en-US">
-                          <a:solidFill>
-                            <a:srgbClr val="303437"/>
-                          </a:solidFill>
-                          <a:latin typeface="Noto Sans"/>
-                          <a:ea typeface="Noto Sans CJK JP"/>
-                          <a:cs typeface="Noto Sans"/>
-                        </a:rPr>
-                        <a:t>3試行の平均</a:t>
-                      </a:r>
-                    </a:p>
-                  </a:txBody>
-                  <a:tcPr marL="63500" marR="63500" marT="38100" marB="38100" anchor="ctr">
-                    <a:lnL w="7620">
-                      <a:noFill/>
-                    </a:lnL>
-                    <a:lnR w="7620">
-                      <a:noFill/>
-                    </a:lnR>
-                    <a:lnT w="7620">
-                      <a:noFill/>
-                    </a:lnT>
-                    <a:lnB w="15240">
-                      <a:solidFill>
-                        <a:srgbClr val="626669"/>
-                      </a:solidFill>
-                      <a:prstDash val="solid"/>
-                    </a:lnB>
-                    <a:solidFill>
-                      <a:srgbClr val="FFFEF8"/>
-                    </a:solidFill>
-                  </a:tcPr>
-                </a:tc>
-                <a:tc>
-                  <a:txBody>
-                    <a:bodyPr wrap="square">
-                      <a:noAutofit/>
-                    </a:bodyPr>
-                    <a:lstStyle/>
-                    <a:p>
-                      <a:pPr algn="r">
-                        <a:lnSpc>
-                          <a:spcPts val="2300"/>
-                        </a:lnSpc>
-                        <a:buNone/>
-                        <a:defRPr sz="2000" b="0">
-                          <a:solidFill>
-                            <a:srgbClr val="303437"/>
-                          </a:solidFill>
-                          <a:latin typeface="Noto Sans"/>
-                        </a:defRPr>
-                      </a:pPr>
-                      <a:r>
-                        <a:rPr sz="2000" b="0" lang="ja-JP" altLang="en-US">
-                          <a:solidFill>
-                            <a:srgbClr val="303437"/>
-                          </a:solidFill>
-                          <a:latin typeface="Noto Sans"/>
-                          <a:ea typeface="Noto Sans CJK JP"/>
-                          <a:cs typeface="Noto Sans"/>
-                        </a:rPr>
-                        <a:t>75.07%</a:t>
-                      </a:r>
-                    </a:p>
-                  </a:txBody>
-                  <a:tcPr marL="63500" marR="63500" marT="38100" marB="38100" anchor="ctr">
-                    <a:lnL w="7620">
-                      <a:noFill/>
-                    </a:lnL>
-                    <a:lnR w="7620">
-                      <a:noFill/>
-                    </a:lnR>
-                    <a:lnT w="7620">
-                      <a:noFill/>
-                    </a:lnT>
-                    <a:lnB w="15240">
-                      <a:solidFill>
-                        <a:srgbClr val="626669"/>
-                      </a:solidFill>
-                      <a:prstDash val="solid"/>
-                    </a:lnB>
-                    <a:solidFill>
-                      <a:srgbClr val="FFFEF8"/>
-                    </a:solidFill>
-                  </a:tcPr>
-                </a:tc>
-                <a:tc>
-                  <a:txBody>
-                    <a:bodyPr wrap="square">
-                      <a:noAutofit/>
-                    </a:bodyPr>
-                    <a:lstStyle/>
-                    <a:p>
-                      <a:pPr algn="r">
-                        <a:lnSpc>
-                          <a:spcPts val="2300"/>
-                        </a:lnSpc>
-                        <a:buNone/>
-                        <a:defRPr sz="2000" b="0">
-                          <a:solidFill>
-                            <a:srgbClr val="303437"/>
-                          </a:solidFill>
-                          <a:latin typeface="Noto Sans"/>
-                        </a:defRPr>
-                      </a:pPr>
-                      <a:r>
-                        <a:rPr sz="2000" b="0" lang="ja-JP" altLang="en-US">
-                          <a:solidFill>
-                            <a:srgbClr val="303437"/>
-                          </a:solidFill>
-                          <a:latin typeface="Noto Sans"/>
-                          <a:ea typeface="Noto Sans CJK JP"/>
-                          <a:cs typeface="Noto Sans"/>
-                        </a:rPr>
-                        <a:t>46.33%</a:t>
-                      </a:r>
-                    </a:p>
-                  </a:txBody>
-                  <a:tcPr marL="63500" marR="63500" marT="38100" marB="38100" anchor="ctr">
-                    <a:lnL w="7620">
-                      <a:noFill/>
-                    </a:lnL>
-                    <a:lnR w="7620">
-                      <a:noFill/>
-                    </a:lnR>
-                    <a:lnT w="7620">
-                      <a:noFill/>
-                    </a:lnT>
-                    <a:lnB w="15240">
-                      <a:solidFill>
-                        <a:srgbClr val="626669"/>
-                      </a:solidFill>
-                      <a:prstDash val="solid"/>
-                    </a:lnB>
-                    <a:solidFill>
-                      <a:srgbClr val="FFFEF8"/>
-                    </a:solidFill>
-                  </a:tcPr>
-                </a:tc>
-              </a:tr>
-            </a:tbl>
-          </a:graphicData>
-        </a:graphic>
-      </p:graphicFrame>
-      <p:sp>
-        <p:nvSpPr>
-          <p:cNvPr id="5" name="TextBox 4"/>
-          <p:cNvSpPr txBox="1"/>
-          <p:nvPr/>
-        </p:nvSpPr>
-        <p:spPr>
-          <a:xfrm>
-            <a:off x="594360" y="3995928"/>
-            <a:ext cx="7955279" cy="658368"/>
-          </a:xfrm>
-          <a:prstGeom prst="rect">
-            <a:avLst/>
-          </a:prstGeom>
-          <a:noFill/>
-        </p:spPr>
-        <p:txBody>
-          <a:bodyPr wrap="square" lIns="0" rIns="0" tIns="0" bIns="0">
-            <a:noAutofit/>
-          </a:bodyPr>
-          <a:lstStyle/>
-          <a:p>
-            <a:pPr algn="l">
-              <a:lnSpc>
-                <a:spcPts val="2047"/>
-              </a:lnSpc>
-              <a:spcBef>
-                <a:spcPts val="0"/>
-              </a:spcBef>
-              <a:spcAft>
-                <a:spcPts val="0"/>
-              </a:spcAft>
-              <a:buNone/>
-              <a:defRPr sz="1750" b="0">
-                <a:solidFill>
-                  <a:srgbClr val="303437"/>
-                </a:solidFill>
-                <a:latin typeface="Noto Sans"/>
-              </a:defRPr>
-            </a:pPr>
-            <a:r>
-              <a:rPr sz="1750" b="0" lang="ja-JP" altLang="en-US">
-                <a:solidFill>
-                  <a:srgbClr val="303437"/>
-                </a:solidFill>
-                <a:latin typeface="Noto Sans"/>
-                <a:ea typeface="Noto Sans CJK JP"/>
-                <a:cs typeface="Noto Sans"/>
-              </a:rPr>
-              <a:t>同じ1,500出力を再集計。列全体は前後の空白を除いた文字列を比較する。</a:t>
-            </a:r>
-          </a:p>
-        </p:txBody>
-      </p:sp>
-      <p:sp>
-        <p:nvSpPr>
-          <p:cNvPr id="6" name="sources"/>
-          <p:cNvSpPr txBox="1"/>
-          <p:nvPr/>
-        </p:nvSpPr>
-        <p:spPr>
-          <a:xfrm>
-            <a:off x="502920" y="4700016"/>
-            <a:ext cx="8183879" cy="621792"/>
-          </a:xfrm>
-          <a:prstGeom prst="rect">
-            <a:avLst/>
-          </a:prstGeom>
-          <a:noFill/>
-        </p:spPr>
-        <p:txBody>
-          <a:bodyPr wrap="square" lIns="0" rIns="0" tIns="0" bIns="0">
-            <a:noAutofit/>
-          </a:bodyPr>
-          <a:lstStyle/>
-          <a:p>
-            <a:pPr algn="l">
-              <a:lnSpc>
-                <a:spcPts val="1200"/>
-              </a:lnSpc>
-              <a:spcBef>
-                <a:spcPts val="0"/>
-              </a:spcBef>
-              <a:spcAft>
-                <a:spcPts val="0"/>
-              </a:spcAft>
-              <a:buNone/>
-              <a:defRPr sz="810" b="0">
-                <a:solidFill>
-                  <a:srgbClr val="303437"/>
-                </a:solidFill>
-                <a:latin typeface="Noto Sans"/>
-              </a:defRPr>
-            </a:pPr>
-            <a:r>
-              <a:rPr sz="810" b="0" lang="ja-JP" altLang="en-US">
-                <a:solidFill>
-                  <a:srgbClr val="626669"/>
-                </a:solidFill>
-                <a:latin typeface="Noto Sans"/>
-                <a:ea typeface="Noto Sans CJK JP"/>
-                <a:cs typeface="Noto Sans"/>
-              </a:rPr>
-              <a:t>[1] HELM v0.3.0、seed=42の生成器で再現し、公開text-davinci-003入力と全500件を照合。</a:t>
-            </a:r>
-          </a:p>
-          <a:p>
-            <a:pPr>
-              <a:lnSpc>
-                <a:spcPts val="1200"/>
-              </a:lnSpc>
-              <a:buNone/>
-              <a:defRPr sz="810" b="0">
-                <a:solidFill>
-                  <a:srgbClr val="303437"/>
-                </a:solidFill>
-                <a:latin typeface="Noto Sans"/>
-              </a:defRPr>
-            </a:pPr>
-            <a:r>
-              <a:rPr sz="810" b="0" lang="ja-JP" altLang="en-US">
-                <a:solidFill>
-                  <a:srgbClr val="626669"/>
-                </a:solidFill>
-                <a:latin typeface="Noto Sans"/>
-                <a:ea typeface="Noto Sans CJK JP"/>
-                <a:cs typeface="Noto Sans"/>
-                <a:hlinkClick r:id="rId2"/>
-              </a:rPr>
-              <a:t>https://crfm.stanford.edu/helm/classic/v0.4.0/#/runs/dyck_language_np=3:model=openai_text-davinci-003</a:t>
-            </a:r>
-          </a:p>
-        </p:txBody>
-      </p:sp>
-    </p:spTree>
-  </p:cSld>
-  <p:clrMapOvr>
-    <a:masterClrMapping/>
-  </p:clrMapOvr>
-</p:sld>
-</file>
-
-<file path=ppt/slides/slide17.xml><?xml version="1.0" encoding="utf-8"?>
-<p:sld xmlns:a="http://schemas.openxmlformats.org/drawingml/2006/main" xmlns:p="http://schemas.openxmlformats.org/presentationml/2006/main" xmlns:r="http://schemas.openxmlformats.org/officeDocument/2006/relationships">
-  <p:cSld>
-    <p:spTree>
-      <p:nvGrpSpPr>
-        <p:cNvPr id="1" name=""/>
-        <p:cNvGrpSpPr/>
-        <p:nvPr/>
-      </p:nvGrpSpPr>
-      <p:grpSpPr/>
-      <p:sp>
-        <p:nvSpPr>
-          <p:cNvPr id="2" name="Title 1"/>
-          <p:cNvSpPr>
-            <a:spLocks noGrp="1"/>
-          </p:cNvSpPr>
-          <p:nvPr>
-            <p:ph type="title"/>
-          </p:nvPr>
-        </p:nvSpPr>
-        <p:spPr>
-          <a:xfrm>
-            <a:off x="468172" y="650138"/>
-            <a:ext cx="8206740" cy="616305"/>
-          </a:xfrm>
-        </p:spPr>
-        <p:txBody>
-          <a:bodyPr wrap="square" lIns="0" rIns="0" tIns="0" bIns="0">
-            <a:noAutofit/>
-          </a:bodyPr>
-          <a:lstStyle/>
-          <a:p>
-            <a:pPr algn="l">
-              <a:lnSpc>
-                <a:spcPct val="110000"/>
-              </a:lnSpc>
-              <a:buNone/>
-              <a:defRPr sz="2800" b="0">
-                <a:solidFill>
-                  <a:srgbClr val="303437"/>
-                </a:solidFill>
-                <a:latin typeface="Noto Sans"/>
-              </a:defRPr>
-            </a:pPr>
-            <a:r>
-              <a:rPr sz="2800" b="1" lang="ja-JP" altLang="en-US">
-                <a:solidFill>
-                  <a:srgbClr val="303437"/>
-                </a:solidFill>
-                <a:latin typeface="Noto Sans"/>
-                <a:ea typeface="Noto Sans CJK JP"/>
-                <a:cs typeface="Noto Sans"/>
-              </a:rPr>
-              <a:t>指標の実装は末尾要素だけを取り出す</a:t>
-            </a:r>
-          </a:p>
-        </p:txBody>
-      </p:sp>
-      <p:sp>
-        <p:nvSpPr>
-          <p:cNvPr id="3" name="Title 2"/>
-          <p:cNvSpPr>
-            <a:spLocks noGrp="1"/>
-          </p:cNvSpPr>
-          <p:nvPr>
-            <p:ph type="title" idx="2"/>
-          </p:nvPr>
-        </p:nvSpPr>
-        <p:spPr>
-          <a:xfrm>
-            <a:off x="75895" y="0"/>
-            <a:ext cx="8115300" cy="480060"/>
-          </a:xfrm>
-        </p:spPr>
-        <p:txBody>
-          <a:bodyPr wrap="square" lIns="0" rIns="0" tIns="0" bIns="0" anchor="ctr">
-            <a:noAutofit/>
-          </a:bodyPr>
-          <a:lstStyle/>
-          <a:p>
-            <a:pPr algn="l">
-              <a:lnSpc>
-                <a:spcPct val="110000"/>
-              </a:lnSpc>
-              <a:buNone/>
-              <a:defRPr sz="1400" b="0">
-                <a:solidFill>
-                  <a:srgbClr val="303437"/>
-                </a:solidFill>
-                <a:latin typeface="Noto Sans"/>
-              </a:defRPr>
-            </a:pPr>
-            <a:r>
-              <a:rPr sz="1400" b="1" lang="ja-JP" altLang="en-US">
-                <a:solidFill>
-                  <a:srgbClr val="FFFEF8"/>
-                </a:solidFill>
-                <a:latin typeface="Noto Sans"/>
-                <a:ea typeface="Noto Sans CJK JP"/>
-                <a:cs typeface="Noto Sans"/>
-              </a:rPr>
-              <a:t>2. HELMの採点と公開成績</a:t>
-            </a:r>
-          </a:p>
-        </p:txBody>
-      </p:sp>
-      <p:sp>
-        <p:nvSpPr>
-          <p:cNvPr id="4" name="Rectangle 3"/>
-          <p:cNvSpPr/>
-          <p:nvPr/>
-        </p:nvSpPr>
-        <p:spPr>
-          <a:xfrm>
-            <a:off x="548640" y="1508760"/>
-            <a:ext cx="8046720" cy="1111250"/>
-          </a:xfrm>
-          <a:prstGeom prst="rect">
-            <a:avLst/>
-          </a:prstGeom>
-          <a:solidFill>
-            <a:srgbClr val="EBEDEB"/>
-          </a:solidFill>
-          <a:ln>
-            <a:noFill/>
-          </a:ln>
-          <a:effectLst/>
-        </p:spPr>
-        <p:style>
-          <a:lnRef idx="1">
-            <a:schemeClr val="accent1"/>
-          </a:lnRef>
-          <a:fillRef idx="3">
-            <a:schemeClr val="accent1"/>
-          </a:fillRef>
-          <a:effectRef idx="0">
-            <a:schemeClr val="accent1"/>
-          </a:effectRef>
-          <a:fontRef idx="minor">
-            <a:schemeClr val="lt1"/>
-          </a:fontRef>
-        </p:style>
-        <p:txBody>
-          <a:bodyPr rtlCol="0" anchor="t" wrap="none" lIns="152400" rIns="152400" tIns="92710" bIns="127000"/>
-          <a:lstStyle/>
-          <a:p>
-            <a:pPr algn="l">
-              <a:lnSpc>
-                <a:spcPts val="2250"/>
-              </a:lnSpc>
-              <a:spcBef>
-                <a:spcPts val="0"/>
-              </a:spcBef>
-              <a:spcAft>
-                <a:spcPts val="0"/>
-              </a:spcAft>
-              <a:buNone/>
-              <a:defRPr sz="1800" b="0">
-                <a:solidFill>
-                  <a:srgbClr val="303437"/>
-                </a:solidFill>
-                <a:latin typeface="Noto Sans"/>
-              </a:defRPr>
-            </a:pPr>
-            <a:r>
-              <a:rPr sz="1800" b="0" lang="ja-JP" altLang="en-US">
-                <a:solidFill>
-                  <a:srgbClr val="303437"/>
-                </a:solidFill>
-                <a:latin typeface="Liberation Mono"/>
-                <a:ea typeface="Noto Sans CJK JP"/>
-                <a:cs typeface="Liberation Mono"/>
-              </a:rPr>
-              <a:t>pred = pred.split(indicator)[-1].strip()</a:t>
-            </a:r>
-          </a:p>
-          <a:p>
-            <a:pPr algn="l">
-              <a:lnSpc>
-                <a:spcPts val="2250"/>
-              </a:lnSpc>
-              <a:spcBef>
-                <a:spcPts val="0"/>
-              </a:spcBef>
-              <a:spcAft>
-                <a:spcPts val="0"/>
-              </a:spcAft>
-              <a:buNone/>
-              <a:defRPr sz="1800" b="0">
-                <a:solidFill>
-                  <a:srgbClr val="303437"/>
-                </a:solidFill>
-                <a:latin typeface="Noto Sans"/>
-              </a:defRPr>
-            </a:pPr>
-            <a:r>
-              <a:rPr sz="1800" b="0" lang="ja-JP" altLang="en-US">
-                <a:solidFill>
-                  <a:srgbClr val="303437"/>
-                </a:solidFill>
-                <a:latin typeface="Liberation Mono"/>
-                <a:ea typeface="Noto Sans CJK JP"/>
-                <a:cs typeface="Liberation Mono"/>
-              </a:rPr>
-              <a:t>gold = gold.split(indicator)[-1].strip()</a:t>
-            </a:r>
-          </a:p>
-          <a:p>
-            <a:pPr algn="l">
-              <a:lnSpc>
-                <a:spcPts val="2250"/>
-              </a:lnSpc>
-              <a:spcBef>
-                <a:spcPts val="0"/>
-              </a:spcBef>
-              <a:spcAft>
-                <a:spcPts val="0"/>
-              </a:spcAft>
-              <a:buNone/>
-              <a:defRPr sz="1800" b="0">
-                <a:solidFill>
-                  <a:srgbClr val="303437"/>
-                </a:solidFill>
-                <a:latin typeface="Noto Sans"/>
-              </a:defRPr>
-            </a:pPr>
-            <a:r>
-              <a:rPr sz="1800" b="0" lang="ja-JP" altLang="en-US">
-                <a:solidFill>
-                  <a:srgbClr val="303437"/>
-                </a:solidFill>
-                <a:latin typeface="Liberation Mono"/>
-                <a:ea typeface="Noto Sans CJK JP"/>
-                <a:cs typeface="Liberation Mono"/>
-              </a:rPr>
-              <a:t>return exact_match(gold, pred)</a:t>
-            </a:r>
-          </a:p>
-        </p:txBody>
-      </p:sp>
-      <p:sp>
-        <p:nvSpPr>
-          <p:cNvPr id="5" name="TextBox 4"/>
-          <p:cNvSpPr txBox="1"/>
-          <p:nvPr/>
-        </p:nvSpPr>
-        <p:spPr>
-          <a:xfrm>
-            <a:off x="594360" y="2821178"/>
-            <a:ext cx="7955279" cy="777240"/>
-          </a:xfrm>
-          <a:prstGeom prst="rect">
-            <a:avLst/>
-          </a:prstGeom>
-          <a:noFill/>
-        </p:spPr>
-        <p:txBody>
-          <a:bodyPr wrap="square" lIns="0" rIns="0" tIns="0" bIns="0">
-            <a:noAutofit/>
-          </a:bodyPr>
-          <a:lstStyle/>
-          <a:p>
-            <a:pPr algn="l">
-              <a:lnSpc>
-                <a:spcPts val="2222"/>
-              </a:lnSpc>
-              <a:spcBef>
-                <a:spcPts val="0"/>
-              </a:spcBef>
-              <a:spcAft>
-                <a:spcPts val="0"/>
-              </a:spcAft>
-              <a:buNone/>
-              <a:defRPr sz="1900" b="0">
-                <a:solidFill>
-                  <a:srgbClr val="303437"/>
-                </a:solidFill>
-                <a:latin typeface="Noto Sans"/>
-              </a:defRPr>
-            </a:pPr>
-            <a:r>
-              <a:rPr sz="1900" b="0" lang="ja-JP" altLang="en-US">
-                <a:solidFill>
-                  <a:srgbClr val="303437"/>
-                </a:solidFill>
-                <a:latin typeface="Noto Sans"/>
-                <a:ea typeface="Noto Sans CJK JP"/>
-                <a:cs typeface="Noto Sans"/>
-              </a:rPr>
-              <a:t>indicatorの既定値は半角空白。最後の要素より前にある誤りは、この指標では採点しない。</a:t>
-            </a:r>
-          </a:p>
-        </p:txBody>
-      </p:sp>
-      <p:sp>
-        <p:nvSpPr>
-          <p:cNvPr id="6" name="sources"/>
-          <p:cNvSpPr txBox="1"/>
-          <p:nvPr/>
-        </p:nvSpPr>
-        <p:spPr>
-          <a:xfrm>
-            <a:off x="502920" y="4700016"/>
-            <a:ext cx="8183879" cy="621792"/>
-          </a:xfrm>
-          <a:prstGeom prst="rect">
-            <a:avLst/>
-          </a:prstGeom>
-          <a:noFill/>
-        </p:spPr>
-        <p:txBody>
-          <a:bodyPr wrap="square" lIns="0" rIns="0" tIns="0" bIns="0">
-            <a:noAutofit/>
-          </a:bodyPr>
-          <a:lstStyle/>
-          <a:p>
-            <a:pPr algn="l">
-              <a:lnSpc>
-                <a:spcPts val="1200"/>
-              </a:lnSpc>
-              <a:spcBef>
-                <a:spcPts val="0"/>
-              </a:spcBef>
-              <a:spcAft>
-                <a:spcPts val="0"/>
-              </a:spcAft>
-              <a:buNone/>
-              <a:defRPr sz="810" b="0">
-                <a:solidFill>
-                  <a:srgbClr val="303437"/>
-                </a:solidFill>
-                <a:latin typeface="Noto Sans"/>
-              </a:defRPr>
-            </a:pPr>
-            <a:r>
-              <a:rPr sz="810" b="0" lang="ja-JP" altLang="en-US">
-                <a:solidFill>
-                  <a:srgbClr val="626669"/>
-                </a:solidFill>
-                <a:latin typeface="Noto Sans"/>
-                <a:ea typeface="Noto Sans CJK JP"/>
-                <a:cs typeface="Noto Sans"/>
-              </a:rPr>
-              <a:t>[1] HELM v0.3.0. exact_match_indicator.</a:t>
-            </a:r>
-            <a:r>
-              <a:rPr sz="810" b="0" lang="ja-JP" altLang="en-US">
-                <a:solidFill>
-                  <a:srgbClr val="626669"/>
-                </a:solidFill>
-                <a:latin typeface="Noto Sans"/>
-                <a:ea typeface="Noto Sans CJK JP"/>
-                <a:cs typeface="Noto Sans"/>
-              </a:rPr>
-              <a:t>  </a:t>
-            </a:r>
-            <a:r>
-              <a:rPr sz="810" b="0" lang="ja-JP" altLang="en-US">
-                <a:solidFill>
-                  <a:srgbClr val="626669"/>
-                </a:solidFill>
-                <a:latin typeface="Noto Sans"/>
-                <a:ea typeface="Noto Sans CJK JP"/>
-                <a:cs typeface="Noto Sans"/>
-                <a:hlinkClick r:id="rId2"/>
-              </a:rPr>
-              <a:t>https://github.com/stanford-crfm/helm/blob/v0.3.0/src/helm/benchmark/metrics/basic_metrics.py</a:t>
-            </a:r>
-          </a:p>
-        </p:txBody>
-      </p:sp>
-    </p:spTree>
-  </p:cSld>
-  <p:clrMapOvr>
-    <a:masterClrMapping/>
-  </p:clrMapOvr>
-</p:sld>
-</file>
-
-<file path=ppt/slides/slide18.xml><?xml version="1.0" encoding="utf-8"?>
-<p:sld xmlns:a="http://schemas.openxmlformats.org/drawingml/2006/main" xmlns:p="http://schemas.openxmlformats.org/presentationml/2006/main" xmlns:r="http://schemas.openxmlformats.org/officeDocument/2006/relationships">
-  <p:cSld>
-    <p:spTree>
-      <p:nvGrpSpPr>
-        <p:cNvPr id="1" name=""/>
-        <p:cNvGrpSpPr/>
-        <p:nvPr/>
-      </p:nvGrpSpPr>
-      <p:grpSpPr/>
-      <p:sp>
-        <p:nvSpPr>
-          <p:cNvPr id="2" name="Title 1"/>
-          <p:cNvSpPr>
-            <a:spLocks noGrp="1"/>
-          </p:cNvSpPr>
-          <p:nvPr>
-            <p:ph type="title"/>
-          </p:nvPr>
-        </p:nvSpPr>
-        <p:spPr>
-          <a:xfrm>
-            <a:off x="468172" y="650138"/>
-            <a:ext cx="8206740" cy="616305"/>
-          </a:xfrm>
-        </p:spPr>
-        <p:txBody>
-          <a:bodyPr wrap="square" lIns="0" rIns="0" tIns="0" bIns="0">
-            <a:noAutofit/>
-          </a:bodyPr>
-          <a:lstStyle/>
-          <a:p>
-            <a:pPr algn="l">
-              <a:lnSpc>
-                <a:spcPct val="110000"/>
-              </a:lnSpc>
-              <a:buNone/>
-              <a:defRPr sz="2800" b="0">
-                <a:solidFill>
-                  <a:srgbClr val="303437"/>
-                </a:solidFill>
-                <a:latin typeface="Noto Sans"/>
-              </a:defRPr>
-            </a:pPr>
-            <a:r>
-              <a:rPr sz="2800" b="1" lang="ja-JP" altLang="en-US">
-                <a:solidFill>
-                  <a:srgbClr val="303437"/>
-                </a:solidFill>
-                <a:latin typeface="Noto Sans"/>
-                <a:ea typeface="Noto Sans CJK JP"/>
-                <a:cs typeface="Noto Sans"/>
-              </a:rPr>
-              <a:t>測りたい能力に、採点を対応させる</a:t>
-            </a:r>
-          </a:p>
-        </p:txBody>
-      </p:sp>
-      <p:sp>
-        <p:nvSpPr>
-          <p:cNvPr id="3" name="Text Placeholder 2"/>
-          <p:cNvSpPr>
-            <a:spLocks noGrp="1"/>
-          </p:cNvSpPr>
-          <p:nvPr>
-            <p:ph type="body" idx="1"/>
-          </p:nvPr>
-        </p:nvSpPr>
-        <p:spPr>
-          <a:xfrm>
-            <a:off x="594360" y="1463040"/>
-            <a:ext cx="7955279" cy="3044952"/>
-          </a:xfrm>
-        </p:spPr>
-        <p:txBody>
-          <a:bodyPr wrap="square" tIns="91440" bIns="91440">
-            <a:noAutofit/>
-          </a:bodyPr>
-          <a:lstStyle/>
-          <a:p>
-            <a:pPr marL="457200" indent="-355600">
-              <a:lnSpc>
-                <a:spcPts val="2499"/>
-              </a:lnSpc>
-              <a:spcAft>
-                <a:spcPts val="700"/>
-              </a:spcAft>
-              <a:buSzPct val="63333"/>
-              <a:buFont typeface="Noto Sans CJK JP"/>
-              <a:buChar char="●"/>
-              <a:defRPr sz="2100" b="0">
-                <a:solidFill>
-                  <a:srgbClr val="303437"/>
-                </a:solidFill>
-                <a:latin typeface="Noto Sans"/>
-              </a:defRPr>
-            </a:pPr>
-            <a:r>
-              <a:rPr sz="2100" b="0" lang="ja-JP" altLang="en-US">
-                <a:solidFill>
-                  <a:srgbClr val="303437"/>
-                </a:solidFill>
-                <a:latin typeface="Noto Sans"/>
-                <a:ea typeface="Noto Sans CJK JP"/>
-                <a:cs typeface="Noto Sans"/>
-              </a:rPr>
-              <a:t>課題の目標は、開いた括弧を正しい順序ですべて閉じること。列全体の正しさは、出力の途中にある誤りや余分な括弧にも依存する。</a:t>
-            </a:r>
-          </a:p>
-          <a:p>
-            <a:pPr marL="457200" indent="-355600">
-              <a:lnSpc>
-                <a:spcPts val="2499"/>
-              </a:lnSpc>
-              <a:spcAft>
-                <a:spcPts val="700"/>
-              </a:spcAft>
-              <a:buSzPct val="63333"/>
-              <a:buFont typeface="Noto Sans CJK JP"/>
-              <a:buChar char="●"/>
-              <a:defRPr sz="2100" b="0">
-                <a:solidFill>
-                  <a:srgbClr val="303437"/>
-                </a:solidFill>
-                <a:latin typeface="Noto Sans"/>
-              </a:defRPr>
-            </a:pPr>
-            <a:r>
-              <a:rPr sz="2100" b="0" lang="ja-JP" altLang="en-US">
-                <a:solidFill>
-                  <a:srgbClr val="303437"/>
-                </a:solidFill>
-                <a:latin typeface="Noto Sans"/>
-                <a:ea typeface="Noto Sans CJK JP"/>
-                <a:cs typeface="Noto Sans"/>
-              </a:rPr>
-              <a:t>公開得点は末尾要素の一致率として解釈し、補完能力を調べるときは出力全体も照合する。</a:t>
-            </a:r>
-          </a:p>
-          <a:p>
-            <a:pPr marL="457200" indent="-355600">
-              <a:lnSpc>
-                <a:spcPts val="2499"/>
-              </a:lnSpc>
-              <a:spcAft>
-                <a:spcPts val="0"/>
-              </a:spcAft>
-              <a:buSzPct val="63333"/>
-              <a:buFont typeface="Noto Sans CJK JP"/>
-              <a:buChar char="●"/>
-              <a:defRPr sz="2100" b="0">
-                <a:solidFill>
-                  <a:srgbClr val="303437"/>
-                </a:solidFill>
-                <a:latin typeface="Noto Sans"/>
-              </a:defRPr>
-            </a:pPr>
-            <a:r>
-              <a:rPr sz="2100" b="0" lang="ja-JP" altLang="en-US">
-                <a:solidFill>
-                  <a:srgbClr val="303437"/>
-                </a:solidFill>
-                <a:latin typeface="Noto Sans"/>
-                <a:ea typeface="Noto Sans CJK JP"/>
-                <a:cs typeface="Noto Sans"/>
-              </a:rPr>
-              <a:t>これらは2023年に公開されたHELMの実行結果であり、2026年のモデル順位ではない。</a:t>
-            </a:r>
-          </a:p>
-        </p:txBody>
-      </p:sp>
-      <p:sp>
-        <p:nvSpPr>
-          <p:cNvPr id="4" name="Title 3"/>
-          <p:cNvSpPr>
-            <a:spLocks noGrp="1"/>
-          </p:cNvSpPr>
-          <p:nvPr>
-            <p:ph type="title" idx="2"/>
-          </p:nvPr>
-        </p:nvSpPr>
-        <p:spPr>
-          <a:xfrm>
-            <a:off x="75895" y="0"/>
-            <a:ext cx="8115300" cy="480060"/>
-          </a:xfrm>
-        </p:spPr>
-        <p:txBody>
-          <a:bodyPr wrap="square" lIns="0" rIns="0" tIns="0" bIns="0" anchor="ctr">
-            <a:noAutofit/>
-          </a:bodyPr>
-          <a:lstStyle/>
-          <a:p>
-            <a:pPr algn="l">
-              <a:lnSpc>
-                <a:spcPct val="110000"/>
-              </a:lnSpc>
-              <a:buNone/>
-              <a:defRPr sz="1400" b="0">
-                <a:solidFill>
-                  <a:srgbClr val="303437"/>
-                </a:solidFill>
-                <a:latin typeface="Noto Sans"/>
-              </a:defRPr>
-            </a:pPr>
-            <a:r>
-              <a:rPr sz="1400" b="1" lang="ja-JP" altLang="en-US">
-                <a:solidFill>
-                  <a:srgbClr val="FFFEF8"/>
-                </a:solidFill>
-                <a:latin typeface="Noto Sans"/>
-                <a:ea typeface="Noto Sans CJK JP"/>
-                <a:cs typeface="Noto Sans"/>
-              </a:rPr>
-              <a:t>2. HELMの採点と公開成績</a:t>
-            </a:r>
-          </a:p>
-        </p:txBody>
-      </p:sp>
-      <p:sp>
-        <p:nvSpPr>
-          <p:cNvPr id="5" name="sources"/>
-          <p:cNvSpPr txBox="1"/>
-          <p:nvPr/>
-        </p:nvSpPr>
-        <p:spPr>
-          <a:xfrm>
-            <a:off x="502920" y="4700016"/>
-            <a:ext cx="8183879" cy="621792"/>
-          </a:xfrm>
-          <a:prstGeom prst="rect">
-            <a:avLst/>
-          </a:prstGeom>
-          <a:noFill/>
-        </p:spPr>
-        <p:txBody>
-          <a:bodyPr wrap="square" lIns="0" rIns="0" tIns="0" bIns="0">
-            <a:noAutofit/>
-          </a:bodyPr>
-          <a:lstStyle/>
-          <a:p>
-            <a:pPr algn="l">
-              <a:lnSpc>
-                <a:spcPts val="1200"/>
-              </a:lnSpc>
-              <a:spcBef>
-                <a:spcPts val="0"/>
-              </a:spcBef>
-              <a:spcAft>
-                <a:spcPts val="0"/>
-              </a:spcAft>
-              <a:buNone/>
-              <a:defRPr sz="810" b="0">
-                <a:solidFill>
-                  <a:srgbClr val="303437"/>
-                </a:solidFill>
-                <a:latin typeface="Noto Sans"/>
-              </a:defRPr>
-            </a:pPr>
-            <a:r>
-              <a:rPr sz="810" b="0" lang="ja-JP" altLang="en-US">
-                <a:solidFill>
-                  <a:srgbClr val="626669"/>
-                </a:solidFill>
-                <a:latin typeface="Noto Sans"/>
-                <a:ea typeface="Noto Sans CJK JP"/>
-                <a:cs typeface="Noto Sans"/>
-              </a:rPr>
-              <a:t>[1] HELM v0.3.0. exact_match_indicator.</a:t>
-            </a:r>
-            <a:r>
-              <a:rPr sz="810" b="0" lang="ja-JP" altLang="en-US">
-                <a:solidFill>
-                  <a:srgbClr val="626669"/>
-                </a:solidFill>
-                <a:latin typeface="Noto Sans"/>
-                <a:ea typeface="Noto Sans CJK JP"/>
-                <a:cs typeface="Noto Sans"/>
-              </a:rPr>
-              <a:t>  </a:t>
-            </a:r>
-            <a:r>
-              <a:rPr sz="810" b="0" lang="ja-JP" altLang="en-US">
-                <a:solidFill>
-                  <a:srgbClr val="626669"/>
-                </a:solidFill>
-                <a:latin typeface="Noto Sans"/>
-                <a:ea typeface="Noto Sans CJK JP"/>
-                <a:cs typeface="Noto Sans"/>
-                <a:hlinkClick r:id="rId2"/>
-              </a:rPr>
-              <a:t>https://github.com/stanford-crfm/helm/blob/v0.3.0/src/helm/benchmark/metrics/basic_metrics.py</a:t>
-            </a:r>
-          </a:p>
-          <a:p>
-            <a:pPr>
-              <a:lnSpc>
-                <a:spcPts val="1200"/>
-              </a:lnSpc>
-              <a:spcAft>
-                <a:spcPts val="0"/>
-              </a:spcAft>
-              <a:buNone/>
-              <a:defRPr sz="810" b="0">
-                <a:solidFill>
-                  <a:srgbClr val="303437"/>
-                </a:solidFill>
-                <a:latin typeface="Noto Sans"/>
-              </a:defRPr>
-            </a:pPr>
-            <a:r>
-              <a:rPr sz="810" b="0" lang="ja-JP" altLang="en-US">
-                <a:solidFill>
-                  <a:srgbClr val="626669"/>
-                </a:solidFill>
-                <a:latin typeface="Noto Sans"/>
-                <a:ea typeface="Noto Sans CJK JP"/>
-                <a:cs typeface="Noto Sans"/>
-              </a:rPr>
-              <a:t>[2] HELM Classic v0.4.0, Dyck Language. 公開run suite v0.3.0、括弧3種類。</a:t>
-            </a:r>
-            <a:r>
-              <a:rPr sz="810" b="0" lang="ja-JP" altLang="en-US">
-                <a:solidFill>
-                  <a:srgbClr val="626669"/>
-                </a:solidFill>
-                <a:latin typeface="Noto Sans"/>
-                <a:ea typeface="Noto Sans CJK JP"/>
-                <a:cs typeface="Noto Sans"/>
-              </a:rPr>
-              <a:t>  </a:t>
-            </a:r>
-            <a:r>
-              <a:rPr sz="810" b="0" lang="ja-JP" altLang="en-US">
-                <a:solidFill>
-                  <a:srgbClr val="626669"/>
-                </a:solidFill>
-                <a:latin typeface="Noto Sans"/>
-                <a:ea typeface="Noto Sans CJK JP"/>
-                <a:cs typeface="Noto Sans"/>
-                <a:hlinkClick r:id="rId3"/>
               </a:rPr>
               <a:t>https://crfm.stanford.edu/helm/classic/v0.4.0/#/groups/dyck_language</a:t>
             </a:r>
@@ -11757,7 +9182,7 @@
                 <a:ea typeface="Noto Sans CJK JP"/>
                 <a:cs typeface="Noto Sans"/>
               </a:rPr>
-              <a:t>著者の公式実装</a:t>
+              <a:t>2019年研究の著者実装</a:t>
             </a:r>
           </a:p>
         </p:txBody>
@@ -12530,7 +9955,7 @@
                 <a:ea typeface="Noto Sans CJK JP"/>
                 <a:cs typeface="Noto Sans"/>
               </a:rPr>
-              <a:t>HELMはn=3、p=0.5、q=0.25。入れ子と連結を繰り返す。</a:t>
+              <a:t>Sは生成する括弧列。n=3、p=0.5、q=0.25として、入れ子と連結を繰り返す。</a:t>
             </a:r>
           </a:p>
         </p:txBody>
@@ -12584,19 +10009,28 @@
                 <a:ea typeface="Noto Sans CJK JP"/>
                 <a:cs typeface="Noto Sans"/>
               </a:rPr>
-              <a:t>[1] HELM v0.3.0. DyckLanguageScenario.</a:t>
-            </a:r>
-            <a:r>
-              <a:rPr sz="810" b="0" lang="ja-JP" altLang="en-US">
-                <a:solidFill>
-                  <a:srgbClr val="626669"/>
-                </a:solidFill>
-                <a:latin typeface="Noto Sans"/>
-                <a:ea typeface="Noto Sans CJK JP"/>
-                <a:cs typeface="Noto Sans"/>
-              </a:rPr>
-              <a:t>  </a:t>
-            </a:r>
+              <a:t>[1] Stanford CRFM. DyckLanguageScenario — 括弧列の生成と正解計算。</a:t>
+            </a:r>
+          </a:p>
+          <a:p>
+            <a:pPr algn="l">
+              <a:lnSpc>
+                <a:spcPts val="1200"/>
+              </a:lnSpc>
+              <a:spcBef>
+                <a:spcPts val="0"/>
+              </a:spcBef>
+              <a:spcAft>
+                <a:spcPts val="0"/>
+              </a:spcAft>
+              <a:buNone/>
+              <a:defRPr sz="810" b="0">
+                <a:solidFill>
+                  <a:srgbClr val="303437"/>
+                </a:solidFill>
+                <a:latin typeface="Noto Sans"/>
+              </a:defRPr>
+            </a:pPr>
             <a:r>
               <a:rPr sz="810" b="0" lang="ja-JP" altLang="en-US">
                 <a:solidFill>
@@ -12756,7 +10190,7 @@
                 <a:ea typeface="Noto Sans CJK JP"/>
                 <a:cs typeface="Noto Sans"/>
               </a:rPr>
-              <a:t>完成列の後ろから走査し、残す入力を切り出す。切り落とす側には、対応済みの部分列が含まれる場合もある。</a:t>
+              <a:t>完成列の後ろから切る位置を決め、入力を作る。切り落とす側には、対応済みの部分列が含まれる場合もある。</a:t>
             </a:r>
           </a:p>
           <a:p>
@@ -12786,7 +10220,7 @@
                 <a:ea typeface="Noto Sans CJK JP"/>
                 <a:cs typeface="Noto Sans"/>
               </a:rPr>
-              <a:t>最後に残した入力をスタックで読み直し、必要な閉じ括弧を計算する。正解の長さは1〜3記号になる。</a:t>
+              <a:t>残した入力をスタックで読み直し、必要な閉じ括弧を求める。この生成例では、正解の長さを1〜3記号にする。</a:t>
             </a:r>
           </a:p>
         </p:txBody>
@@ -12888,19 +10322,28 @@
                 <a:ea typeface="Noto Sans CJK JP"/>
                 <a:cs typeface="Noto Sans"/>
               </a:rPr>
-              <a:t>[1] HELM v0.3.0. DyckLanguageScenario.</a:t>
-            </a:r>
-            <a:r>
-              <a:rPr sz="810" b="0" lang="ja-JP" altLang="en-US">
-                <a:solidFill>
-                  <a:srgbClr val="626669"/>
-                </a:solidFill>
-                <a:latin typeface="Noto Sans"/>
-                <a:ea typeface="Noto Sans CJK JP"/>
-                <a:cs typeface="Noto Sans"/>
-              </a:rPr>
-              <a:t>  </a:t>
-            </a:r>
+              <a:t>[1] Stanford CRFM. DyckLanguageScenario — 括弧列の生成と正解計算。</a:t>
+            </a:r>
+          </a:p>
+          <a:p>
+            <a:pPr algn="l">
+              <a:lnSpc>
+                <a:spcPts val="1200"/>
+              </a:lnSpc>
+              <a:spcBef>
+                <a:spcPts val="0"/>
+              </a:spcBef>
+              <a:spcAft>
+                <a:spcPts val="0"/>
+              </a:spcAft>
+              <a:buNone/>
+              <a:defRPr sz="810" b="0">
+                <a:solidFill>
+                  <a:srgbClr val="303437"/>
+                </a:solidFill>
+                <a:latin typeface="Noto Sans"/>
+              </a:defRPr>
+            </a:pPr>
             <a:r>
               <a:rPr sz="810" b="0" lang="ja-JP" altLang="en-US">
                 <a:solidFill>
@@ -12977,7 +10420,7 @@
                 <a:ea typeface="Noto Sans CJK JP"/>
                 <a:cs typeface="Noto Sans"/>
               </a:rPr>
-              <a:t>提示例3件と、評価例500件を作る</a:t>
+              <a:t>短い列から、長い列への汎化を調べる</a:t>
             </a:r>
           </a:p>
         </p:txBody>
@@ -13030,685 +10473,16 @@
           </a:p>
         </p:txBody>
       </p:sp>
-      <p:graphicFrame>
-        <p:nvGraphicFramePr>
-          <p:cNvPr id="4" name="Table 3"/>
-          <p:cNvGraphicFramePr>
-            <a:graphicFrameLocks noGrp="1"/>
-          </p:cNvGraphicFramePr>
-          <p:nvPr/>
-        </p:nvGraphicFramePr>
-        <p:xfrm>
-          <a:off x="548640" y="1508760"/>
-          <a:ext cx="8046720" cy="1828800"/>
-        </p:xfrm>
-        <a:graphic>
-          <a:graphicData uri="http://schemas.openxmlformats.org/drawingml/2006/table">
-            <a:tbl>
-              <a:tblPr firstRow="0" bandRow="0"/>
-              <a:tblGrid>
-                <a:gridCol w="4023360"/>
-                <a:gridCol w="2011680"/>
-                <a:gridCol w="2011680"/>
-              </a:tblGrid>
-              <a:tr h="457200">
-                <a:tc>
-                  <a:txBody>
-                    <a:bodyPr wrap="square">
-                      <a:noAutofit/>
-                    </a:bodyPr>
-                    <a:lstStyle/>
-                    <a:p>
-                      <a:pPr algn="l">
-                        <a:lnSpc>
-                          <a:spcPts val="2300"/>
-                        </a:lnSpc>
-                        <a:buNone/>
-                        <a:defRPr sz="2000" b="0">
-                          <a:solidFill>
-                            <a:srgbClr val="303437"/>
-                          </a:solidFill>
-                          <a:latin typeface="Noto Sans"/>
-                        </a:defRPr>
-                      </a:pPr>
-                      <a:r>
-                        <a:rPr sz="2000" b="0" lang="ja-JP" altLang="en-US">
-                          <a:solidFill>
-                            <a:srgbClr val="303437"/>
-                          </a:solidFill>
-                          <a:latin typeface="Noto Sans"/>
-                          <a:ea typeface="Noto Sans CJK JP"/>
-                          <a:cs typeface="Noto Sans"/>
-                        </a:rPr>
-                        <a:t>設定</a:t>
-                      </a:r>
-                    </a:p>
-                  </a:txBody>
-                  <a:tcPr marL="63500" marR="63500" marT="38100" marB="38100" anchor="ctr">
-                    <a:lnL w="7620">
-                      <a:noFill/>
-                    </a:lnL>
-                    <a:lnR w="7620">
-                      <a:noFill/>
-                    </a:lnR>
-                    <a:lnT w="15240">
-                      <a:solidFill>
-                        <a:srgbClr val="626669"/>
-                      </a:solidFill>
-                      <a:prstDash val="solid"/>
-                    </a:lnT>
-                    <a:lnB w="7620">
-                      <a:solidFill>
-                        <a:srgbClr val="626669"/>
-                      </a:solidFill>
-                      <a:prstDash val="solid"/>
-                    </a:lnB>
-                    <a:solidFill>
-                      <a:srgbClr val="FFFEF8"/>
-                    </a:solidFill>
-                  </a:tcPr>
-                </a:tc>
-                <a:tc>
-                  <a:txBody>
-                    <a:bodyPr wrap="square">
-                      <a:noAutofit/>
-                    </a:bodyPr>
-                    <a:lstStyle/>
-                    <a:p>
-                      <a:pPr algn="l">
-                        <a:lnSpc>
-                          <a:spcPts val="2300"/>
-                        </a:lnSpc>
-                        <a:buNone/>
-                        <a:defRPr sz="2000" b="0">
-                          <a:solidFill>
-                            <a:srgbClr val="303437"/>
-                          </a:solidFill>
-                          <a:latin typeface="Noto Sans"/>
-                        </a:defRPr>
-                      </a:pPr>
-                      <a:r>
-                        <a:rPr sz="2000" b="0" lang="ja-JP" altLang="en-US">
-                          <a:solidFill>
-                            <a:srgbClr val="303437"/>
-                          </a:solidFill>
-                          <a:latin typeface="Noto Sans"/>
-                          <a:ea typeface="Noto Sans CJK JP"/>
-                          <a:cs typeface="Noto Sans"/>
-                        </a:rPr>
-                        <a:t>提示例用</a:t>
-                      </a:r>
-                    </a:p>
-                  </a:txBody>
-                  <a:tcPr marL="63500" marR="63500" marT="38100" marB="38100" anchor="ctr">
-                    <a:lnL w="7620">
-                      <a:noFill/>
-                    </a:lnL>
-                    <a:lnR w="7620">
-                      <a:noFill/>
-                    </a:lnR>
-                    <a:lnT w="15240">
-                      <a:solidFill>
-                        <a:srgbClr val="626669"/>
-                      </a:solidFill>
-                      <a:prstDash val="solid"/>
-                    </a:lnT>
-                    <a:lnB w="7620">
-                      <a:solidFill>
-                        <a:srgbClr val="626669"/>
-                      </a:solidFill>
-                      <a:prstDash val="solid"/>
-                    </a:lnB>
-                    <a:solidFill>
-                      <a:srgbClr val="FFFEF8"/>
-                    </a:solidFill>
-                  </a:tcPr>
-                </a:tc>
-                <a:tc>
-                  <a:txBody>
-                    <a:bodyPr wrap="square">
-                      <a:noAutofit/>
-                    </a:bodyPr>
-                    <a:lstStyle/>
-                    <a:p>
-                      <a:pPr algn="l">
-                        <a:lnSpc>
-                          <a:spcPts val="2300"/>
-                        </a:lnSpc>
-                        <a:buNone/>
-                        <a:defRPr sz="2000" b="0">
-                          <a:solidFill>
-                            <a:srgbClr val="303437"/>
-                          </a:solidFill>
-                          <a:latin typeface="Noto Sans"/>
-                        </a:defRPr>
-                      </a:pPr>
-                      <a:r>
-                        <a:rPr sz="2000" b="0" lang="ja-JP" altLang="en-US">
-                          <a:solidFill>
-                            <a:srgbClr val="303437"/>
-                          </a:solidFill>
-                          <a:latin typeface="Noto Sans"/>
-                          <a:ea typeface="Noto Sans CJK JP"/>
-                          <a:cs typeface="Noto Sans"/>
-                        </a:rPr>
-                        <a:t>評価用</a:t>
-                      </a:r>
-                    </a:p>
-                  </a:txBody>
-                  <a:tcPr marL="63500" marR="63500" marT="38100" marB="38100" anchor="ctr">
-                    <a:lnL w="7620">
-                      <a:noFill/>
-                    </a:lnL>
-                    <a:lnR w="7620">
-                      <a:noFill/>
-                    </a:lnR>
-                    <a:lnT w="15240">
-                      <a:solidFill>
-                        <a:srgbClr val="626669"/>
-                      </a:solidFill>
-                      <a:prstDash val="solid"/>
-                    </a:lnT>
-                    <a:lnB w="7620">
-                      <a:solidFill>
-                        <a:srgbClr val="626669"/>
-                      </a:solidFill>
-                      <a:prstDash val="solid"/>
-                    </a:lnB>
-                    <a:solidFill>
-                      <a:srgbClr val="FFFEF8"/>
-                    </a:solidFill>
-                  </a:tcPr>
-                </a:tc>
-              </a:tr>
-              <a:tr h="457200">
-                <a:tc>
-                  <a:txBody>
-                    <a:bodyPr wrap="square">
-                      <a:noAutofit/>
-                    </a:bodyPr>
-                    <a:lstStyle/>
-                    <a:p>
-                      <a:pPr algn="l">
-                        <a:lnSpc>
-                          <a:spcPts val="2300"/>
-                        </a:lnSpc>
-                        <a:buNone/>
-                        <a:defRPr sz="2000" b="0">
-                          <a:solidFill>
-                            <a:srgbClr val="303437"/>
-                          </a:solidFill>
-                          <a:latin typeface="Noto Sans"/>
-                        </a:defRPr>
-                      </a:pPr>
-                      <a:r>
-                        <a:rPr sz="2000" b="0" lang="ja-JP" altLang="en-US">
-                          <a:solidFill>
-                            <a:srgbClr val="303437"/>
-                          </a:solidFill>
-                          <a:latin typeface="Noto Sans"/>
-                          <a:ea typeface="Noto Sans CJK JP"/>
-                          <a:cs typeface="Noto Sans"/>
-                        </a:rPr>
-                        <a:t>件数</a:t>
-                      </a:r>
-                    </a:p>
-                  </a:txBody>
-                  <a:tcPr marL="63500" marR="63500" marT="38100" marB="38100" anchor="ctr">
-                    <a:lnL w="7620">
-                      <a:noFill/>
-                    </a:lnL>
-                    <a:lnR w="7620">
-                      <a:noFill/>
-                    </a:lnR>
-                    <a:lnT w="7620">
-                      <a:solidFill>
-                        <a:srgbClr val="626669"/>
-                      </a:solidFill>
-                      <a:prstDash val="solid"/>
-                    </a:lnT>
-                    <a:lnB w="7620">
-                      <a:noFill/>
-                    </a:lnB>
-                    <a:solidFill>
-                      <a:srgbClr val="FFFEF8"/>
-                    </a:solidFill>
-                  </a:tcPr>
-                </a:tc>
-                <a:tc>
-                  <a:txBody>
-                    <a:bodyPr wrap="square">
-                      <a:noAutofit/>
-                    </a:bodyPr>
-                    <a:lstStyle/>
-                    <a:p>
-                      <a:pPr algn="l">
-                        <a:lnSpc>
-                          <a:spcPts val="2300"/>
-                        </a:lnSpc>
-                        <a:buNone/>
-                        <a:defRPr sz="2000" b="0">
-                          <a:solidFill>
-                            <a:srgbClr val="303437"/>
-                          </a:solidFill>
-                          <a:latin typeface="Noto Sans"/>
-                        </a:defRPr>
-                      </a:pPr>
-                      <a:r>
-                        <a:rPr sz="2000" b="0" lang="ja-JP" altLang="en-US">
-                          <a:solidFill>
-                            <a:srgbClr val="303437"/>
-                          </a:solidFill>
-                          <a:latin typeface="Noto Sans"/>
-                          <a:ea typeface="Noto Sans CJK JP"/>
-                          <a:cs typeface="Noto Sans"/>
-                        </a:rPr>
-                        <a:t>3</a:t>
-                      </a:r>
-                    </a:p>
-                  </a:txBody>
-                  <a:tcPr marL="63500" marR="63500" marT="38100" marB="38100" anchor="ctr">
-                    <a:lnL w="7620">
-                      <a:noFill/>
-                    </a:lnL>
-                    <a:lnR w="7620">
-                      <a:noFill/>
-                    </a:lnR>
-                    <a:lnT w="7620">
-                      <a:solidFill>
-                        <a:srgbClr val="626669"/>
-                      </a:solidFill>
-                      <a:prstDash val="solid"/>
-                    </a:lnT>
-                    <a:lnB w="7620">
-                      <a:noFill/>
-                    </a:lnB>
-                    <a:solidFill>
-                      <a:srgbClr val="FFFEF8"/>
-                    </a:solidFill>
-                  </a:tcPr>
-                </a:tc>
-                <a:tc>
-                  <a:txBody>
-                    <a:bodyPr wrap="square">
-                      <a:noAutofit/>
-                    </a:bodyPr>
-                    <a:lstStyle/>
-                    <a:p>
-                      <a:pPr algn="l">
-                        <a:lnSpc>
-                          <a:spcPts val="2300"/>
-                        </a:lnSpc>
-                        <a:buNone/>
-                        <a:defRPr sz="2000" b="0">
-                          <a:solidFill>
-                            <a:srgbClr val="303437"/>
-                          </a:solidFill>
-                          <a:latin typeface="Noto Sans"/>
-                        </a:defRPr>
-                      </a:pPr>
-                      <a:r>
-                        <a:rPr sz="2000" b="0" lang="ja-JP" altLang="en-US">
-                          <a:solidFill>
-                            <a:srgbClr val="303437"/>
-                          </a:solidFill>
-                          <a:latin typeface="Noto Sans"/>
-                          <a:ea typeface="Noto Sans CJK JP"/>
-                          <a:cs typeface="Noto Sans"/>
-                        </a:rPr>
-                        <a:t>500</a:t>
-                      </a:r>
-                    </a:p>
-                  </a:txBody>
-                  <a:tcPr marL="63500" marR="63500" marT="38100" marB="38100" anchor="ctr">
-                    <a:lnL w="7620">
-                      <a:noFill/>
-                    </a:lnL>
-                    <a:lnR w="7620">
-                      <a:noFill/>
-                    </a:lnR>
-                    <a:lnT w="7620">
-                      <a:solidFill>
-                        <a:srgbClr val="626669"/>
-                      </a:solidFill>
-                      <a:prstDash val="solid"/>
-                    </a:lnT>
-                    <a:lnB w="7620">
-                      <a:noFill/>
-                    </a:lnB>
-                    <a:solidFill>
-                      <a:srgbClr val="FFFEF8"/>
-                    </a:solidFill>
-                  </a:tcPr>
-                </a:tc>
-              </a:tr>
-              <a:tr h="457200">
-                <a:tc>
-                  <a:txBody>
-                    <a:bodyPr wrap="square">
-                      <a:noAutofit/>
-                    </a:bodyPr>
-                    <a:lstStyle/>
-                    <a:p>
-                      <a:pPr algn="l">
-                        <a:lnSpc>
-                          <a:spcPts val="2300"/>
-                        </a:lnSpc>
-                        <a:buNone/>
-                        <a:defRPr sz="2000" b="0">
-                          <a:solidFill>
-                            <a:srgbClr val="303437"/>
-                          </a:solidFill>
-                          <a:latin typeface="Noto Sans"/>
-                        </a:defRPr>
-                      </a:pPr>
-                      <a:r>
-                        <a:rPr sz="2000" b="0" lang="ja-JP" altLang="en-US">
-                          <a:solidFill>
-                            <a:srgbClr val="303437"/>
-                          </a:solidFill>
-                          <a:latin typeface="Noto Sans"/>
-                          <a:ea typeface="Noto Sans CJK JP"/>
-                          <a:cs typeface="Noto Sans"/>
-                        </a:rPr>
-                        <a:t>切り出す前の生成列長</a:t>
-                      </a:r>
-                    </a:p>
-                  </a:txBody>
-                  <a:tcPr marL="63500" marR="63500" marT="38100" marB="38100" anchor="ctr">
-                    <a:lnL w="7620">
-                      <a:noFill/>
-                    </a:lnL>
-                    <a:lnR w="7620">
-                      <a:noFill/>
-                    </a:lnR>
-                    <a:lnT w="7620">
-                      <a:noFill/>
-                    </a:lnT>
-                    <a:lnB w="7620">
-                      <a:noFill/>
-                    </a:lnB>
-                    <a:solidFill>
-                      <a:srgbClr val="FFFEF8"/>
-                    </a:solidFill>
-                  </a:tcPr>
-                </a:tc>
-                <a:tc>
-                  <a:txBody>
-                    <a:bodyPr wrap="square">
-                      <a:noAutofit/>
-                    </a:bodyPr>
-                    <a:lstStyle/>
-                    <a:p>
-                      <a:pPr algn="l">
-                        <a:lnSpc>
-                          <a:spcPts val="2300"/>
-                        </a:lnSpc>
-                        <a:buNone/>
-                        <a:defRPr sz="2000" b="0">
-                          <a:solidFill>
-                            <a:srgbClr val="303437"/>
-                          </a:solidFill>
-                          <a:latin typeface="Noto Sans"/>
-                        </a:defRPr>
-                      </a:pPr>
-                      <a:r>
-                        <a:rPr sz="2000" b="0" lang="ja-JP" altLang="en-US">
-                          <a:solidFill>
-                            <a:srgbClr val="303437"/>
-                          </a:solidFill>
-                          <a:latin typeface="Noto Sans"/>
-                          <a:ea typeface="Noto Sans CJK JP"/>
-                          <a:cs typeface="Noto Sans"/>
-                        </a:rPr>
-                        <a:t>4〜50記号</a:t>
-                      </a:r>
-                    </a:p>
-                  </a:txBody>
-                  <a:tcPr marL="63500" marR="63500" marT="38100" marB="38100" anchor="ctr">
-                    <a:lnL w="7620">
-                      <a:noFill/>
-                    </a:lnL>
-                    <a:lnR w="7620">
-                      <a:noFill/>
-                    </a:lnR>
-                    <a:lnT w="7620">
-                      <a:noFill/>
-                    </a:lnT>
-                    <a:lnB w="7620">
-                      <a:noFill/>
-                    </a:lnB>
-                    <a:solidFill>
-                      <a:srgbClr val="FFFEF8"/>
-                    </a:solidFill>
-                  </a:tcPr>
-                </a:tc>
-                <a:tc>
-                  <a:txBody>
-                    <a:bodyPr wrap="square">
-                      <a:noAutofit/>
-                    </a:bodyPr>
-                    <a:lstStyle/>
-                    <a:p>
-                      <a:pPr algn="l">
-                        <a:lnSpc>
-                          <a:spcPts val="2300"/>
-                        </a:lnSpc>
-                        <a:buNone/>
-                        <a:defRPr sz="2000" b="0">
-                          <a:solidFill>
-                            <a:srgbClr val="303437"/>
-                          </a:solidFill>
-                          <a:latin typeface="Noto Sans"/>
-                        </a:defRPr>
-                      </a:pPr>
-                      <a:r>
-                        <a:rPr sz="2000" b="0" lang="ja-JP" altLang="en-US">
-                          <a:solidFill>
-                            <a:srgbClr val="303437"/>
-                          </a:solidFill>
-                          <a:latin typeface="Noto Sans"/>
-                          <a:ea typeface="Noto Sans CJK JP"/>
-                          <a:cs typeface="Noto Sans"/>
-                        </a:rPr>
-                        <a:t>52〜100記号</a:t>
-                      </a:r>
-                    </a:p>
-                  </a:txBody>
-                  <a:tcPr marL="63500" marR="63500" marT="38100" marB="38100" anchor="ctr">
-                    <a:lnL w="7620">
-                      <a:noFill/>
-                    </a:lnL>
-                    <a:lnR w="7620">
-                      <a:noFill/>
-                    </a:lnR>
-                    <a:lnT w="7620">
-                      <a:noFill/>
-                    </a:lnT>
-                    <a:lnB w="7620">
-                      <a:noFill/>
-                    </a:lnB>
-                    <a:solidFill>
-                      <a:srgbClr val="FFFEF8"/>
-                    </a:solidFill>
-                  </a:tcPr>
-                </a:tc>
-              </a:tr>
-              <a:tr h="457200">
-                <a:tc>
-                  <a:txBody>
-                    <a:bodyPr wrap="square">
-                      <a:noAutofit/>
-                    </a:bodyPr>
-                    <a:lstStyle/>
-                    <a:p>
-                      <a:pPr algn="l">
-                        <a:lnSpc>
-                          <a:spcPts val="2300"/>
-                        </a:lnSpc>
-                        <a:buNone/>
-                        <a:defRPr sz="2000" b="0">
-                          <a:solidFill>
-                            <a:srgbClr val="303437"/>
-                          </a:solidFill>
-                          <a:latin typeface="Noto Sans"/>
-                        </a:defRPr>
-                      </a:pPr>
-                      <a:r>
-                        <a:rPr sz="2000" b="0" lang="ja-JP" altLang="en-US">
-                          <a:solidFill>
-                            <a:srgbClr val="303437"/>
-                          </a:solidFill>
-                          <a:latin typeface="Noto Sans"/>
-                          <a:ea typeface="Noto Sans CJK JP"/>
-                          <a:cs typeface="Noto Sans"/>
-                        </a:rPr>
-                        <a:t>正解の最大長</a:t>
-                      </a:r>
-                    </a:p>
-                  </a:txBody>
-                  <a:tcPr marL="63500" marR="63500" marT="38100" marB="38100" anchor="ctr">
-                    <a:lnL w="7620">
-                      <a:noFill/>
-                    </a:lnL>
-                    <a:lnR w="7620">
-                      <a:noFill/>
-                    </a:lnR>
-                    <a:lnT w="7620">
-                      <a:noFill/>
-                    </a:lnT>
-                    <a:lnB w="15240">
-                      <a:solidFill>
-                        <a:srgbClr val="626669"/>
-                      </a:solidFill>
-                      <a:prstDash val="solid"/>
-                    </a:lnB>
-                    <a:solidFill>
-                      <a:srgbClr val="FFFEF8"/>
-                    </a:solidFill>
-                  </a:tcPr>
-                </a:tc>
-                <a:tc>
-                  <a:txBody>
-                    <a:bodyPr wrap="square">
-                      <a:noAutofit/>
-                    </a:bodyPr>
-                    <a:lstStyle/>
-                    <a:p>
-                      <a:pPr algn="l">
-                        <a:lnSpc>
-                          <a:spcPts val="2300"/>
-                        </a:lnSpc>
-                        <a:buNone/>
-                        <a:defRPr sz="2000" b="0">
-                          <a:solidFill>
-                            <a:srgbClr val="303437"/>
-                          </a:solidFill>
-                          <a:latin typeface="Noto Sans"/>
-                        </a:defRPr>
-                      </a:pPr>
-                      <a:r>
-                        <a:rPr sz="2000" b="0" lang="ja-JP" altLang="en-US">
-                          <a:solidFill>
-                            <a:srgbClr val="303437"/>
-                          </a:solidFill>
-                          <a:latin typeface="Noto Sans"/>
-                          <a:ea typeface="Noto Sans CJK JP"/>
-                          <a:cs typeface="Noto Sans"/>
-                        </a:rPr>
-                        <a:t>3記号</a:t>
-                      </a:r>
-                    </a:p>
-                  </a:txBody>
-                  <a:tcPr marL="63500" marR="63500" marT="38100" marB="38100" anchor="ctr">
-                    <a:lnL w="7620">
-                      <a:noFill/>
-                    </a:lnL>
-                    <a:lnR w="7620">
-                      <a:noFill/>
-                    </a:lnR>
-                    <a:lnT w="7620">
-                      <a:noFill/>
-                    </a:lnT>
-                    <a:lnB w="15240">
-                      <a:solidFill>
-                        <a:srgbClr val="626669"/>
-                      </a:solidFill>
-                      <a:prstDash val="solid"/>
-                    </a:lnB>
-                    <a:solidFill>
-                      <a:srgbClr val="FFFEF8"/>
-                    </a:solidFill>
-                  </a:tcPr>
-                </a:tc>
-                <a:tc>
-                  <a:txBody>
-                    <a:bodyPr wrap="square">
-                      <a:noAutofit/>
-                    </a:bodyPr>
-                    <a:lstStyle/>
-                    <a:p>
-                      <a:pPr algn="l">
-                        <a:lnSpc>
-                          <a:spcPts val="2300"/>
-                        </a:lnSpc>
-                        <a:buNone/>
-                        <a:defRPr sz="2000" b="0">
-                          <a:solidFill>
-                            <a:srgbClr val="303437"/>
-                          </a:solidFill>
-                          <a:latin typeface="Noto Sans"/>
-                        </a:defRPr>
-                      </a:pPr>
-                      <a:r>
-                        <a:rPr sz="2000" b="0" lang="ja-JP" altLang="en-US">
-                          <a:solidFill>
-                            <a:srgbClr val="303437"/>
-                          </a:solidFill>
-                          <a:latin typeface="Noto Sans"/>
-                          <a:ea typeface="Noto Sans CJK JP"/>
-                          <a:cs typeface="Noto Sans"/>
-                        </a:rPr>
-                        <a:t>3記号</a:t>
-                      </a:r>
-                    </a:p>
-                  </a:txBody>
-                  <a:tcPr marL="63500" marR="63500" marT="38100" marB="38100" anchor="ctr">
-                    <a:lnL w="7620">
-                      <a:noFill/>
-                    </a:lnL>
-                    <a:lnR w="7620">
-                      <a:noFill/>
-                    </a:lnR>
-                    <a:lnT w="7620">
-                      <a:noFill/>
-                    </a:lnT>
-                    <a:lnB w="15240">
-                      <a:solidFill>
-                        <a:srgbClr val="626669"/>
-                      </a:solidFill>
-                      <a:prstDash val="solid"/>
-                    </a:lnB>
-                    <a:solidFill>
-                      <a:srgbClr val="FFFEF8"/>
-                    </a:solidFill>
-                  </a:tcPr>
-                </a:tc>
-              </a:tr>
-            </a:tbl>
-          </a:graphicData>
-        </a:graphic>
-      </p:graphicFrame>
-      <p:sp>
-        <p:nvSpPr>
-          <p:cNvPr id="5" name="TextBox 4"/>
+      <p:sp>
+        <p:nvSpPr>
+          <p:cNvPr id="6" name="sources"/>
           <p:cNvSpPr txBox="1"/>
           <p:nvPr/>
         </p:nvSpPr>
         <p:spPr>
           <a:xfrm>
-            <a:off x="594360" y="3538728"/>
-            <a:ext cx="7955279" cy="658368"/>
+            <a:off x="502920" y="4700016"/>
+            <a:ext cx="8183879" cy="621792"/>
           </a:xfrm>
           <a:prstGeom prst="rect">
             <a:avLst/>
@@ -13723,109 +10497,147 @@
           <a:p>
             <a:pPr algn="l">
               <a:lnSpc>
-                <a:spcPts val="2047"/>
-              </a:lnSpc>
-              <a:spcBef>
-                <a:spcPts val="0"/>
-              </a:spcBef>
-              <a:spcAft>
-                <a:spcPts val="0"/>
-              </a:spcAft>
-              <a:buNone/>
-              <a:defRPr sz="1750" b="0">
-                <a:solidFill>
-                  <a:srgbClr val="303437"/>
-                </a:solidFill>
-                <a:latin typeface="Noto Sans"/>
-              </a:defRPr>
-            </a:pPr>
-            <a:r>
-              <a:rPr sz="1750" b="0" lang="ja-JP" altLang="en-US">
-                <a:solidFill>
-                  <a:srgbClr val="303437"/>
-                </a:solidFill>
-                <a:latin typeface="Noto Sans"/>
-                <a:ea typeface="Noto Sans CJK JP"/>
-                <a:cs typeface="Noto Sans"/>
-              </a:rPr>
-              <a:t>seed=42。入力文字列は集合内で重複させず、提示例用と評価用の重複も除く。</a:t>
-            </a:r>
-          </a:p>
-        </p:txBody>
-      </p:sp>
-      <p:sp>
-        <p:nvSpPr>
-          <p:cNvPr id="6" name="sources"/>
-          <p:cNvSpPr txBox="1"/>
-          <p:nvPr/>
-        </p:nvSpPr>
-        <p:spPr>
-          <a:xfrm>
-            <a:off x="502920" y="4700016"/>
-            <a:ext cx="8183879" cy="621792"/>
-          </a:xfrm>
-          <a:prstGeom prst="rect">
-            <a:avLst/>
-          </a:prstGeom>
-          <a:noFill/>
-        </p:spPr>
-        <p:txBody>
-          <a:bodyPr wrap="square" lIns="0" rIns="0" tIns="0" bIns="0">
+                <a:spcPts val="1200"/>
+              </a:lnSpc>
+              <a:spcBef>
+                <a:spcPts val="0"/>
+              </a:spcBef>
+              <a:spcAft>
+                <a:spcPts val="0"/>
+              </a:spcAft>
+              <a:buNone/>
+              <a:defRPr sz="810" b="0">
+                <a:solidFill>
+                  <a:srgbClr val="303437"/>
+                </a:solidFill>
+                <a:latin typeface="Noto Sans"/>
+              </a:defRPr>
+            </a:pPr>
+            <a:r>
+              <a:rPr sz="810" b="0" lang="ja-JP" altLang="en-US">
+                <a:solidFill>
+                  <a:srgbClr val="626669"/>
+                </a:solidFill>
+                <a:latin typeface="Noto Sans"/>
+                <a:ea typeface="Noto Sans CJK JP"/>
+                <a:cs typeface="Noto Sans"/>
+              </a:rPr>
+              <a:t>[1] Stanford CRFM. DyckLanguageScenario — 括弧列の生成と正解計算。</a:t>
+            </a:r>
+          </a:p>
+          <a:p>
+            <a:pPr algn="l">
+              <a:lnSpc>
+                <a:spcPts val="1200"/>
+              </a:lnSpc>
+              <a:spcBef>
+                <a:spcPts val="0"/>
+              </a:spcBef>
+              <a:spcAft>
+                <a:spcPts val="0"/>
+              </a:spcAft>
+              <a:buNone/>
+              <a:defRPr sz="810" b="0">
+                <a:solidFill>
+                  <a:srgbClr val="303437"/>
+                </a:solidFill>
+                <a:latin typeface="Noto Sans"/>
+              </a:defRPr>
+            </a:pPr>
+            <a:r>
+              <a:rPr sz="810" b="0" lang="ja-JP" altLang="en-US">
+                <a:solidFill>
+                  <a:srgbClr val="626669"/>
+                </a:solidFill>
+                <a:latin typeface="Noto Sans"/>
+                <a:ea typeface="Noto Sans CJK JP"/>
+                <a:cs typeface="Noto Sans"/>
+                <a:hlinkClick r:id="rId2"/>
+              </a:rPr>
+              <a:t>https://github.com/stanford-crfm/helm/blob/v0.3.0/src/helm/benchmark/scenarios/dyck_language_scenario.py</a:t>
+            </a:r>
+          </a:p>
+        </p:txBody>
+      </p:sp>
+      <p:sp>
+        <p:nvSpPr>
+          <p:cNvPr id="7" name="Length-generalization"/>
+          <p:cNvSpPr>
+            <a:spLocks noGrp="1"/>
+          </p:cNvSpPr>
+          <p:nvPr>
+            <p:ph type="body" idx="1"/>
+          </p:nvPr>
+        </p:nvSpPr>
+        <p:spPr>
+          <a:xfrm>
+            <a:off x="594360" y="1463040"/>
+            <a:ext cx="7955279" cy="3044952"/>
+          </a:xfrm>
+        </p:spPr>
+        <p:txBody>
+          <a:bodyPr wrap="square" tIns="91440" bIns="91440">
             <a:noAutofit/>
           </a:bodyPr>
           <a:lstStyle/>
           <a:p>
-            <a:pPr algn="l">
-              <a:lnSpc>
-                <a:spcPts val="1200"/>
-              </a:lnSpc>
-              <a:spcBef>
-                <a:spcPts val="0"/>
-              </a:spcBef>
-              <a:spcAft>
-                <a:spcPts val="0"/>
-              </a:spcAft>
-              <a:buNone/>
-              <a:defRPr sz="810" b="0">
-                <a:solidFill>
-                  <a:srgbClr val="303437"/>
-                </a:solidFill>
-                <a:latin typeface="Noto Sans"/>
-              </a:defRPr>
-            </a:pPr>
-            <a:r>
-              <a:rPr sz="810" b="0" lang="ja-JP" altLang="en-US">
-                <a:solidFill>
-                  <a:srgbClr val="626669"/>
-                </a:solidFill>
-                <a:latin typeface="Noto Sans"/>
-                <a:ea typeface="Noto Sans CJK JP"/>
-                <a:cs typeface="Noto Sans"/>
-              </a:rPr>
-              <a:t>[1] HELM v0.3.0. DyckLanguageScenario.</a:t>
-            </a:r>
-            <a:r>
-              <a:rPr sz="810" b="0" lang="ja-JP" altLang="en-US">
-                <a:solidFill>
-                  <a:srgbClr val="626669"/>
-                </a:solidFill>
-                <a:latin typeface="Noto Sans"/>
-                <a:ea typeface="Noto Sans CJK JP"/>
-                <a:cs typeface="Noto Sans"/>
-              </a:rPr>
-              <a:t>  </a:t>
-            </a:r>
-            <a:r>
-              <a:rPr sz="810" b="0" lang="ja-JP" altLang="en-US">
-                <a:solidFill>
-                  <a:srgbClr val="626669"/>
-                </a:solidFill>
-                <a:latin typeface="Noto Sans"/>
-                <a:ea typeface="Noto Sans CJK JP"/>
-                <a:cs typeface="Noto Sans"/>
-                <a:hlinkClick r:id="rId2"/>
-              </a:rPr>
-              <a:t>https://github.com/stanford-crfm/helm/blob/v0.3.0/src/helm/benchmark/scenarios/dyck_language_scenario.py</a:t>
+            <a:pPr marL="457200" indent="-355600">
+              <a:lnSpc>
+                <a:spcPts val="2499"/>
+              </a:lnSpc>
+              <a:spcAft>
+                <a:spcPts val="700"/>
+              </a:spcAft>
+              <a:buSzPct val="63333"/>
+              <a:buFont typeface="Noto Sans CJK JP"/>
+              <a:buChar char="●"/>
+              <a:defRPr sz="2100" b="0">
+                <a:solidFill>
+                  <a:srgbClr val="303437"/>
+                </a:solidFill>
+                <a:latin typeface="Noto Sans"/>
+              </a:defRPr>
+            </a:pPr>
+            <a:r>
+              <a:rPr sz="2100" b="0" lang="ja-JP" altLang="en-US">
+                <a:solidFill>
+                  <a:srgbClr val="303437"/>
+                </a:solidFill>
+                <a:latin typeface="Noto Sans"/>
+                <a:ea typeface="Noto Sans CJK JP"/>
+                <a:cs typeface="Noto Sans"/>
+              </a:rPr>
+              <a:t>短い完成列（4〜50記号）から作った問題を例として与え、より長い完成列（52〜100記号）から作った問題で試す。</a:t>
+            </a:r>
+          </a:p>
+          <a:p>
+            <a:pPr marL="457200" indent="-355600">
+              <a:lnSpc>
+                <a:spcPts val="2499"/>
+              </a:lnSpc>
+              <a:spcAft>
+                <a:spcPts val="700"/>
+              </a:spcAft>
+              <a:buSzPct val="63333"/>
+              <a:buFont typeface="Noto Sans CJK JP"/>
+              <a:buChar char="●"/>
+              <a:defRPr sz="2100" b="0">
+                <a:solidFill>
+                  <a:srgbClr val="303437"/>
+                </a:solidFill>
+                <a:latin typeface="Noto Sans"/>
+              </a:defRPr>
+            </a:pPr>
+            <a:r>
+              <a:rPr sz="2100" b="0" lang="ja-JP" altLang="en-US">
+                <a:solidFill>
+                  <a:srgbClr val="303437"/>
+                </a:solidFill>
+                <a:latin typeface="Noto Sans"/>
+                <a:ea typeface="Noto Sans CJK JP"/>
+                <a:cs typeface="Noto Sans"/>
+              </a:rPr>
+              <a:t>切り出し後の入力には、既に対応の終わった括弧対と、まだ閉じていない括弧が混在する。列が長くなっても、開いた順序をたどる規則は同じである。</a:t>
             </a:r>
           </a:p>
         </p:txBody>
@@ -14011,7 +10823,7 @@
                 <a:ea typeface="Noto Sans CJK JP"/>
                 <a:cs typeface="Noto Sans"/>
               </a:rPr>
-              <a:t>固定seedで生成した評価500件の全件集計。縦軸は件数。</a:t>
+              <a:t>生成器の一設定で作った500問。補う閉じ括弧の記号数ごとの件数。</a:t>
             </a:r>
           </a:p>
         </p:txBody>
@@ -14065,7 +10877,7 @@
                 <a:ea typeface="Noto Sans CJK JP"/>
                 <a:cs typeface="Noto Sans"/>
               </a:rPr>
-              <a:t>[1] HELM v0.3.0、seed=42の生成器で再現し、公開text-davinci-003入力と全500件を照合。</a:t>
+              <a:t>[1] Stanford CRFM. DyckLanguageScenario — 括弧列の生成と正解計算。</a:t>
             </a:r>
           </a:p>
           <a:p>
@@ -14091,813 +10903,7 @@
                 <a:cs typeface="Noto Sans"/>
                 <a:hlinkClick r:id="rId3"/>
               </a:rPr>
-              <a:t>https://crfm.stanford.edu/helm/classic/v0.4.0/#/runs/dyck_language_np=3:model=openai_text-davinci-003</a:t>
-            </a:r>
-          </a:p>
-        </p:txBody>
-      </p:sp>
-    </p:spTree>
-  </p:cSld>
-  <p:clrMapOvr>
-    <a:masterClrMapping/>
-  </p:clrMapOvr>
-</p:sld>
-</file>
-
-<file path=ppt/slides/slide24.xml><?xml version="1.0" encoding="utf-8"?>
-<p:sld xmlns:a="http://schemas.openxmlformats.org/drawingml/2006/main" xmlns:p="http://schemas.openxmlformats.org/presentationml/2006/main" xmlns:r="http://schemas.openxmlformats.org/officeDocument/2006/relationships">
-  <p:cSld>
-    <p:spTree>
-      <p:nvGrpSpPr>
-        <p:cNvPr id="1" name=""/>
-        <p:cNvGrpSpPr/>
-        <p:nvPr/>
-      </p:nvGrpSpPr>
-      <p:grpSpPr/>
-      <p:sp>
-        <p:nvSpPr>
-          <p:cNvPr id="2" name="Title 1"/>
-          <p:cNvSpPr>
-            <a:spLocks noGrp="1"/>
-          </p:cNvSpPr>
-          <p:nvPr>
-            <p:ph type="title"/>
-          </p:nvPr>
-        </p:nvSpPr>
-        <p:spPr>
-          <a:xfrm>
-            <a:off x="468172" y="650138"/>
-            <a:ext cx="8206740" cy="616305"/>
-          </a:xfrm>
-        </p:spPr>
-        <p:txBody>
-          <a:bodyPr wrap="square" lIns="0" rIns="0" tIns="0" bIns="0">
-            <a:noAutofit/>
-          </a:bodyPr>
-          <a:lstStyle/>
-          <a:p>
-            <a:pPr algn="l">
-              <a:lnSpc>
-                <a:spcPct val="110000"/>
-              </a:lnSpc>
-              <a:buNone/>
-              <a:defRPr sz="2800" b="0">
-                <a:solidFill>
-                  <a:srgbClr val="303437"/>
-                </a:solidFill>
-                <a:latin typeface="Noto Sans"/>
-              </a:defRPr>
-            </a:pPr>
-            <a:r>
-              <a:rPr sz="2800" b="1" lang="ja-JP" altLang="en-US">
-                <a:solidFill>
-                  <a:srgbClr val="303437"/>
-                </a:solidFill>
-                <a:latin typeface="Noto Sans"/>
-                <a:ea typeface="Noto Sans CJK JP"/>
-                <a:cs typeface="Noto Sans"/>
-              </a:rPr>
-              <a:t>評価入力は45〜99記号、中央値71記号</a:t>
-            </a:r>
-          </a:p>
-        </p:txBody>
-      </p:sp>
-      <p:sp>
-        <p:nvSpPr>
-          <p:cNvPr id="3" name="Title 2"/>
-          <p:cNvSpPr>
-            <a:spLocks noGrp="1"/>
-          </p:cNvSpPr>
-          <p:nvPr>
-            <p:ph type="title" idx="2"/>
-          </p:nvPr>
-        </p:nvSpPr>
-        <p:spPr>
-          <a:xfrm>
-            <a:off x="75895" y="0"/>
-            <a:ext cx="8115300" cy="480060"/>
-          </a:xfrm>
-        </p:spPr>
-        <p:txBody>
-          <a:bodyPr wrap="square" lIns="0" rIns="0" tIns="0" bIns="0" anchor="ctr">
-            <a:noAutofit/>
-          </a:bodyPr>
-          <a:lstStyle/>
-          <a:p>
-            <a:pPr algn="l">
-              <a:lnSpc>
-                <a:spcPct val="110000"/>
-              </a:lnSpc>
-              <a:buNone/>
-              <a:defRPr sz="1400" b="0">
-                <a:solidFill>
-                  <a:srgbClr val="303437"/>
-                </a:solidFill>
-                <a:latin typeface="Noto Sans"/>
-              </a:defRPr>
-            </a:pPr>
-            <a:r>
-              <a:rPr sz="1400" b="1" lang="ja-JP" altLang="en-US">
-                <a:solidFill>
-                  <a:srgbClr val="FFFEF8"/>
-                </a:solidFill>
-                <a:latin typeface="Noto Sans"/>
-                <a:ea typeface="Noto Sans CJK JP"/>
-                <a:cs typeface="Noto Sans"/>
-              </a:rPr>
-              <a:t>3. 生成方法とデータの構成</a:t>
-            </a:r>
-          </a:p>
-        </p:txBody>
-      </p:sp>
-      <p:graphicFrame>
-        <p:nvGraphicFramePr>
-          <p:cNvPr id="4" name="Table 3"/>
-          <p:cNvGraphicFramePr>
-            <a:graphicFrameLocks noGrp="1"/>
-          </p:cNvGraphicFramePr>
-          <p:nvPr/>
-        </p:nvGraphicFramePr>
-        <p:xfrm>
-          <a:off x="548640" y="1508760"/>
-          <a:ext cx="8046720" cy="2286000"/>
-        </p:xfrm>
-        <a:graphic>
-          <a:graphicData uri="http://schemas.openxmlformats.org/drawingml/2006/table">
-            <a:tbl>
-              <a:tblPr firstRow="0" bandRow="0"/>
-              <a:tblGrid>
-                <a:gridCol w="5029200"/>
-                <a:gridCol w="3017520"/>
-              </a:tblGrid>
-              <a:tr h="457200">
-                <a:tc>
-                  <a:txBody>
-                    <a:bodyPr wrap="square">
-                      <a:noAutofit/>
-                    </a:bodyPr>
-                    <a:lstStyle/>
-                    <a:p>
-                      <a:pPr algn="l">
-                        <a:lnSpc>
-                          <a:spcPts val="2300"/>
-                        </a:lnSpc>
-                        <a:buNone/>
-                        <a:defRPr sz="2000" b="0">
-                          <a:solidFill>
-                            <a:srgbClr val="303437"/>
-                          </a:solidFill>
-                          <a:latin typeface="Noto Sans"/>
-                        </a:defRPr>
-                      </a:pPr>
-                      <a:r>
-                        <a:rPr sz="2000" b="0" lang="ja-JP" altLang="en-US">
-                          <a:solidFill>
-                            <a:srgbClr val="303437"/>
-                          </a:solidFill>
-                          <a:latin typeface="Noto Sans"/>
-                          <a:ea typeface="Noto Sans CJK JP"/>
-                          <a:cs typeface="Noto Sans"/>
-                        </a:rPr>
-                        <a:t>量</a:t>
-                      </a:r>
-                    </a:p>
-                  </a:txBody>
-                  <a:tcPr marL="63500" marR="63500" marT="38100" marB="38100" anchor="ctr">
-                    <a:lnL w="7620">
-                      <a:noFill/>
-                    </a:lnL>
-                    <a:lnR w="7620">
-                      <a:noFill/>
-                    </a:lnR>
-                    <a:lnT w="15240">
-                      <a:solidFill>
-                        <a:srgbClr val="626669"/>
-                      </a:solidFill>
-                      <a:prstDash val="solid"/>
-                    </a:lnT>
-                    <a:lnB w="7620">
-                      <a:solidFill>
-                        <a:srgbClr val="626669"/>
-                      </a:solidFill>
-                      <a:prstDash val="solid"/>
-                    </a:lnB>
-                    <a:solidFill>
-                      <a:srgbClr val="FFFEF8"/>
-                    </a:solidFill>
-                  </a:tcPr>
-                </a:tc>
-                <a:tc>
-                  <a:txBody>
-                    <a:bodyPr wrap="square">
-                      <a:noAutofit/>
-                    </a:bodyPr>
-                    <a:lstStyle/>
-                    <a:p>
-                      <a:pPr algn="l">
-                        <a:lnSpc>
-                          <a:spcPts val="2300"/>
-                        </a:lnSpc>
-                        <a:buNone/>
-                        <a:defRPr sz="2000" b="0">
-                          <a:solidFill>
-                            <a:srgbClr val="303437"/>
-                          </a:solidFill>
-                          <a:latin typeface="Noto Sans"/>
-                        </a:defRPr>
-                      </a:pPr>
-                      <a:r>
-                        <a:rPr sz="2000" b="0" lang="ja-JP" altLang="en-US">
-                          <a:solidFill>
-                            <a:srgbClr val="303437"/>
-                          </a:solidFill>
-                          <a:latin typeface="Noto Sans"/>
-                          <a:ea typeface="Noto Sans CJK JP"/>
-                          <a:cs typeface="Noto Sans"/>
-                        </a:rPr>
-                        <a:t>固定seedの500件</a:t>
-                      </a:r>
-                    </a:p>
-                  </a:txBody>
-                  <a:tcPr marL="63500" marR="63500" marT="38100" marB="38100" anchor="ctr">
-                    <a:lnL w="7620">
-                      <a:noFill/>
-                    </a:lnL>
-                    <a:lnR w="7620">
-                      <a:noFill/>
-                    </a:lnR>
-                    <a:lnT w="15240">
-                      <a:solidFill>
-                        <a:srgbClr val="626669"/>
-                      </a:solidFill>
-                      <a:prstDash val="solid"/>
-                    </a:lnT>
-                    <a:lnB w="7620">
-                      <a:solidFill>
-                        <a:srgbClr val="626669"/>
-                      </a:solidFill>
-                      <a:prstDash val="solid"/>
-                    </a:lnB>
-                    <a:solidFill>
-                      <a:srgbClr val="FFFEF8"/>
-                    </a:solidFill>
-                  </a:tcPr>
-                </a:tc>
-              </a:tr>
-              <a:tr h="457200">
-                <a:tc>
-                  <a:txBody>
-                    <a:bodyPr wrap="square">
-                      <a:noAutofit/>
-                    </a:bodyPr>
-                    <a:lstStyle/>
-                    <a:p>
-                      <a:pPr algn="l">
-                        <a:lnSpc>
-                          <a:spcPts val="2300"/>
-                        </a:lnSpc>
-                        <a:buNone/>
-                        <a:defRPr sz="2000" b="0">
-                          <a:solidFill>
-                            <a:srgbClr val="303437"/>
-                          </a:solidFill>
-                          <a:latin typeface="Noto Sans"/>
-                        </a:defRPr>
-                      </a:pPr>
-                      <a:r>
-                        <a:rPr sz="2000" b="0" lang="ja-JP" altLang="en-US">
-                          <a:solidFill>
-                            <a:srgbClr val="303437"/>
-                          </a:solidFill>
-                          <a:latin typeface="Noto Sans"/>
-                          <a:ea typeface="Noto Sans CJK JP"/>
-                          <a:cs typeface="Noto Sans"/>
-                        </a:rPr>
-                        <a:t>入力の最小／最大</a:t>
-                      </a:r>
-                    </a:p>
-                  </a:txBody>
-                  <a:tcPr marL="63500" marR="63500" marT="38100" marB="38100" anchor="ctr">
-                    <a:lnL w="7620">
-                      <a:noFill/>
-                    </a:lnL>
-                    <a:lnR w="7620">
-                      <a:noFill/>
-                    </a:lnR>
-                    <a:lnT w="7620">
-                      <a:solidFill>
-                        <a:srgbClr val="626669"/>
-                      </a:solidFill>
-                      <a:prstDash val="solid"/>
-                    </a:lnT>
-                    <a:lnB w="7620">
-                      <a:noFill/>
-                    </a:lnB>
-                    <a:solidFill>
-                      <a:srgbClr val="FFFEF8"/>
-                    </a:solidFill>
-                  </a:tcPr>
-                </a:tc>
-                <a:tc>
-                  <a:txBody>
-                    <a:bodyPr wrap="square">
-                      <a:noAutofit/>
-                    </a:bodyPr>
-                    <a:lstStyle/>
-                    <a:p>
-                      <a:pPr algn="l">
-                        <a:lnSpc>
-                          <a:spcPts val="2300"/>
-                        </a:lnSpc>
-                        <a:buNone/>
-                        <a:defRPr sz="2000" b="0">
-                          <a:solidFill>
-                            <a:srgbClr val="303437"/>
-                          </a:solidFill>
-                          <a:latin typeface="Noto Sans"/>
-                        </a:defRPr>
-                      </a:pPr>
-                      <a:r>
-                        <a:rPr sz="2000" b="0" lang="ja-JP" altLang="en-US">
-                          <a:solidFill>
-                            <a:srgbClr val="303437"/>
-                          </a:solidFill>
-                          <a:latin typeface="Noto Sans"/>
-                          <a:ea typeface="Noto Sans CJK JP"/>
-                          <a:cs typeface="Noto Sans"/>
-                        </a:rPr>
-                        <a:t>45／99記号</a:t>
-                      </a:r>
-                    </a:p>
-                  </a:txBody>
-                  <a:tcPr marL="63500" marR="63500" marT="38100" marB="38100" anchor="ctr">
-                    <a:lnL w="7620">
-                      <a:noFill/>
-                    </a:lnL>
-                    <a:lnR w="7620">
-                      <a:noFill/>
-                    </a:lnR>
-                    <a:lnT w="7620">
-                      <a:solidFill>
-                        <a:srgbClr val="626669"/>
-                      </a:solidFill>
-                      <a:prstDash val="solid"/>
-                    </a:lnT>
-                    <a:lnB w="7620">
-                      <a:noFill/>
-                    </a:lnB>
-                    <a:solidFill>
-                      <a:srgbClr val="FFFEF8"/>
-                    </a:solidFill>
-                  </a:tcPr>
-                </a:tc>
-              </a:tr>
-              <a:tr h="457200">
-                <a:tc>
-                  <a:txBody>
-                    <a:bodyPr wrap="square">
-                      <a:noAutofit/>
-                    </a:bodyPr>
-                    <a:lstStyle/>
-                    <a:p>
-                      <a:pPr algn="l">
-                        <a:lnSpc>
-                          <a:spcPts val="2300"/>
-                        </a:lnSpc>
-                        <a:buNone/>
-                        <a:defRPr sz="2000" b="0">
-                          <a:solidFill>
-                            <a:srgbClr val="303437"/>
-                          </a:solidFill>
-                          <a:latin typeface="Noto Sans"/>
-                        </a:defRPr>
-                      </a:pPr>
-                      <a:r>
-                        <a:rPr sz="2000" b="0" lang="ja-JP" altLang="en-US">
-                          <a:solidFill>
-                            <a:srgbClr val="303437"/>
-                          </a:solidFill>
-                          <a:latin typeface="Noto Sans"/>
-                          <a:ea typeface="Noto Sans CJK JP"/>
-                          <a:cs typeface="Noto Sans"/>
-                        </a:rPr>
-                        <a:t>入力の中央値</a:t>
-                      </a:r>
-                    </a:p>
-                  </a:txBody>
-                  <a:tcPr marL="63500" marR="63500" marT="38100" marB="38100" anchor="ctr">
-                    <a:lnL w="7620">
-                      <a:noFill/>
-                    </a:lnL>
-                    <a:lnR w="7620">
-                      <a:noFill/>
-                    </a:lnR>
-                    <a:lnT w="7620">
-                      <a:noFill/>
-                    </a:lnT>
-                    <a:lnB w="7620">
-                      <a:noFill/>
-                    </a:lnB>
-                    <a:solidFill>
-                      <a:srgbClr val="FFFEF8"/>
-                    </a:solidFill>
-                  </a:tcPr>
-                </a:tc>
-                <a:tc>
-                  <a:txBody>
-                    <a:bodyPr wrap="square">
-                      <a:noAutofit/>
-                    </a:bodyPr>
-                    <a:lstStyle/>
-                    <a:p>
-                      <a:pPr algn="l">
-                        <a:lnSpc>
-                          <a:spcPts val="2300"/>
-                        </a:lnSpc>
-                        <a:buNone/>
-                        <a:defRPr sz="2000" b="0">
-                          <a:solidFill>
-                            <a:srgbClr val="303437"/>
-                          </a:solidFill>
-                          <a:latin typeface="Noto Sans"/>
-                        </a:defRPr>
-                      </a:pPr>
-                      <a:r>
-                        <a:rPr sz="2000" b="0" lang="ja-JP" altLang="en-US">
-                          <a:solidFill>
-                            <a:srgbClr val="303437"/>
-                          </a:solidFill>
-                          <a:latin typeface="Noto Sans"/>
-                          <a:ea typeface="Noto Sans CJK JP"/>
-                          <a:cs typeface="Noto Sans"/>
-                        </a:rPr>
-                        <a:t>71記号</a:t>
-                      </a:r>
-                    </a:p>
-                  </a:txBody>
-                  <a:tcPr marL="63500" marR="63500" marT="38100" marB="38100" anchor="ctr">
-                    <a:lnL w="7620">
-                      <a:noFill/>
-                    </a:lnL>
-                    <a:lnR w="7620">
-                      <a:noFill/>
-                    </a:lnR>
-                    <a:lnT w="7620">
-                      <a:noFill/>
-                    </a:lnT>
-                    <a:lnB w="7620">
-                      <a:noFill/>
-                    </a:lnB>
-                    <a:solidFill>
-                      <a:srgbClr val="FFFEF8"/>
-                    </a:solidFill>
-                  </a:tcPr>
-                </a:tc>
-              </a:tr>
-              <a:tr h="457200">
-                <a:tc>
-                  <a:txBody>
-                    <a:bodyPr wrap="square">
-                      <a:noAutofit/>
-                    </a:bodyPr>
-                    <a:lstStyle/>
-                    <a:p>
-                      <a:pPr algn="l">
-                        <a:lnSpc>
-                          <a:spcPts val="2300"/>
-                        </a:lnSpc>
-                        <a:buNone/>
-                        <a:defRPr sz="2000" b="0">
-                          <a:solidFill>
-                            <a:srgbClr val="303437"/>
-                          </a:solidFill>
-                          <a:latin typeface="Noto Sans"/>
-                        </a:defRPr>
-                      </a:pPr>
-                      <a:r>
-                        <a:rPr sz="2000" b="0" lang="ja-JP" altLang="en-US">
-                          <a:solidFill>
-                            <a:srgbClr val="303437"/>
-                          </a:solidFill>
-                          <a:latin typeface="Noto Sans"/>
-                          <a:ea typeface="Noto Sans CJK JP"/>
-                          <a:cs typeface="Noto Sans"/>
-                        </a:rPr>
-                        <a:t>入力の平均</a:t>
-                      </a:r>
-                    </a:p>
-                  </a:txBody>
-                  <a:tcPr marL="63500" marR="63500" marT="38100" marB="38100" anchor="ctr">
-                    <a:lnL w="7620">
-                      <a:noFill/>
-                    </a:lnL>
-                    <a:lnR w="7620">
-                      <a:noFill/>
-                    </a:lnR>
-                    <a:lnT w="7620">
-                      <a:noFill/>
-                    </a:lnT>
-                    <a:lnB w="7620">
-                      <a:noFill/>
-                    </a:lnB>
-                    <a:solidFill>
-                      <a:srgbClr val="FFFEF8"/>
-                    </a:solidFill>
-                  </a:tcPr>
-                </a:tc>
-                <a:tc>
-                  <a:txBody>
-                    <a:bodyPr wrap="square">
-                      <a:noAutofit/>
-                    </a:bodyPr>
-                    <a:lstStyle/>
-                    <a:p>
-                      <a:pPr algn="l">
-                        <a:lnSpc>
-                          <a:spcPts val="2300"/>
-                        </a:lnSpc>
-                        <a:buNone/>
-                        <a:defRPr sz="2000" b="0">
-                          <a:solidFill>
-                            <a:srgbClr val="303437"/>
-                          </a:solidFill>
-                          <a:latin typeface="Noto Sans"/>
-                        </a:defRPr>
-                      </a:pPr>
-                      <a:r>
-                        <a:rPr sz="2000" b="0" lang="ja-JP" altLang="en-US">
-                          <a:solidFill>
-                            <a:srgbClr val="303437"/>
-                          </a:solidFill>
-                          <a:latin typeface="Noto Sans"/>
-                          <a:ea typeface="Noto Sans CJK JP"/>
-                          <a:cs typeface="Noto Sans"/>
-                        </a:rPr>
-                        <a:t>71.418記号</a:t>
-                      </a:r>
-                    </a:p>
-                  </a:txBody>
-                  <a:tcPr marL="63500" marR="63500" marT="38100" marB="38100" anchor="ctr">
-                    <a:lnL w="7620">
-                      <a:noFill/>
-                    </a:lnL>
-                    <a:lnR w="7620">
-                      <a:noFill/>
-                    </a:lnR>
-                    <a:lnT w="7620">
-                      <a:noFill/>
-                    </a:lnT>
-                    <a:lnB w="7620">
-                      <a:noFill/>
-                    </a:lnB>
-                    <a:solidFill>
-                      <a:srgbClr val="FFFEF8"/>
-                    </a:solidFill>
-                  </a:tcPr>
-                </a:tc>
-              </a:tr>
-              <a:tr h="457200">
-                <a:tc>
-                  <a:txBody>
-                    <a:bodyPr wrap="square">
-                      <a:noAutofit/>
-                    </a:bodyPr>
-                    <a:lstStyle/>
-                    <a:p>
-                      <a:pPr algn="l">
-                        <a:lnSpc>
-                          <a:spcPts val="2300"/>
-                        </a:lnSpc>
-                        <a:buNone/>
-                        <a:defRPr sz="2000" b="0">
-                          <a:solidFill>
-                            <a:srgbClr val="303437"/>
-                          </a:solidFill>
-                          <a:latin typeface="Noto Sans"/>
-                        </a:defRPr>
-                      </a:pPr>
-                      <a:r>
-                        <a:rPr sz="2000" b="0" lang="ja-JP" altLang="en-US">
-                          <a:solidFill>
-                            <a:srgbClr val="303437"/>
-                          </a:solidFill>
-                          <a:latin typeface="Noto Sans"/>
-                          <a:ea typeface="Noto Sans CJK JP"/>
-                          <a:cs typeface="Noto Sans"/>
-                        </a:rPr>
-                        <a:t>最大入れ子深さの最小／最大</a:t>
-                      </a:r>
-                    </a:p>
-                  </a:txBody>
-                  <a:tcPr marL="63500" marR="63500" marT="38100" marB="38100" anchor="ctr">
-                    <a:lnL w="7620">
-                      <a:noFill/>
-                    </a:lnL>
-                    <a:lnR w="7620">
-                      <a:noFill/>
-                    </a:lnR>
-                    <a:lnT w="7620">
-                      <a:noFill/>
-                    </a:lnT>
-                    <a:lnB w="15240">
-                      <a:solidFill>
-                        <a:srgbClr val="626669"/>
-                      </a:solidFill>
-                      <a:prstDash val="solid"/>
-                    </a:lnB>
-                    <a:solidFill>
-                      <a:srgbClr val="FFFEF8"/>
-                    </a:solidFill>
-                  </a:tcPr>
-                </a:tc>
-                <a:tc>
-                  <a:txBody>
-                    <a:bodyPr wrap="square">
-                      <a:noAutofit/>
-                    </a:bodyPr>
-                    <a:lstStyle/>
-                    <a:p>
-                      <a:pPr algn="l">
-                        <a:lnSpc>
-                          <a:spcPts val="2300"/>
-                        </a:lnSpc>
-                        <a:buNone/>
-                        <a:defRPr sz="2000" b="0">
-                          <a:solidFill>
-                            <a:srgbClr val="303437"/>
-                          </a:solidFill>
-                          <a:latin typeface="Noto Sans"/>
-                        </a:defRPr>
-                      </a:pPr>
-                      <a:r>
-                        <a:rPr sz="2000" b="0" lang="ja-JP" altLang="en-US">
-                          <a:solidFill>
-                            <a:srgbClr val="303437"/>
-                          </a:solidFill>
-                          <a:latin typeface="Noto Sans"/>
-                          <a:ea typeface="Noto Sans CJK JP"/>
-                          <a:cs typeface="Noto Sans"/>
-                        </a:rPr>
-                        <a:t>6／30</a:t>
-                      </a:r>
-                    </a:p>
-                  </a:txBody>
-                  <a:tcPr marL="63500" marR="63500" marT="38100" marB="38100" anchor="ctr">
-                    <a:lnL w="7620">
-                      <a:noFill/>
-                    </a:lnL>
-                    <a:lnR w="7620">
-                      <a:noFill/>
-                    </a:lnR>
-                    <a:lnT w="7620">
-                      <a:noFill/>
-                    </a:lnT>
-                    <a:lnB w="15240">
-                      <a:solidFill>
-                        <a:srgbClr val="626669"/>
-                      </a:solidFill>
-                      <a:prstDash val="solid"/>
-                    </a:lnB>
-                    <a:solidFill>
-                      <a:srgbClr val="FFFEF8"/>
-                    </a:solidFill>
-                  </a:tcPr>
-                </a:tc>
-              </a:tr>
-            </a:tbl>
-          </a:graphicData>
-        </a:graphic>
-      </p:graphicFrame>
-      <p:sp>
-        <p:nvSpPr>
-          <p:cNvPr id="5" name="TextBox 4"/>
-          <p:cNvSpPr txBox="1"/>
-          <p:nvPr/>
-        </p:nvSpPr>
-        <p:spPr>
-          <a:xfrm>
-            <a:off x="594360" y="3995928"/>
-            <a:ext cx="7955279" cy="658368"/>
-          </a:xfrm>
-          <a:prstGeom prst="rect">
-            <a:avLst/>
-          </a:prstGeom>
-          <a:noFill/>
-        </p:spPr>
-        <p:txBody>
-          <a:bodyPr wrap="square" lIns="0" rIns="0" tIns="0" bIns="0">
-            <a:noAutofit/>
-          </a:bodyPr>
-          <a:lstStyle/>
-          <a:p>
-            <a:pPr algn="l">
-              <a:lnSpc>
-                <a:spcPts val="2047"/>
-              </a:lnSpc>
-              <a:spcBef>
-                <a:spcPts val="0"/>
-              </a:spcBef>
-              <a:spcAft>
-                <a:spcPts val="0"/>
-              </a:spcAft>
-              <a:buNone/>
-              <a:defRPr sz="1750" b="0">
-                <a:solidFill>
-                  <a:srgbClr val="303437"/>
-                </a:solidFill>
-                <a:latin typeface="Noto Sans"/>
-              </a:defRPr>
-            </a:pPr>
-            <a:r>
-              <a:rPr sz="1750" b="0" lang="ja-JP" altLang="en-US">
-                <a:solidFill>
-                  <a:srgbClr val="303437"/>
-                </a:solidFill>
-                <a:latin typeface="Noto Sans"/>
-                <a:ea typeface="Noto Sans CJK JP"/>
-                <a:cs typeface="Noto Sans"/>
-              </a:rPr>
-              <a:t>空白で区切った括弧記号を数えた。生成列から切り出した後の入力を集計。</a:t>
-            </a:r>
-          </a:p>
-        </p:txBody>
-      </p:sp>
-      <p:sp>
-        <p:nvSpPr>
-          <p:cNvPr id="6" name="sources"/>
-          <p:cNvSpPr txBox="1"/>
-          <p:nvPr/>
-        </p:nvSpPr>
-        <p:spPr>
-          <a:xfrm>
-            <a:off x="502920" y="4700016"/>
-            <a:ext cx="8183879" cy="621792"/>
-          </a:xfrm>
-          <a:prstGeom prst="rect">
-            <a:avLst/>
-          </a:prstGeom>
-          <a:noFill/>
-        </p:spPr>
-        <p:txBody>
-          <a:bodyPr wrap="square" lIns="0" rIns="0" tIns="0" bIns="0">
-            <a:noAutofit/>
-          </a:bodyPr>
-          <a:lstStyle/>
-          <a:p>
-            <a:pPr algn="l">
-              <a:lnSpc>
-                <a:spcPts val="1200"/>
-              </a:lnSpc>
-              <a:spcBef>
-                <a:spcPts val="0"/>
-              </a:spcBef>
-              <a:spcAft>
-                <a:spcPts val="0"/>
-              </a:spcAft>
-              <a:buNone/>
-              <a:defRPr sz="810" b="0">
-                <a:solidFill>
-                  <a:srgbClr val="303437"/>
-                </a:solidFill>
-                <a:latin typeface="Noto Sans"/>
-              </a:defRPr>
-            </a:pPr>
-            <a:r>
-              <a:rPr sz="810" b="0" lang="ja-JP" altLang="en-US">
-                <a:solidFill>
-                  <a:srgbClr val="626669"/>
-                </a:solidFill>
-                <a:latin typeface="Noto Sans"/>
-                <a:ea typeface="Noto Sans CJK JP"/>
-                <a:cs typeface="Noto Sans"/>
-              </a:rPr>
-              <a:t>[1] HELM v0.3.0、seed=42の生成器で再現し、公開text-davinci-003入力と全500件を照合。</a:t>
-            </a:r>
-          </a:p>
-          <a:p>
-            <a:pPr>
-              <a:lnSpc>
-                <a:spcPts val="1200"/>
-              </a:lnSpc>
-              <a:buNone/>
-              <a:defRPr sz="810" b="0">
-                <a:solidFill>
-                  <a:srgbClr val="303437"/>
-                </a:solidFill>
-                <a:latin typeface="Noto Sans"/>
-              </a:defRPr>
-            </a:pPr>
-            <a:r>
-              <a:rPr sz="810" b="0" lang="ja-JP" altLang="en-US">
-                <a:solidFill>
-                  <a:srgbClr val="626669"/>
-                </a:solidFill>
-                <a:latin typeface="Noto Sans"/>
-                <a:ea typeface="Noto Sans CJK JP"/>
-                <a:cs typeface="Noto Sans"/>
-                <a:hlinkClick r:id="rId2"/>
-              </a:rPr>
-              <a:t>https://crfm.stanford.edu/helm/classic/v0.4.0/#/runs/dyck_language_np=3:model=openai_text-davinci-003</a:t>
+              <a:t>https://github.com/stanford-crfm/helm/blob/v0.3.0/src/helm/benchmark/scenarios/dyck_language_scenario.py</a:t>
             </a:r>
           </a:p>
         </p:txBody>
@@ -14963,120 +10969,7 @@
                 <a:ea typeface="Noto Sans CJK JP"/>
                 <a:cs typeface="Noto Sans"/>
               </a:rPr>
-              <a:t>seedと実装を固定し、公開入力と照合する</a:t>
-            </a:r>
-          </a:p>
-        </p:txBody>
-      </p:sp>
-      <p:sp>
-        <p:nvSpPr>
-          <p:cNvPr id="3" name="Text Placeholder 2"/>
-          <p:cNvSpPr>
-            <a:spLocks noGrp="1"/>
-          </p:cNvSpPr>
-          <p:nvPr>
-            <p:ph type="body" idx="1"/>
-          </p:nvPr>
-        </p:nvSpPr>
-        <p:spPr>
-          <a:xfrm>
-            <a:off x="594360" y="1463040"/>
-            <a:ext cx="7955279" cy="3044952"/>
-          </a:xfrm>
-        </p:spPr>
-        <p:txBody>
-          <a:bodyPr wrap="square" tIns="91440" bIns="91440">
-            <a:noAutofit/>
-          </a:bodyPr>
-          <a:lstStyle/>
-          <a:p>
-            <a:pPr marL="457200" indent="-355600">
-              <a:lnSpc>
-                <a:spcPts val="2499"/>
-              </a:lnSpc>
-              <a:spcAft>
-                <a:spcPts val="700"/>
-              </a:spcAft>
-              <a:buSzPct val="63333"/>
-              <a:buFont typeface="Noto Sans CJK JP"/>
-              <a:buChar char="●"/>
-              <a:defRPr sz="2100" b="0">
-                <a:solidFill>
-                  <a:srgbClr val="303437"/>
-                </a:solidFill>
-                <a:latin typeface="Noto Sans"/>
-              </a:defRPr>
-            </a:pPr>
-            <a:r>
-              <a:rPr sz="2100" b="0" lang="ja-JP" altLang="en-US">
-                <a:solidFill>
-                  <a:srgbClr val="303437"/>
-                </a:solidFill>
-                <a:latin typeface="Noto Sans"/>
-                <a:ea typeface="Noto Sans CJK JP"/>
-                <a:cs typeface="Noto Sans"/>
-              </a:rPr>
-              <a:t>公式シナリオはPythonのrandomとNumPyの乱数を、どちらも42で初期化する。</a:t>
-            </a:r>
-          </a:p>
-          <a:p>
-            <a:pPr marL="457200" indent="-355600">
-              <a:lnSpc>
-                <a:spcPts val="2499"/>
-              </a:lnSpc>
-              <a:spcAft>
-                <a:spcPts val="700"/>
-              </a:spcAft>
-              <a:buSzPct val="63333"/>
-              <a:buFont typeface="Noto Sans CJK JP"/>
-              <a:buChar char="●"/>
-              <a:defRPr sz="2100" b="0">
-                <a:solidFill>
-                  <a:srgbClr val="303437"/>
-                </a:solidFill>
-                <a:latin typeface="Noto Sans"/>
-              </a:defRPr>
-            </a:pPr>
-            <a:r>
-              <a:rPr sz="2100" b="0" lang="ja-JP" altLang="en-US">
-                <a:solidFill>
-                  <a:srgbClr val="303437"/>
-                </a:solidFill>
-                <a:latin typeface="Noto Sans"/>
-                <a:ea typeface="Noto Sans CJK JP"/>
-                <a:cs typeface="Noto Sans"/>
-              </a:rPr>
-              <a:t>v0.3.0の生成処理で503件を再現し、評価500件すべての入力と正解が公開runと一致することを確認した。</a:t>
-            </a:r>
-          </a:p>
-          <a:p>
-            <a:pPr marL="457200" indent="-355600">
-              <a:lnSpc>
-                <a:spcPts val="2499"/>
-              </a:lnSpc>
-              <a:spcAft>
-                <a:spcPts val="0"/>
-              </a:spcAft>
-              <a:buSzPct val="63333"/>
-              <a:buFont typeface="Noto Sans CJK JP"/>
-              <a:buChar char="●"/>
-              <a:defRPr sz="2100" b="0">
-                <a:solidFill>
-                  <a:srgbClr val="303437"/>
-                </a:solidFill>
-                <a:latin typeface="Noto Sans"/>
-              </a:defRPr>
-            </a:pPr>
-            <a:r>
-              <a:rPr sz="2100" b="0" lang="ja-JP" altLang="en-US">
-                <a:solidFill>
-                  <a:srgbClr val="303437"/>
-                </a:solidFill>
-                <a:latin typeface="Noto Sans"/>
-                <a:ea typeface="Noto Sans CJK JP"/>
-                <a:cs typeface="Noto Sans"/>
-              </a:rPr>
-              <a:t>各例には生成時の位置、ID、原レコードとSHA-256を保存した。閉じ括弧の正解は別のスタック処理でも全件検証した。</a:t>
+              <a:t>公開された問題例から、入力と正解を読む</a:t>
             </a:r>
           </a:p>
         </p:txBody>
@@ -15178,7 +11071,7 @@
                 <a:ea typeface="Noto Sans CJK JP"/>
                 <a:cs typeface="Noto Sans"/>
               </a:rPr>
-              <a:t>[1] HELM v0.3.0、seed=42の生成器で再現し、公開text-davinci-003入力と全500件を照合。</a:t>
+              <a:t>[1] Stanford CRFM (2023). Dyck Language — 公開問題と既存出力。</a:t>
             </a:r>
           </a:p>
           <a:p>
@@ -15204,7 +11097,288 @@
                 <a:cs typeface="Noto Sans"/>
                 <a:hlinkClick r:id="rId2"/>
               </a:rPr>
-              <a:t>https://crfm.stanford.edu/helm/classic/v0.4.0/#/runs/dyck_language_np=3:model=openai_text-davinci-003</a:t>
+              <a:t>https://crfm.stanford.edu/helm/classic/v0.4.0/#/groups/dyck_language</a:t>
+            </a:r>
+          </a:p>
+        </p:txBody>
+      </p:sp>
+      <p:sp>
+        <p:nvSpPr>
+          <p:cNvPr id="6" name="code-frame"/>
+          <p:cNvSpPr/>
+          <p:nvPr/>
+        </p:nvSpPr>
+        <p:spPr>
+          <a:xfrm>
+            <a:off x="548640" y="1642491"/>
+            <a:ext cx="8046720" cy="1871218"/>
+          </a:xfrm>
+          <a:prstGeom prst="rect">
+            <a:avLst/>
+          </a:prstGeom>
+          <a:solidFill>
+            <a:srgbClr val="EBEDEB"/>
+          </a:solidFill>
+          <a:ln>
+            <a:noFill/>
+          </a:ln>
+          <a:effectLst/>
+        </p:spPr>
+        <p:style>
+          <a:lnRef idx="1">
+            <a:schemeClr val="accent1"/>
+          </a:lnRef>
+          <a:fillRef idx="3">
+            <a:schemeClr val="accent1"/>
+          </a:fillRef>
+          <a:effectRef idx="0">
+            <a:schemeClr val="accent1"/>
+          </a:effectRef>
+          <a:fontRef idx="minor">
+            <a:schemeClr val="lt1"/>
+          </a:fontRef>
+        </p:style>
+        <p:txBody>
+          <a:bodyPr rtlCol="0" anchor="t" wrap="none" lIns="152400" rIns="152400" tIns="33909" bIns="127000"/>
+          <a:lstStyle/>
+          <a:p>
+            <a:pPr algn="l">
+              <a:lnSpc>
+                <a:spcPts val="2250"/>
+              </a:lnSpc>
+              <a:spcBef>
+                <a:spcPts val="0"/>
+              </a:spcBef>
+              <a:spcAft>
+                <a:spcPts val="0"/>
+              </a:spcAft>
+              <a:buNone/>
+              <a:defRPr sz="1800" b="0">
+                <a:solidFill>
+                  <a:srgbClr val="303437"/>
+                </a:solidFill>
+                <a:latin typeface="Noto Sans"/>
+              </a:defRPr>
+            </a:pPr>
+            <a:r>
+              <a:rPr sz="1550" b="0" lang="ja-JP" altLang="en-US">
+                <a:solidFill>
+                  <a:srgbClr val="303437"/>
+                </a:solidFill>
+                <a:latin typeface="Noto Sans Mono"/>
+                <a:ea typeface="Noto Sans CJK JP"/>
+                <a:cs typeface="Liberation Mono"/>
+              </a:rPr>
+              <a:t>import json</a:t>
+            </a:r>
+          </a:p>
+          <a:p>
+            <a:pPr algn="l">
+              <a:lnSpc>
+                <a:spcPts val="2250"/>
+              </a:lnSpc>
+              <a:spcBef>
+                <a:spcPts val="0"/>
+              </a:spcBef>
+              <a:spcAft>
+                <a:spcPts val="0"/>
+              </a:spcAft>
+              <a:buNone/>
+              <a:defRPr sz="1800" b="0">
+                <a:solidFill>
+                  <a:srgbClr val="303437"/>
+                </a:solidFill>
+                <a:latin typeface="Noto Sans"/>
+              </a:defRPr>
+            </a:pPr>
+            <a:r>
+              <a:rPr sz="1550" b="0" lang="ja-JP" altLang="en-US">
+                <a:solidFill>
+                  <a:srgbClr val="303437"/>
+                </a:solidFill>
+                <a:latin typeface="Noto Sans Mono"/>
+                <a:ea typeface="Noto Sans CJK JP"/>
+                <a:cs typeface="Liberation Mono"/>
+              </a:rPr>
+              <a:t>with open("scenario_state.json", encoding="utf-8") as f:</a:t>
+            </a:r>
+          </a:p>
+          <a:p>
+            <a:pPr algn="l">
+              <a:lnSpc>
+                <a:spcPts val="2250"/>
+              </a:lnSpc>
+              <a:spcBef>
+                <a:spcPts val="0"/>
+              </a:spcBef>
+              <a:spcAft>
+                <a:spcPts val="0"/>
+              </a:spcAft>
+              <a:buNone/>
+              <a:defRPr sz="1800" b="0">
+                <a:solidFill>
+                  <a:srgbClr val="303437"/>
+                </a:solidFill>
+                <a:latin typeface="Noto Sans"/>
+              </a:defRPr>
+            </a:pPr>
+            <a:r>
+              <a:rPr sz="1550" b="0" lang="ja-JP" altLang="en-US">
+                <a:solidFill>
+                  <a:srgbClr val="303437"/>
+                </a:solidFill>
+                <a:latin typeface="Noto Sans Mono"/>
+                <a:ea typeface="Noto Sans CJK JP"/>
+                <a:cs typeface="Liberation Mono"/>
+              </a:rPr>
+              <a:t>    state = json.load(f)</a:t>
+            </a:r>
+          </a:p>
+          <a:p>
+            <a:pPr algn="l">
+              <a:lnSpc>
+                <a:spcPts val="2250"/>
+              </a:lnSpc>
+              <a:spcBef>
+                <a:spcPts val="0"/>
+              </a:spcBef>
+              <a:spcAft>
+                <a:spcPts val="0"/>
+              </a:spcAft>
+              <a:buNone/>
+              <a:defRPr sz="1800" b="0">
+                <a:solidFill>
+                  <a:srgbClr val="303437"/>
+                </a:solidFill>
+                <a:latin typeface="Noto Sans"/>
+              </a:defRPr>
+            </a:pPr>
+            <a:r>
+              <a:rPr sz="1550" b="0" lang="ja-JP" altLang="en-US">
+                <a:solidFill>
+                  <a:srgbClr val="303437"/>
+                </a:solidFill>
+                <a:latin typeface="Noto Sans Mono"/>
+                <a:ea typeface="Noto Sans CJK JP"/>
+                <a:cs typeface="Liberation Mono"/>
+              </a:rPr>
+              <a:t>example = state["request_states"][0]["instance"]</a:t>
+            </a:r>
+          </a:p>
+          <a:p>
+            <a:pPr algn="l">
+              <a:lnSpc>
+                <a:spcPts val="2250"/>
+              </a:lnSpc>
+              <a:spcBef>
+                <a:spcPts val="0"/>
+              </a:spcBef>
+              <a:spcAft>
+                <a:spcPts val="0"/>
+              </a:spcAft>
+              <a:buNone/>
+              <a:defRPr sz="1800" b="0">
+                <a:solidFill>
+                  <a:srgbClr val="303437"/>
+                </a:solidFill>
+                <a:latin typeface="Noto Sans"/>
+              </a:defRPr>
+            </a:pPr>
+            <a:r>
+              <a:rPr sz="1550" b="0" lang="ja-JP" altLang="en-US">
+                <a:solidFill>
+                  <a:srgbClr val="303437"/>
+                </a:solidFill>
+                <a:latin typeface="Noto Sans Mono"/>
+                <a:ea typeface="Noto Sans CJK JP"/>
+                <a:cs typeface="Liberation Mono"/>
+              </a:rPr>
+              <a:t>print(example["input"]["text"])</a:t>
+            </a:r>
+          </a:p>
+          <a:p>
+            <a:pPr algn="l">
+              <a:lnSpc>
+                <a:spcPts val="2250"/>
+              </a:lnSpc>
+              <a:spcBef>
+                <a:spcPts val="0"/>
+              </a:spcBef>
+              <a:spcAft>
+                <a:spcPts val="0"/>
+              </a:spcAft>
+              <a:buNone/>
+              <a:defRPr sz="1800" b="0">
+                <a:solidFill>
+                  <a:srgbClr val="303437"/>
+                </a:solidFill>
+                <a:latin typeface="Noto Sans"/>
+              </a:defRPr>
+            </a:pPr>
+            <a:r>
+              <a:rPr sz="1550" b="0" lang="ja-JP" altLang="en-US">
+                <a:solidFill>
+                  <a:srgbClr val="303437"/>
+                </a:solidFill>
+                <a:latin typeface="Noto Sans Mono"/>
+                <a:ea typeface="Noto Sans CJK JP"/>
+                <a:cs typeface="Liberation Mono"/>
+              </a:rPr>
+              <a:t>print(example["references"][0]["output"]["text"])</a:t>
+            </a:r>
+          </a:p>
+        </p:txBody>
+      </p:sp>
+      <p:sp>
+        <p:nvSpPr>
+          <p:cNvPr id="7" name="code-caption"/>
+          <p:cNvSpPr txBox="1"/>
+          <p:nvPr/>
+        </p:nvSpPr>
+        <p:spPr>
+          <a:xfrm>
+            <a:off x="594360" y="3632200"/>
+            <a:ext cx="7955279" cy="825500"/>
+          </a:xfrm>
+          <a:prstGeom prst="rect">
+            <a:avLst/>
+          </a:prstGeom>
+          <a:noFill/>
+        </p:spPr>
+        <p:txBody>
+          <a:bodyPr wrap="square" lIns="0" rIns="0" tIns="0" bIns="0">
+            <a:noAutofit/>
+          </a:bodyPr>
+          <a:lstStyle/>
+          <a:p>
+            <a:pPr algn="l">
+              <a:lnSpc>
+                <a:spcPts val="2222"/>
+              </a:lnSpc>
+              <a:spcBef>
+                <a:spcPts val="0"/>
+              </a:spcBef>
+              <a:spcAft>
+                <a:spcPts val="0"/>
+              </a:spcAft>
+              <a:buNone/>
+              <a:defRPr sz="1900" b="0">
+                <a:solidFill>
+                  <a:srgbClr val="303437"/>
+                </a:solidFill>
+                <a:latin typeface="Noto Sans"/>
+              </a:defRPr>
+            </a:pPr>
+            <a:r>
+              <a:rPr sz="1900" b="0" lang="ja-JP" altLang="en-US">
+                <a:solidFill>
+                  <a:srgbClr val="303437"/>
+                </a:solidFill>
+                <a:latin typeface="Noto Sans"/>
+                <a:ea typeface="Noto Sans CJK JP"/>
+                <a:cs typeface="Noto Sans"/>
+              </a:rPr>
+              <a:t>scenario_state.jsonは、公開された問題と既存出力の記録。最初の問題の入力と、生成器が計算した正解を表示する。</a:t>
             </a:r>
           </a:p>
         </p:txBody>
@@ -15437,7 +11611,7 @@
                 <a:ea typeface="Noto Sans CJK JP"/>
                 <a:cs typeface="Noto Sans"/>
               </a:rPr>
-              <a:t>Suzgunらは、外部メモリを持つ再帰型ニューラルネットが、入れ子構造を持つDyck言語を学べるか調べた。</a:t>
+              <a:t>Suzgunらは2019年、外部メモリを持つ再帰型ニューラルネットが、入れ子構造を持つDyck言語を学べるか調べた。</a:t>
             </a:r>
           </a:p>
           <a:p>
@@ -15497,7 +11671,7 @@
                 <a:ea typeface="Noto Sans CJK JP"/>
                 <a:cs typeface="Noto Sans"/>
               </a:rPr>
-              <a:t>HELMの「末尾の閉じ括弧を生成する課題」とは、出力の形式も採点の単位も異なる。</a:t>
+              <a:t>次に許される記号を逐次選ぶ課題と、欠けた末尾を生成する課題では、出力と採点の単位が異なる。</a:t>
             </a:r>
           </a:p>
         </p:txBody>
@@ -16389,7 +12563,7 @@
                 <a:ea typeface="Noto Sans CJK JP"/>
                 <a:cs typeface="Noto Sans"/>
               </a:rPr>
-              <a:t>BIG-benchとHELMは、補完形式が異なる</a:t>
+              <a:t>研究ごとに、括弧の種類と答え方が異なる</a:t>
             </a:r>
           </a:p>
         </p:txBody>
@@ -16713,7 +12887,7 @@
                           <a:ea typeface="Noto Sans CJK JP"/>
                           <a:cs typeface="Noto Sans"/>
                         </a:rPr>
-                        <a:t>HELMの公開設定</a:t>
+                        <a:t>生成器</a:t>
                       </a:r>
                     </a:p>
                   </a:txBody>
@@ -16766,7 +12940,7 @@
                           <a:ea typeface="Noto Sans CJK JP"/>
                           <a:cs typeface="Noto Sans"/>
                         </a:rPr>
-                        <a:t>Dyck-3、seed固定、閉じ括弧列を生成</a:t>
+                        <a:t>Dyck-3、条件を指定して括弧列を生成</a:t>
                       </a:r>
                     </a:p>
                   </a:txBody>
@@ -16845,7 +13019,7 @@
                 <a:ea typeface="Noto Sans CJK JP"/>
                 <a:cs typeface="Noto Sans"/>
               </a:rPr>
-              <a:t>BIG-benchは選択肢を入力へ追記しない設定。HELMは独自の生成器を使う。</a:t>
+              <a:t>BIG-benchは1,000問の固定データを公開する。補完問題の生成器では、括弧の種類や長さ、問題数を指定できる。</a:t>
             </a:r>
           </a:p>
         </p:txBody>
@@ -16858,7 +13032,7 @@
         </p:nvSpPr>
         <p:spPr>
           <a:xfrm>
-            <a:off x="502920" y="4700016"/>
+            <a:off x="502920" y="4517136"/>
             <a:ext cx="8183879" cy="621792"/>
           </a:xfrm>
           <a:prstGeom prst="rect">
@@ -16899,8 +13073,28 @@
                 <a:ea typeface="Noto Sans CJK JP"/>
                 <a:cs typeface="Noto Sans"/>
               </a:rPr>
-              <a:t>[1] BIG-bench. Dyck Language (2026-10-18取得)。</a:t>
-            </a:r>
+              <a:t>[1] BIG-bench. Dyck Language — 固定の括弧補完問題。</a:t>
+            </a:r>
+          </a:p>
+          <a:p>
+            <a:pPr algn="l">
+              <a:lnSpc>
+                <a:spcPts val="1200"/>
+              </a:lnSpc>
+              <a:spcBef>
+                <a:spcPts val="0"/>
+              </a:spcBef>
+              <a:spcAft>
+                <a:spcPts val="0"/>
+              </a:spcAft>
+              <a:buNone/>
+              <a:defRPr sz="810" b="0">
+                <a:solidFill>
+                  <a:srgbClr val="303437"/>
+                </a:solidFill>
+                <a:latin typeface="Noto Sans"/>
+              </a:defRPr>
+            </a:pPr>
             <a:r>
               <a:rPr sz="810" b="0" lang="ja-JP" altLang="en-US">
                 <a:solidFill>
@@ -16909,9 +13103,30 @@
                 <a:latin typeface="Noto Sans"/>
                 <a:ea typeface="Noto Sans CJK JP"/>
                 <a:cs typeface="Noto Sans"/>
-              </a:rPr>
-              <a:t>  </a:t>
-            </a:r>
+                <a:hlinkClick r:id="rId2"/>
+              </a:rPr>
+              <a:t>https://github.com/google/BIG-bench/tree/main/bigbench/benchmark_tasks/dyck_languages</a:t>
+            </a:r>
+          </a:p>
+          <a:p>
+            <a:pPr algn="l">
+              <a:lnSpc>
+                <a:spcPts val="1200"/>
+              </a:lnSpc>
+              <a:spcBef>
+                <a:spcPts val="0"/>
+              </a:spcBef>
+              <a:spcAft>
+                <a:spcPts val="0"/>
+              </a:spcAft>
+              <a:buNone/>
+              <a:defRPr sz="810" b="0">
+                <a:solidFill>
+                  <a:srgbClr val="303437"/>
+                </a:solidFill>
+                <a:latin typeface="Noto Sans"/>
+              </a:defRPr>
+            </a:pPr>
             <a:r>
               <a:rPr sz="810" b="0" lang="ja-JP" altLang="en-US">
                 <a:solidFill>
@@ -16920,9 +13135,40 @@
                 <a:latin typeface="Noto Sans"/>
                 <a:ea typeface="Noto Sans CJK JP"/>
                 <a:cs typeface="Noto Sans"/>
-                <a:hlinkClick r:id="rId2"/>
-              </a:rPr>
-              <a:t>https://github.com/google/BIG-bench/tree/main/bigbench/benchmark_tasks/dyck_languages</a:t>
+              </a:rPr>
+              <a:t>[2] Stanford CRFM. DyckLanguageScenario — 括弧列の生成。</a:t>
+            </a:r>
+          </a:p>
+          <a:p>
+            <a:pPr algn="l">
+              <a:lnSpc>
+                <a:spcPts val="1200"/>
+              </a:lnSpc>
+              <a:spcBef>
+                <a:spcPts val="0"/>
+              </a:spcBef>
+              <a:spcAft>
+                <a:spcPts val="0"/>
+              </a:spcAft>
+              <a:buNone/>
+              <a:defRPr sz="810" b="0">
+                <a:solidFill>
+                  <a:srgbClr val="303437"/>
+                </a:solidFill>
+                <a:latin typeface="Noto Sans"/>
+              </a:defRPr>
+            </a:pPr>
+            <a:r>
+              <a:rPr sz="810" b="0" lang="ja-JP" altLang="en-US">
+                <a:solidFill>
+                  <a:srgbClr val="626669"/>
+                </a:solidFill>
+                <a:latin typeface="Noto Sans"/>
+                <a:ea typeface="Noto Sans CJK JP"/>
+                <a:cs typeface="Noto Sans"/>
+                <a:hlinkClick r:id="rId3"/>
+              </a:rPr>
+              <a:t>https://github.com/stanford-crfm/helm/blob/v0.3.0/src/helm/benchmark/scenarios/dyck_language_scenario.py</a:t>
             </a:r>
           </a:p>
         </p:txBody>
@@ -17005,7 +13251,7 @@
         </p:nvSpPr>
         <p:spPr>
           <a:xfrm>
-            <a:off x="640080" y="1663901"/>
+            <a:off x="640080" y="1643581"/>
             <a:ext cx="7863840" cy="2362199"/>
           </a:xfrm>
         </p:spPr>
@@ -17071,7 +13317,7 @@
                 <a:ea typeface="Noto Sans CJK JP"/>
                 <a:cs typeface="Noto Sans"/>
               </a:rPr>
-              <a:t>HELMの採点と公開成績</a:t>
+              <a:t>正解の求め方と出力例</a:t>
             </a:r>
           </a:p>
           <a:p>
@@ -17245,7 +13491,7 @@
                 <a:ea typeface="Noto Sans CJK JP"/>
                 <a:cs typeface="Noto Sans"/>
               </a:rPr>
-              <a:t>生成器と採点コードを一緒に選ぶ</a:t>
+              <a:t>生成器から、種類と長さを変えた問題を作る</a:t>
             </a:r>
           </a:p>
         </p:txBody>
@@ -17298,7 +13544,7 @@
                 <a:ea typeface="Noto Sans CJK JP"/>
                 <a:cs typeface="Noto Sans"/>
               </a:rPr>
-              <a:t>HELM v0.3.0のDyckLanguageScenarioで、括弧の種類数、件数、長さ、seedを指定できる。生成時に外部データの取得は要らない。</a:t>
+              <a:t>Stanford CRFM研究チームの公開生成器は、括弧の種類数、問題数、長さ、乱数seedを指定して補完問題を作る。外部コーパスのダウンロードは不要で、コードはApache License 2.0で提供される。</a:t>
             </a:r>
           </a:p>
           <a:p>
@@ -17328,37 +13574,7 @@
                 <a:ea typeface="Noto Sans CJK JP"/>
                 <a:cs typeface="Noto Sans"/>
               </a:rPr>
-              <a:t>公式HELM実装のコードはApache License 2.0。元研究の実装と、HELMの生成・評価コードは別の配布物である。</a:t>
-            </a:r>
-          </a:p>
-          <a:p>
-            <a:pPr marL="457200" indent="-355600">
-              <a:lnSpc>
-                <a:spcPts val="2499"/>
-              </a:lnSpc>
-              <a:spcAft>
-                <a:spcPts val="0"/>
-              </a:spcAft>
-              <a:buSzPct val="63333"/>
-              <a:buFont typeface="Noto Sans CJK JP"/>
-              <a:buChar char="●"/>
-              <a:defRPr sz="2100" b="0">
-                <a:solidFill>
-                  <a:srgbClr val="303437"/>
-                </a:solidFill>
-                <a:latin typeface="Noto Sans"/>
-              </a:defRPr>
-            </a:pPr>
-            <a:r>
-              <a:rPr sz="2100" b="0" lang="ja-JP" altLang="en-US">
-                <a:solidFill>
-                  <a:srgbClr val="303437"/>
-                </a:solidFill>
-                <a:latin typeface="Noto Sans"/>
-                <a:ea typeface="Noto Sans CJK JP"/>
-                <a:cs typeface="Noto Sans"/>
-              </a:rPr>
-              <a:t>2026-10-18時点でも、著者の実装、BIG-benchの固定例、HELMの公開runを参照できる。</a:t>
+              <a:t>2019年の著者実装は次記号の予測実験、BIG-benchは固定の補完問題を公開する。調べたい構造や答え方に応じた資源がある。</a:t>
             </a:r>
           </a:p>
         </p:txBody>
@@ -17460,8 +13676,25 @@
                 <a:ea typeface="Noto Sans CJK JP"/>
                 <a:cs typeface="Noto Sans"/>
               </a:rPr>
-              <a:t>[1] HELM v0.3.0. DyckLanguageScenario.</a:t>
-            </a:r>
+              <a:t>[1] Stanford CRFM. DyckLanguageScenario — 括弧列の生成と正解計算。</a:t>
+            </a:r>
+          </a:p>
+          <a:p>
+            <a:pPr>
+              <a:lnSpc>
+                <a:spcPts val="1200"/>
+              </a:lnSpc>
+              <a:spcAft>
+                <a:spcPts val="0"/>
+              </a:spcAft>
+              <a:buNone/>
+              <a:defRPr sz="810" b="0">
+                <a:solidFill>
+                  <a:srgbClr val="303437"/>
+                </a:solidFill>
+                <a:latin typeface="Noto Sans"/>
+              </a:defRPr>
+            </a:pPr>
             <a:r>
               <a:rPr sz="810" b="0" lang="ja-JP" altLang="en-US">
                 <a:solidFill>
@@ -17470,71 +13703,9 @@
                 <a:latin typeface="Noto Sans"/>
                 <a:ea typeface="Noto Sans CJK JP"/>
                 <a:cs typeface="Noto Sans"/>
-              </a:rPr>
-              <a:t>  </a:t>
-            </a:r>
-            <a:r>
-              <a:rPr sz="810" b="0" lang="ja-JP" altLang="en-US">
-                <a:solidFill>
-                  <a:srgbClr val="626669"/>
-                </a:solidFill>
-                <a:latin typeface="Noto Sans"/>
-                <a:ea typeface="Noto Sans CJK JP"/>
-                <a:cs typeface="Noto Sans"/>
                 <a:hlinkClick r:id="rId2"/>
               </a:rPr>
               <a:t>https://github.com/stanford-crfm/helm/blob/v0.3.0/src/helm/benchmark/scenarios/dyck_language_scenario.py</a:t>
-            </a:r>
-          </a:p>
-          <a:p>
-            <a:pPr>
-              <a:lnSpc>
-                <a:spcPts val="1200"/>
-              </a:lnSpc>
-              <a:spcAft>
-                <a:spcPts val="0"/>
-              </a:spcAft>
-              <a:buNone/>
-              <a:defRPr sz="810" b="0">
-                <a:solidFill>
-                  <a:srgbClr val="303437"/>
-                </a:solidFill>
-                <a:latin typeface="Noto Sans"/>
-              </a:defRPr>
-            </a:pPr>
-            <a:r>
-              <a:rPr sz="810" b="0" lang="ja-JP" altLang="en-US">
-                <a:solidFill>
-                  <a:srgbClr val="626669"/>
-                </a:solidFill>
-                <a:latin typeface="Noto Sans"/>
-                <a:ea typeface="Noto Sans CJK JP"/>
-                <a:cs typeface="Noto Sans"/>
-              </a:rPr>
-              <a:t>[2] BIG-bench. Dyck Language (2026-10-18取得)。</a:t>
-            </a:r>
-            <a:r>
-              <a:rPr sz="810" b="0" lang="ja-JP" altLang="en-US">
-                <a:solidFill>
-                  <a:srgbClr val="626669"/>
-                </a:solidFill>
-                <a:latin typeface="Noto Sans"/>
-                <a:ea typeface="Noto Sans CJK JP"/>
-                <a:cs typeface="Noto Sans"/>
-              </a:rPr>
-              <a:t>  </a:t>
-            </a:r>
-            <a:r>
-              <a:rPr sz="810" b="0" lang="ja-JP" altLang="en-US">
-                <a:solidFill>
-                  <a:srgbClr val="626669"/>
-                </a:solidFill>
-                <a:latin typeface="Noto Sans"/>
-                <a:ea typeface="Noto Sans CJK JP"/>
-                <a:cs typeface="Noto Sans"/>
-                <a:hlinkClick r:id="rId3"/>
-              </a:rPr>
-              <a:t>https://github.com/google/BIG-bench/tree/main/bigbench/benchmark_tasks/dyck_languages</a:t>
             </a:r>
           </a:p>
         </p:txBody>
@@ -17600,7 +13771,7 @@
                 <a:ea typeface="Noto Sans CJK JP"/>
                 <a:cs typeface="Noto Sans"/>
               </a:rPr>
-              <a:t>括弧の順序を覚える課題と、採点の範囲</a:t>
+              <a:t>入れ子の規則を、長い列にも適用できるか</a:t>
             </a:r>
           </a:p>
         </p:txBody>
@@ -17653,7 +13824,7 @@
                 <a:ea typeface="Noto Sans CJK JP"/>
                 <a:cs typeface="Noto Sans"/>
               </a:rPr>
-              <a:t>Dyck補完は、未完の括弧を内側から正しく閉じる課題。正解はスタックから一意に計算できる。</a:t>
+              <a:t>Dyck補完は、開いたままの括弧を内側から順に閉じる課題。括弧の種類・順序・個数が合う最短の正解を、スタックから一意に求められる。</a:t>
             </a:r>
           </a:p>
           <a:p>
@@ -17683,7 +13854,7 @@
                 <a:ea typeface="Noto Sans CJK JP"/>
                 <a:cs typeface="Noto Sans"/>
               </a:rPr>
-              <a:t>HELMでは短い提示例から長い評価列へ移る。括弧列は固定seedと生成器で再現できる。</a:t>
+              <a:t>確率的な文法で、入れ子や連結を含む問題を作れる。短い列で覚えた構造を、長い列にも適用できるかを調べる。</a:t>
             </a:r>
           </a:p>
           <a:p>
@@ -17713,7 +13884,7 @@
                 <a:ea typeface="Noto Sans CJK JP"/>
                 <a:cs typeface="Noto Sans"/>
               </a:rPr>
-              <a:t>公開指標が比べるのは末尾要素であり、列全体の補完の正しさは、同じ出力を列全体でも照合して捉える。</a:t>
+              <a:t>次記号を予測する研究、固定の補完問題、条件を変えられる生成器など、目的に応じた使い方がある。</a:t>
             </a:r>
           </a:p>
         </p:txBody>
@@ -17815,8 +13986,25 @@
                 <a:ea typeface="Noto Sans CJK JP"/>
                 <a:cs typeface="Noto Sans"/>
               </a:rPr>
-              <a:t>[1] HELM v0.3.0. DyckLanguageScenario.</a:t>
-            </a:r>
+              <a:t>[1] Stanford CRFM. DyckLanguageScenario — 括弧列の生成と正解計算。</a:t>
+            </a:r>
+          </a:p>
+          <a:p>
+            <a:pPr>
+              <a:lnSpc>
+                <a:spcPts val="1200"/>
+              </a:lnSpc>
+              <a:spcAft>
+                <a:spcPts val="0"/>
+              </a:spcAft>
+              <a:buNone/>
+              <a:defRPr sz="810" b="0">
+                <a:solidFill>
+                  <a:srgbClr val="303437"/>
+                </a:solidFill>
+                <a:latin typeface="Noto Sans"/>
+              </a:defRPr>
+            </a:pPr>
             <a:r>
               <a:rPr sz="810" b="0" lang="ja-JP" altLang="en-US">
                 <a:solidFill>
@@ -17825,71 +14013,9 @@
                 <a:latin typeface="Noto Sans"/>
                 <a:ea typeface="Noto Sans CJK JP"/>
                 <a:cs typeface="Noto Sans"/>
-              </a:rPr>
-              <a:t>  </a:t>
-            </a:r>
-            <a:r>
-              <a:rPr sz="810" b="0" lang="ja-JP" altLang="en-US">
-                <a:solidFill>
-                  <a:srgbClr val="626669"/>
-                </a:solidFill>
-                <a:latin typeface="Noto Sans"/>
-                <a:ea typeface="Noto Sans CJK JP"/>
-                <a:cs typeface="Noto Sans"/>
                 <a:hlinkClick r:id="rId2"/>
               </a:rPr>
               <a:t>https://github.com/stanford-crfm/helm/blob/v0.3.0/src/helm/benchmark/scenarios/dyck_language_scenario.py</a:t>
-            </a:r>
-          </a:p>
-          <a:p>
-            <a:pPr>
-              <a:lnSpc>
-                <a:spcPts val="1200"/>
-              </a:lnSpc>
-              <a:spcAft>
-                <a:spcPts val="0"/>
-              </a:spcAft>
-              <a:buNone/>
-              <a:defRPr sz="810" b="0">
-                <a:solidFill>
-                  <a:srgbClr val="303437"/>
-                </a:solidFill>
-                <a:latin typeface="Noto Sans"/>
-              </a:defRPr>
-            </a:pPr>
-            <a:r>
-              <a:rPr sz="810" b="0" lang="ja-JP" altLang="en-US">
-                <a:solidFill>
-                  <a:srgbClr val="626669"/>
-                </a:solidFill>
-                <a:latin typeface="Noto Sans"/>
-                <a:ea typeface="Noto Sans CJK JP"/>
-                <a:cs typeface="Noto Sans"/>
-              </a:rPr>
-              <a:t>[2] HELM v0.3.0. exact_match_indicator.</a:t>
-            </a:r>
-            <a:r>
-              <a:rPr sz="810" b="0" lang="ja-JP" altLang="en-US">
-                <a:solidFill>
-                  <a:srgbClr val="626669"/>
-                </a:solidFill>
-                <a:latin typeface="Noto Sans"/>
-                <a:ea typeface="Noto Sans CJK JP"/>
-                <a:cs typeface="Noto Sans"/>
-              </a:rPr>
-              <a:t>  </a:t>
-            </a:r>
-            <a:r>
-              <a:rPr sz="810" b="0" lang="ja-JP" altLang="en-US">
-                <a:solidFill>
-                  <a:srgbClr val="626669"/>
-                </a:solidFill>
-                <a:latin typeface="Noto Sans"/>
-                <a:ea typeface="Noto Sans CJK JP"/>
-                <a:cs typeface="Noto Sans"/>
-                <a:hlinkClick r:id="rId3"/>
-              </a:rPr>
-              <a:t>https://github.com/stanford-crfm/helm/blob/v0.3.0/src/helm/benchmark/metrics/basic_metrics.py</a:t>
             </a:r>
           </a:p>
         </p:txBody>
@@ -17925,11 +14051,11 @@
         <p:spPr>
           <a:xfrm>
             <a:off x="548640" y="2484835"/>
-            <a:ext cx="8046720" cy="585216"/>
-          </a:xfrm>
-        </p:spPr>
-        <p:txBody>
-          <a:bodyPr wrap="square" lIns="0" rIns="0" tIns="0" bIns="0" anchor="ctr">
+            <a:ext cx="8046720" cy="686816"/>
+          </a:xfrm>
+        </p:spPr>
+        <p:txBody>
+          <a:bodyPr wrap="square" lIns="0" rIns="0" tIns="0" bIns="101600" anchor="ctr">
             <a:noAutofit/>
           </a:bodyPr>
           <a:lstStyle/>
@@ -18086,7 +14212,7 @@
         </p:nvSpPr>
         <p:spPr>
           <a:xfrm>
-            <a:off x="640080" y="1972511"/>
+            <a:off x="640080" y="2262071"/>
             <a:ext cx="7863840" cy="1744980"/>
           </a:xfrm>
         </p:spPr>
@@ -18136,36 +14262,6 @@
               <a:buSzPct val="100000"/>
               <a:buFont typeface="Noto Sans CJK JP"/>
               <a:buAutoNum type="arabicPeriod" startAt="2"/>
-              <a:defRPr sz="3000" b="1">
-                <a:solidFill>
-                  <a:srgbClr val="303437"/>
-                </a:solidFill>
-                <a:latin typeface="Noto Sans"/>
-              </a:defRPr>
-            </a:pPr>
-            <a:r>
-              <a:rPr sz="3000" b="1" lang="ja-JP" altLang="en-US">
-                <a:solidFill>
-                  <a:srgbClr val="303437"/>
-                </a:solidFill>
-                <a:latin typeface="Noto Sans"/>
-                <a:ea typeface="Noto Sans CJK JP"/>
-                <a:cs typeface="Noto Sans"/>
-              </a:rPr>
-              <a:t>生成と採点の補足</a:t>
-            </a:r>
-          </a:p>
-          <a:p>
-            <a:pPr marL="457200" indent="-457200">
-              <a:lnSpc>
-                <a:spcPts val="3660"/>
-              </a:lnSpc>
-              <a:spcAft>
-                <a:spcPts val="0"/>
-              </a:spcAft>
-              <a:buSzPct val="100000"/>
-              <a:buFont typeface="Noto Sans CJK JP"/>
-              <a:buAutoNum type="arabicPeriod" startAt="3"/>
               <a:defRPr sz="3000" b="1">
                 <a:solidFill>
                   <a:srgbClr val="303437"/>
@@ -18398,7 +14494,7 @@
                 <a:ea typeface="Noto Sans CJK JP"/>
                 <a:cs typeface="Noto Sans"/>
               </a:rPr>
-              <a:t>入力の全文／61記号。空白で区切り、表示上の改行だけを追加。</a:t>
+              <a:t>入力（全文）／61記号</a:t>
             </a:r>
           </a:p>
         </p:txBody>
@@ -18696,7 +14792,7 @@
                 <a:ea typeface="Noto Sans CJK JP"/>
                 <a:cs typeface="Noto Sans"/>
               </a:rPr>
-              <a:t>text-davinci-003の試行0：末尾要素の一致=1、列全体の一致=1。</a:t>
+              <a:t>以降の予測はtext-davinci-003の2023年公開出力。この例では正解に一致している。</a:t>
             </a:r>
           </a:p>
         </p:txBody>
@@ -18750,7 +14846,7 @@
                 <a:ea typeface="Noto Sans CJK JP"/>
                 <a:cs typeface="Noto Sans"/>
               </a:rPr>
-              <a:t>[1] HELM v0.3.0、seed=42の生成器で再現し、公開text-davinci-003入力と全500件を照合。 id6 / test / generator index 6</a:t>
+              <a:t>[1] Stanford CRFM (2023). Dyck Language — 公開問題と既存出力。</a:t>
             </a:r>
           </a:p>
           <a:p>
@@ -18776,7 +14872,7 @@
                 <a:cs typeface="Noto Sans"/>
                 <a:hlinkClick r:id="rId2"/>
               </a:rPr>
-              <a:t>https://crfm.stanford.edu/helm/classic/v0.4.0/#/runs/dyck_language_np=3:model=openai_text-davinci-003</a:t>
+              <a:t>https://crfm.stanford.edu/helm/classic/v0.4.0/#/groups/dyck_language</a:t>
             </a:r>
           </a:p>
         </p:txBody>
@@ -18944,7 +15040,7 @@
                 <a:ea typeface="Noto Sans CJK JP"/>
                 <a:cs typeface="Noto Sans"/>
               </a:rPr>
-              <a:t>入力の全文／77記号。空白で区切り、表示上の改行だけを追加。</a:t>
+              <a:t>入力（全文）／77記号</a:t>
             </a:r>
           </a:p>
         </p:txBody>
@@ -19273,7 +15369,7 @@
                 <a:ea typeface="Noto Sans CJK JP"/>
                 <a:cs typeface="Noto Sans"/>
               </a:rPr>
-              <a:t>text-davinci-003の試行0：末尾要素の一致=1、列全体の一致=1。</a:t>
+              <a:t>必要な括弧が一つで、予測も正解に一致している。</a:t>
             </a:r>
           </a:p>
         </p:txBody>
@@ -19327,7 +15423,7 @@
                 <a:ea typeface="Noto Sans CJK JP"/>
                 <a:cs typeface="Noto Sans"/>
               </a:rPr>
-              <a:t>[1] HELM v0.3.0、seed=42の生成器で再現し、公開text-davinci-003入力と全500件を照合。 id7 / test / generator index 7</a:t>
+              <a:t>[1] Stanford CRFM (2023). Dyck Language — 公開問題と既存出力。</a:t>
             </a:r>
           </a:p>
           <a:p>
@@ -19353,7 +15449,7 @@
                 <a:cs typeface="Noto Sans"/>
                 <a:hlinkClick r:id="rId2"/>
               </a:rPr>
-              <a:t>https://crfm.stanford.edu/helm/classic/v0.4.0/#/runs/dyck_language_np=3:model=openai_text-davinci-003</a:t>
+              <a:t>https://crfm.stanford.edu/helm/classic/v0.4.0/#/groups/dyck_language</a:t>
             </a:r>
           </a:p>
         </p:txBody>
@@ -19521,7 +15617,7 @@
                 <a:ea typeface="Noto Sans CJK JP"/>
                 <a:cs typeface="Noto Sans"/>
               </a:rPr>
-              <a:t>入力の全文／67記号。空白で区切り、表示上の改行だけを追加。</a:t>
+              <a:t>入力（全文）／67記号</a:t>
             </a:r>
           </a:p>
         </p:txBody>
@@ -19819,7 +15915,7 @@
                 <a:ea typeface="Noto Sans CJK JP"/>
                 <a:cs typeface="Noto Sans"/>
               </a:rPr>
-              <a:t>text-davinci-003の試行0：末尾要素の一致=1、列全体の一致=1。</a:t>
+              <a:t>必要な括弧が一つで、予測も正解に一致している。</a:t>
             </a:r>
           </a:p>
         </p:txBody>
@@ -19873,7 +15969,7 @@
                 <a:ea typeface="Noto Sans CJK JP"/>
                 <a:cs typeface="Noto Sans"/>
               </a:rPr>
-              <a:t>[1] HELM v0.3.0、seed=42の生成器で再現し、公開text-davinci-003入力と全500件を照合。 id8 / test / generator index 8</a:t>
+              <a:t>[1] Stanford CRFM (2023). Dyck Language — 公開問題と既存出力。</a:t>
             </a:r>
           </a:p>
           <a:p>
@@ -19899,7 +15995,7 @@
                 <a:cs typeface="Noto Sans"/>
                 <a:hlinkClick r:id="rId2"/>
               </a:rPr>
-              <a:t>https://crfm.stanford.edu/helm/classic/v0.4.0/#/runs/dyck_language_np=3:model=openai_text-davinci-003</a:t>
+              <a:t>https://crfm.stanford.edu/helm/classic/v0.4.0/#/groups/dyck_language</a:t>
             </a:r>
           </a:p>
         </p:txBody>
@@ -20067,7 +16163,7 @@
                 <a:ea typeface="Noto Sans CJK JP"/>
                 <a:cs typeface="Noto Sans"/>
               </a:rPr>
-              <a:t>入力の全文／98記号。空白で区切り、表示上の改行だけを追加。</a:t>
+              <a:t>入力（全文）／98記号</a:t>
             </a:r>
           </a:p>
         </p:txBody>
@@ -20427,7 +16523,7 @@
                 <a:ea typeface="Noto Sans CJK JP"/>
                 <a:cs typeface="Noto Sans"/>
               </a:rPr>
-              <a:t>text-davinci-003の試行0：末尾要素の一致=0、列全体の一致=0。</a:t>
+              <a:t>予測では二つの括弧の順序が入れ替わっている。</a:t>
             </a:r>
           </a:p>
         </p:txBody>
@@ -20481,7 +16577,7 @@
                 <a:ea typeface="Noto Sans CJK JP"/>
                 <a:cs typeface="Noto Sans"/>
               </a:rPr>
-              <a:t>[1] HELM v0.3.0、seed=42の生成器で再現し、公開text-davinci-003入力と全500件を照合。 id10 / test / generator index 10</a:t>
+              <a:t>[1] Stanford CRFM (2023). Dyck Language — 公開問題と既存出力。</a:t>
             </a:r>
           </a:p>
           <a:p>
@@ -20507,7 +16603,7 @@
                 <a:cs typeface="Noto Sans"/>
                 <a:hlinkClick r:id="rId2"/>
               </a:rPr>
-              <a:t>https://crfm.stanford.edu/helm/classic/v0.4.0/#/runs/dyck_language_np=3:model=openai_text-davinci-003</a:t>
+              <a:t>https://crfm.stanford.edu/helm/classic/v0.4.0/#/groups/dyck_language</a:t>
             </a:r>
           </a:p>
         </p:txBody>
@@ -20675,7 +16771,7 @@
                 <a:ea typeface="Noto Sans CJK JP"/>
                 <a:cs typeface="Noto Sans"/>
               </a:rPr>
-              <a:t>入力の全文／53記号。空白で区切り、表示上の改行だけを追加。</a:t>
+              <a:t>入力（全文）／53記号</a:t>
             </a:r>
           </a:p>
         </p:txBody>
@@ -20973,7 +17069,7 @@
                 <a:ea typeface="Noto Sans CJK JP"/>
                 <a:cs typeface="Noto Sans"/>
               </a:rPr>
-              <a:t>text-davinci-003の試行0：末尾要素の一致=0、列全体の一致=0。</a:t>
+              <a:t>予測には、正解より閉じ括弧が一つ多い。</a:t>
             </a:r>
           </a:p>
         </p:txBody>
@@ -21027,7 +17123,7 @@
                 <a:ea typeface="Noto Sans CJK JP"/>
                 <a:cs typeface="Noto Sans"/>
               </a:rPr>
-              <a:t>[1] HELM v0.3.0、seed=42の生成器で再現し、公開text-davinci-003入力と全500件を照合。 id11 / test / generator index 11</a:t>
+              <a:t>[1] Stanford CRFM (2023). Dyck Language — 公開問題と既存出力。</a:t>
             </a:r>
           </a:p>
           <a:p>
@@ -21053,7 +17149,7 @@
                 <a:cs typeface="Noto Sans"/>
                 <a:hlinkClick r:id="rId2"/>
               </a:rPr>
-              <a:t>https://crfm.stanford.edu/helm/classic/v0.4.0/#/runs/dyck_language_np=3:model=openai_text-davinci-003</a:t>
+              <a:t>https://crfm.stanford.edu/helm/classic/v0.4.0/#/groups/dyck_language</a:t>
             </a:r>
           </a:p>
         </p:txBody>
@@ -21221,7 +17317,7 @@
                 <a:ea typeface="Noto Sans CJK JP"/>
                 <a:cs typeface="Noto Sans"/>
               </a:rPr>
-              <a:t>入力の全文／70記号。空白で区切り、表示上の改行だけを追加。</a:t>
+              <a:t>入力（全文）／70記号</a:t>
             </a:r>
           </a:p>
         </p:txBody>
@@ -21519,7 +17615,7 @@
                 <a:ea typeface="Noto Sans CJK JP"/>
                 <a:cs typeface="Noto Sans"/>
               </a:rPr>
-              <a:t>text-davinci-003の試行0：末尾要素の一致=1、列全体の一致=1。</a:t>
+              <a:t>二種類の閉じ括弧が、正しい順序で予測されている。</a:t>
             </a:r>
           </a:p>
         </p:txBody>
@@ -21573,7 +17669,7 @@
                 <a:ea typeface="Noto Sans CJK JP"/>
                 <a:cs typeface="Noto Sans"/>
               </a:rPr>
-              <a:t>[1] HELM v0.3.0、seed=42の生成器で再現し、公開text-davinci-003入力と全500件を照合。 id12 / test / generator index 12</a:t>
+              <a:t>[1] Stanford CRFM (2023). Dyck Language — 公開問題と既存出力。</a:t>
             </a:r>
           </a:p>
           <a:p>
@@ -21599,7 +17695,7 @@
                 <a:cs typeface="Noto Sans"/>
                 <a:hlinkClick r:id="rId2"/>
               </a:rPr>
-              <a:t>https://crfm.stanford.edu/helm/classic/v0.4.0/#/runs/dyck_language_np=3:model=openai_text-davinci-003</a:t>
+              <a:t>https://crfm.stanford.edu/helm/classic/v0.4.0/#/groups/dyck_language</a:t>
             </a:r>
           </a:p>
         </p:txBody>
@@ -21881,7 +17977,7 @@
                 <a:ea typeface="Noto Sans CJK JP"/>
                 <a:cs typeface="Noto Sans"/>
               </a:rPr>
-              <a:t>入力の全文／91記号。空白で区切り、表示上の改行だけを追加。</a:t>
+              <a:t>入力（全文）／91記号</a:t>
             </a:r>
           </a:p>
         </p:txBody>
@@ -22210,7 +18306,7 @@
                 <a:ea typeface="Noto Sans CJK JP"/>
                 <a:cs typeface="Noto Sans"/>
               </a:rPr>
-              <a:t>text-davinci-003の試行0：末尾要素の一致=1、列全体の一致=1。</a:t>
+              <a:t>三つの閉じ括弧を、内側から逆順に閉じている。</a:t>
             </a:r>
           </a:p>
         </p:txBody>
@@ -22264,7 +18360,7 @@
                 <a:ea typeface="Noto Sans CJK JP"/>
                 <a:cs typeface="Noto Sans"/>
               </a:rPr>
-              <a:t>[1] HELM v0.3.0、seed=42の生成器で再現し、公開text-davinci-003入力と全500件を照合。 id13 / test / generator index 13</a:t>
+              <a:t>[1] Stanford CRFM (2023). Dyck Language — 公開問題と既存出力。</a:t>
             </a:r>
           </a:p>
           <a:p>
@@ -22290,7 +18386,7 @@
                 <a:cs typeface="Noto Sans"/>
                 <a:hlinkClick r:id="rId2"/>
               </a:rPr>
-              <a:t>https://crfm.stanford.edu/helm/classic/v0.4.0/#/runs/dyck_language_np=3:model=openai_text-davinci-003</a:t>
+              <a:t>https://crfm.stanford.edu/helm/classic/v0.4.0/#/groups/dyck_language</a:t>
             </a:r>
           </a:p>
         </p:txBody>
@@ -22458,7 +18554,7 @@
                 <a:ea typeface="Noto Sans CJK JP"/>
                 <a:cs typeface="Noto Sans"/>
               </a:rPr>
-              <a:t>入力の全文／49記号。空白で区切り、表示上の改行だけを追加。</a:t>
+              <a:t>入力（全文）／49記号</a:t>
             </a:r>
           </a:p>
         </p:txBody>
@@ -22756,7 +18852,7 @@
                 <a:ea typeface="Noto Sans CJK JP"/>
                 <a:cs typeface="Noto Sans"/>
               </a:rPr>
-              <a:t>text-davinci-003の試行0：末尾要素の一致=1、列全体の一致=1。</a:t>
+              <a:t>短めの入力にも、異なる種類の入れ子が含まれる。</a:t>
             </a:r>
           </a:p>
         </p:txBody>
@@ -22810,7 +18906,7 @@
                 <a:ea typeface="Noto Sans CJK JP"/>
                 <a:cs typeface="Noto Sans"/>
               </a:rPr>
-              <a:t>[1] HELM v0.3.0、seed=42の生成器で再現し、公開text-davinci-003入力と全500件を照合。 id14 / test / generator index 14</a:t>
+              <a:t>[1] Stanford CRFM (2023). Dyck Language — 公開問題と既存出力。</a:t>
             </a:r>
           </a:p>
           <a:p>
@@ -22836,7 +18932,7 @@
                 <a:cs typeface="Noto Sans"/>
                 <a:hlinkClick r:id="rId2"/>
               </a:rPr>
-              <a:t>https://crfm.stanford.edu/helm/classic/v0.4.0/#/runs/dyck_language_np=3:model=openai_text-davinci-003</a:t>
+              <a:t>https://crfm.stanford.edu/helm/classic/v0.4.0/#/groups/dyck_language</a:t>
             </a:r>
           </a:p>
         </p:txBody>
@@ -23004,7 +19100,7 @@
                 <a:ea typeface="Noto Sans CJK JP"/>
                 <a:cs typeface="Noto Sans"/>
               </a:rPr>
-              <a:t>入力の全文／89記号。空白で区切り、表示上の改行だけを追加。</a:t>
+              <a:t>入力（全文）／89記号</a:t>
             </a:r>
           </a:p>
         </p:txBody>
@@ -23333,7 +19429,7 @@
                 <a:ea typeface="Noto Sans CJK JP"/>
                 <a:cs typeface="Noto Sans"/>
               </a:rPr>
-              <a:t>text-davinci-003の試行0：末尾要素の一致=0、列全体の一致=0。</a:t>
+              <a:t>予測の最後の括弧が、必要な種類と異なっている。</a:t>
             </a:r>
           </a:p>
         </p:txBody>
@@ -23387,7 +19483,7 @@
                 <a:ea typeface="Noto Sans CJK JP"/>
                 <a:cs typeface="Noto Sans"/>
               </a:rPr>
-              <a:t>[1] HELM v0.3.0、seed=42の生成器で再現し、公開text-davinci-003入力と全500件を照合。 id15 / test / generator index 15</a:t>
+              <a:t>[1] Stanford CRFM (2023). Dyck Language — 公開問題と既存出力。</a:t>
             </a:r>
           </a:p>
           <a:p>
@@ -23413,7 +19509,7 @@
                 <a:cs typeface="Noto Sans"/>
                 <a:hlinkClick r:id="rId2"/>
               </a:rPr>
-              <a:t>https://crfm.stanford.edu/helm/classic/v0.4.0/#/runs/dyck_language_np=3:model=openai_text-davinci-003</a:t>
+              <a:t>https://crfm.stanford.edu/helm/classic/v0.4.0/#/groups/dyck_language</a:t>
             </a:r>
           </a:p>
         </p:txBody>
@@ -23581,7 +19677,7 @@
                 <a:ea typeface="Noto Sans CJK JP"/>
                 <a:cs typeface="Noto Sans"/>
               </a:rPr>
-              <a:t>入力の全文／74記号。空白で区切り、表示上の改行だけを追加。</a:t>
+              <a:t>入力（全文）／74記号</a:t>
             </a:r>
           </a:p>
         </p:txBody>
@@ -23910,7 +20006,7 @@
                 <a:ea typeface="Noto Sans CJK JP"/>
                 <a:cs typeface="Noto Sans"/>
               </a:rPr>
-              <a:t>text-davinci-003の試行0：末尾要素の一致=1、列全体の一致=0。</a:t>
+              <a:t>予測には、正解にない丸括弧が一つ多い。</a:t>
             </a:r>
           </a:p>
         </p:txBody>
@@ -23964,7 +20060,7 @@
                 <a:ea typeface="Noto Sans CJK JP"/>
                 <a:cs typeface="Noto Sans"/>
               </a:rPr>
-              <a:t>[1] HELM v0.3.0、seed=42の生成器で再現し、公開text-davinci-003入力と全500件を照合。 id16 / test / generator index 16</a:t>
+              <a:t>[1] Stanford CRFM (2023). Dyck Language — 公開問題と既存出力。</a:t>
             </a:r>
           </a:p>
           <a:p>
@@ -23990,973 +20086,7 @@
                 <a:cs typeface="Noto Sans"/>
                 <a:hlinkClick r:id="rId2"/>
               </a:rPr>
-              <a:t>https://crfm.stanford.edu/helm/classic/v0.4.0/#/runs/dyck_language_np=3:model=openai_text-davinci-003</a:t>
-            </a:r>
-          </a:p>
-        </p:txBody>
-      </p:sp>
-    </p:spTree>
-  </p:cSld>
-  <p:clrMapOvr>
-    <a:masterClrMapping/>
-  </p:clrMapOvr>
-</p:sld>
-</file>
-
-<file path=ppt/slides/slide44.xml><?xml version="1.0" encoding="utf-8"?>
-<p:sld xmlns:a="http://schemas.openxmlformats.org/drawingml/2006/main" xmlns:p="http://schemas.openxmlformats.org/presentationml/2006/main" xmlns:r="http://schemas.openxmlformats.org/officeDocument/2006/relationships">
-  <p:cSld>
-    <p:spTree>
-      <p:nvGrpSpPr>
-        <p:cNvPr id="1" name=""/>
-        <p:cNvGrpSpPr/>
-        <p:nvPr/>
-      </p:nvGrpSpPr>
-      <p:grpSpPr/>
-      <p:sp>
-        <p:nvSpPr>
-          <p:cNvPr id="2" name="Title 1"/>
-          <p:cNvSpPr>
-            <a:spLocks noGrp="1"/>
-          </p:cNvSpPr>
-          <p:nvPr>
-            <p:ph type="title"/>
-          </p:nvPr>
-        </p:nvSpPr>
-        <p:spPr>
-          <a:xfrm>
-            <a:off x="468172" y="650138"/>
-            <a:ext cx="8206740" cy="616305"/>
-          </a:xfrm>
-        </p:spPr>
-        <p:txBody>
-          <a:bodyPr wrap="square" lIns="0" rIns="0" tIns="0" bIns="0">
-            <a:noAutofit/>
-          </a:bodyPr>
-          <a:lstStyle/>
-          <a:p>
-            <a:pPr algn="l">
-              <a:lnSpc>
-                <a:spcPct val="110000"/>
-              </a:lnSpc>
-              <a:buNone/>
-              <a:defRPr sz="2800" b="0">
-                <a:solidFill>
-                  <a:srgbClr val="303437"/>
-                </a:solidFill>
-                <a:latin typeface="Noto Sans"/>
-              </a:defRPr>
-            </a:pPr>
-            <a:r>
-              <a:rPr sz="2800" b="1" lang="ja-JP" altLang="en-US">
-                <a:solidFill>
-                  <a:srgbClr val="303437"/>
-                </a:solidFill>
-                <a:latin typeface="Noto Sans"/>
-                <a:ea typeface="Noto Sans CJK JP"/>
-                <a:cs typeface="Noto Sans"/>
-              </a:rPr>
-              <a:t>公開プロンプトには完成した3列が先行する</a:t>
-            </a:r>
-          </a:p>
-        </p:txBody>
-      </p:sp>
-      <p:sp>
-        <p:nvSpPr>
-          <p:cNvPr id="3" name="Text Placeholder 2"/>
-          <p:cNvSpPr>
-            <a:spLocks noGrp="1"/>
-          </p:cNvSpPr>
-          <p:nvPr>
-            <p:ph type="body" idx="1"/>
-          </p:nvPr>
-        </p:nvSpPr>
-        <p:spPr>
-          <a:xfrm>
-            <a:off x="594360" y="1463040"/>
-            <a:ext cx="7955279" cy="3044952"/>
-          </a:xfrm>
-        </p:spPr>
-        <p:txBody>
-          <a:bodyPr wrap="square" tIns="91440" bIns="91440">
-            <a:noAutofit/>
-          </a:bodyPr>
-          <a:lstStyle/>
-          <a:p>
-            <a:pPr marL="457200" indent="-355600">
-              <a:lnSpc>
-                <a:spcPts val="2499"/>
-              </a:lnSpc>
-              <a:spcAft>
-                <a:spcPts val="700"/>
-              </a:spcAft>
-              <a:buSzPct val="63333"/>
-              <a:buFont typeface="Noto Sans CJK JP"/>
-              <a:buChar char="●"/>
-              <a:defRPr sz="2100" b="0">
-                <a:solidFill>
-                  <a:srgbClr val="303437"/>
-                </a:solidFill>
-                <a:latin typeface="Noto Sans"/>
-              </a:defRPr>
-            </a:pPr>
-            <a:r>
-              <a:rPr sz="2100" b="0" lang="ja-JP" altLang="en-US">
-                <a:solidFill>
-                  <a:srgbClr val="303437"/>
-                </a:solidFill>
-                <a:latin typeface="Noto Sans"/>
-                <a:ea typeface="Noto Sans CJK JP"/>
-                <a:cs typeface="Noto Sans"/>
-              </a:rPr>
-              <a:t>公開runの指示に続き、3件の提示例と、補完対象の入力が並ぶ。提示例では入力と正解の閉じ括弧が連続し、完成した列になる。</a:t>
-            </a:r>
-          </a:p>
-          <a:p>
-            <a:pPr marL="457200" indent="-355600">
-              <a:lnSpc>
-                <a:spcPts val="2499"/>
-              </a:lnSpc>
-              <a:spcAft>
-                <a:spcPts val="700"/>
-              </a:spcAft>
-              <a:buSzPct val="63333"/>
-              <a:buFont typeface="Noto Sans CJK JP"/>
-              <a:buChar char="●"/>
-              <a:defRPr sz="2100" b="0">
-                <a:solidFill>
-                  <a:srgbClr val="303437"/>
-                </a:solidFill>
-                <a:latin typeface="Noto Sans"/>
-              </a:defRPr>
-            </a:pPr>
-            <a:r>
-              <a:rPr sz="2100" b="0" lang="ja-JP" altLang="en-US">
-                <a:solidFill>
-                  <a:srgbClr val="303437"/>
-                </a:solidFill>
-                <a:latin typeface="Noto Sans"/>
-                <a:ea typeface="Noto Sans CJK JP"/>
-                <a:cs typeface="Noto Sans"/>
-              </a:rPr>
-              <a:t>公開設定はmax_train_instances=3、num_train_trials=3。確認した3モデルは平均提示例数3、prompt_truncated=0。</a:t>
-            </a:r>
-          </a:p>
-          <a:p>
-            <a:pPr marL="457200" indent="-355600">
-              <a:lnSpc>
-                <a:spcPts val="2499"/>
-              </a:lnSpc>
-              <a:spcAft>
-                <a:spcPts val="0"/>
-              </a:spcAft>
-              <a:buSzPct val="63333"/>
-              <a:buFont typeface="Noto Sans CJK JP"/>
-              <a:buChar char="●"/>
-              <a:defRPr sz="2100" b="0">
-                <a:solidFill>
-                  <a:srgbClr val="303437"/>
-                </a:solidFill>
-                <a:latin typeface="Noto Sans"/>
-              </a:defRPr>
-            </a:pPr>
-            <a:r>
-              <a:rPr sz="2100" b="0" lang="ja-JP" altLang="en-US">
-                <a:solidFill>
-                  <a:srgbClr val="303437"/>
-                </a:solidFill>
-                <a:latin typeface="Noto Sans"/>
-                <a:ea typeface="Noto Sans CJK JP"/>
-                <a:cs typeface="Noto Sans"/>
-              </a:rPr>
-              <a:t>生成は温度0、最大5トークン、改行で停止。括弧記号数と、モデルの生成トークン数は異なる。</a:t>
-            </a:r>
-          </a:p>
-        </p:txBody>
-      </p:sp>
-      <p:sp>
-        <p:nvSpPr>
-          <p:cNvPr id="4" name="Title 3"/>
-          <p:cNvSpPr>
-            <a:spLocks noGrp="1"/>
-          </p:cNvSpPr>
-          <p:nvPr>
-            <p:ph type="title" idx="2"/>
-          </p:nvPr>
-        </p:nvSpPr>
-        <p:spPr>
-          <a:xfrm>
-            <a:off x="75895" y="0"/>
-            <a:ext cx="8115300" cy="480060"/>
-          </a:xfrm>
-        </p:spPr>
-        <p:txBody>
-          <a:bodyPr wrap="square" lIns="0" rIns="0" tIns="0" bIns="0" anchor="ctr">
-            <a:noAutofit/>
-          </a:bodyPr>
-          <a:lstStyle/>
-          <a:p>
-            <a:pPr algn="l">
-              <a:lnSpc>
-                <a:spcPct val="110000"/>
-              </a:lnSpc>
-              <a:buNone/>
-              <a:defRPr sz="1400" b="0">
-                <a:solidFill>
-                  <a:srgbClr val="303437"/>
-                </a:solidFill>
-                <a:latin typeface="Noto Sans"/>
-              </a:defRPr>
-            </a:pPr>
-            <a:r>
-              <a:rPr sz="1400" b="1" lang="ja-JP" altLang="en-US">
-                <a:solidFill>
-                  <a:srgbClr val="FFFEF8"/>
-                </a:solidFill>
-                <a:latin typeface="Noto Sans"/>
-                <a:ea typeface="Noto Sans CJK JP"/>
-                <a:cs typeface="Noto Sans"/>
-              </a:rPr>
-              <a:t>Appendix: 2. 生成と採点の補足</a:t>
-            </a:r>
-          </a:p>
-        </p:txBody>
-      </p:sp>
-      <p:sp>
-        <p:nvSpPr>
-          <p:cNvPr id="5" name="sources"/>
-          <p:cNvSpPr txBox="1"/>
-          <p:nvPr/>
-        </p:nvSpPr>
-        <p:spPr>
-          <a:xfrm>
-            <a:off x="502920" y="4700016"/>
-            <a:ext cx="8183879" cy="621792"/>
-          </a:xfrm>
-          <a:prstGeom prst="rect">
-            <a:avLst/>
-          </a:prstGeom>
-          <a:noFill/>
-        </p:spPr>
-        <p:txBody>
-          <a:bodyPr wrap="square" lIns="0" rIns="0" tIns="0" bIns="0">
-            <a:noAutofit/>
-          </a:bodyPr>
-          <a:lstStyle/>
-          <a:p>
-            <a:pPr algn="l">
-              <a:lnSpc>
-                <a:spcPts val="1200"/>
-              </a:lnSpc>
-              <a:spcBef>
-                <a:spcPts val="0"/>
-              </a:spcBef>
-              <a:spcAft>
-                <a:spcPts val="0"/>
-              </a:spcAft>
-              <a:buNone/>
-              <a:defRPr sz="810" b="0">
-                <a:solidFill>
-                  <a:srgbClr val="303437"/>
-                </a:solidFill>
-                <a:latin typeface="Noto Sans"/>
-              </a:defRPr>
-            </a:pPr>
-            <a:r>
-              <a:rPr sz="810" b="0" lang="ja-JP" altLang="en-US">
-                <a:solidFill>
-                  <a:srgbClr val="626669"/>
-                </a:solidFill>
-                <a:latin typeface="Noto Sans"/>
-                <a:ea typeface="Noto Sans CJK JP"/>
-                <a:cs typeface="Noto Sans"/>
-              </a:rPr>
-              <a:t>[1] HELM Classic v0.4.0, Dyck Language. 公開run suite v0.3.0、括弧3種類。</a:t>
-            </a:r>
-            <a:r>
-              <a:rPr sz="810" b="0" lang="ja-JP" altLang="en-US">
-                <a:solidFill>
-                  <a:srgbClr val="626669"/>
-                </a:solidFill>
-                <a:latin typeface="Noto Sans"/>
-                <a:ea typeface="Noto Sans CJK JP"/>
-                <a:cs typeface="Noto Sans"/>
-              </a:rPr>
-              <a:t>  </a:t>
-            </a:r>
-            <a:r>
-              <a:rPr sz="810" b="0" lang="ja-JP" altLang="en-US">
-                <a:solidFill>
-                  <a:srgbClr val="626669"/>
-                </a:solidFill>
-                <a:latin typeface="Noto Sans"/>
-                <a:ea typeface="Noto Sans CJK JP"/>
-                <a:cs typeface="Noto Sans"/>
-                <a:hlinkClick r:id="rId2"/>
-              </a:rPr>
               <a:t>https://crfm.stanford.edu/helm/classic/v0.4.0/#/groups/dyck_language</a:t>
-            </a:r>
-          </a:p>
-        </p:txBody>
-      </p:sp>
-    </p:spTree>
-  </p:cSld>
-  <p:clrMapOvr>
-    <a:masterClrMapping/>
-  </p:clrMapOvr>
-</p:sld>
-</file>
-
-<file path=ppt/slides/slide45.xml><?xml version="1.0" encoding="utf-8"?>
-<p:sld xmlns:a="http://schemas.openxmlformats.org/drawingml/2006/main" xmlns:p="http://schemas.openxmlformats.org/presentationml/2006/main" xmlns:r="http://schemas.openxmlformats.org/officeDocument/2006/relationships">
-  <p:cSld>
-    <p:spTree>
-      <p:nvGrpSpPr>
-        <p:cNvPr id="1" name=""/>
-        <p:cNvGrpSpPr/>
-        <p:nvPr/>
-      </p:nvGrpSpPr>
-      <p:grpSpPr/>
-      <p:sp>
-        <p:nvSpPr>
-          <p:cNvPr id="2" name="Title 1"/>
-          <p:cNvSpPr>
-            <a:spLocks noGrp="1"/>
-          </p:cNvSpPr>
-          <p:nvPr>
-            <p:ph type="title"/>
-          </p:nvPr>
-        </p:nvSpPr>
-        <p:spPr>
-          <a:xfrm>
-            <a:off x="468172" y="650138"/>
-            <a:ext cx="8206740" cy="616305"/>
-          </a:xfrm>
-        </p:spPr>
-        <p:txBody>
-          <a:bodyPr wrap="square" lIns="0" rIns="0" tIns="0" bIns="0">
-            <a:noAutofit/>
-          </a:bodyPr>
-          <a:lstStyle/>
-          <a:p>
-            <a:pPr algn="l">
-              <a:lnSpc>
-                <a:spcPct val="110000"/>
-              </a:lnSpc>
-              <a:buNone/>
-              <a:defRPr sz="2800" b="0">
-                <a:solidFill>
-                  <a:srgbClr val="303437"/>
-                </a:solidFill>
-                <a:latin typeface="Noto Sans"/>
-              </a:defRPr>
-            </a:pPr>
-            <a:r>
-              <a:rPr sz="2800" b="1" lang="ja-JP" altLang="en-US">
-                <a:solidFill>
-                  <a:srgbClr val="303437"/>
-                </a:solidFill>
-                <a:latin typeface="Noto Sans"/>
-                <a:ea typeface="Noto Sans CJK JP"/>
-                <a:cs typeface="Noto Sans"/>
-              </a:rPr>
-              <a:t>長さの設定値と、切り出した入力を区別する</a:t>
-            </a:r>
-          </a:p>
-        </p:txBody>
-      </p:sp>
-      <p:sp>
-        <p:nvSpPr>
-          <p:cNvPr id="3" name="Text Placeholder 2"/>
-          <p:cNvSpPr>
-            <a:spLocks noGrp="1"/>
-          </p:cNvSpPr>
-          <p:nvPr>
-            <p:ph type="body" idx="1"/>
-          </p:nvPr>
-        </p:nvSpPr>
-        <p:spPr>
-          <a:xfrm>
-            <a:off x="594360" y="1463040"/>
-            <a:ext cx="7955279" cy="3044952"/>
-          </a:xfrm>
-        </p:spPr>
-        <p:txBody>
-          <a:bodyPr wrap="square" tIns="91440" bIns="91440">
-            <a:noAutofit/>
-          </a:bodyPr>
-          <a:lstStyle/>
-          <a:p>
-            <a:pPr marL="457200" indent="-355600">
-              <a:lnSpc>
-                <a:spcPts val="2499"/>
-              </a:lnSpc>
-              <a:spcAft>
-                <a:spcPts val="700"/>
-              </a:spcAft>
-              <a:buSzPct val="63333"/>
-              <a:buFont typeface="Noto Sans CJK JP"/>
-              <a:buChar char="●"/>
-              <a:defRPr sz="2100" b="0">
-                <a:solidFill>
-                  <a:srgbClr val="303437"/>
-                </a:solidFill>
-                <a:latin typeface="Noto Sans"/>
-              </a:defRPr>
-            </a:pPr>
-            <a:r>
-              <a:rPr sz="2100" b="0" lang="ja-JP" altLang="en-US">
-                <a:solidFill>
-                  <a:srgbClr val="303437"/>
-                </a:solidFill>
-                <a:latin typeface="Noto Sans"/>
-                <a:ea typeface="Noto Sans CJK JP"/>
-                <a:cs typeface="Noto Sans"/>
-              </a:rPr>
-              <a:t>評価用の生成列を52〜100記号としても、入力の最小値が52記号になるわけではない。</a:t>
-            </a:r>
-          </a:p>
-          <a:p>
-            <a:pPr marL="457200" indent="-355600">
-              <a:lnSpc>
-                <a:spcPts val="2499"/>
-              </a:lnSpc>
-              <a:spcAft>
-                <a:spcPts val="700"/>
-              </a:spcAft>
-              <a:buSzPct val="63333"/>
-              <a:buFont typeface="Noto Sans CJK JP"/>
-              <a:buChar char="●"/>
-              <a:defRPr sz="2100" b="0">
-                <a:solidFill>
-                  <a:srgbClr val="303437"/>
-                </a:solidFill>
-                <a:latin typeface="Noto Sans"/>
-              </a:defRPr>
-            </a:pPr>
-            <a:r>
-              <a:rPr sz="2100" b="0" lang="ja-JP" altLang="en-US">
-                <a:solidFill>
-                  <a:srgbClr val="303437"/>
-                </a:solidFill>
-                <a:latin typeface="Noto Sans"/>
-                <a:ea typeface="Noto Sans CJK JP"/>
-                <a:cs typeface="Noto Sans"/>
-              </a:rPr>
-              <a:t>get_inputは、後ろからの深さの合計が指定値に達する位置で列を切る。後ろにある対応済み部分列も切り落とすことがある。</a:t>
-            </a:r>
-          </a:p>
-          <a:p>
-            <a:pPr marL="457200" indent="-355600">
-              <a:lnSpc>
-                <a:spcPts val="2499"/>
-              </a:lnSpc>
-              <a:spcAft>
-                <a:spcPts val="0"/>
-              </a:spcAft>
-              <a:buSzPct val="63333"/>
-              <a:buFont typeface="Noto Sans CJK JP"/>
-              <a:buChar char="●"/>
-              <a:defRPr sz="2100" b="0">
-                <a:solidFill>
-                  <a:srgbClr val="303437"/>
-                </a:solidFill>
-                <a:latin typeface="Noto Sans"/>
-              </a:defRPr>
-            </a:pPr>
-            <a:r>
-              <a:rPr sz="2100" b="0" lang="ja-JP" altLang="en-US">
-                <a:solidFill>
-                  <a:srgbClr val="303437"/>
-                </a:solidFill>
-                <a:latin typeface="Noto Sans"/>
-                <a:ea typeface="Noto Sans CJK JP"/>
-                <a:cs typeface="Noto Sans"/>
-              </a:rPr>
-              <a:t>そのため、このseedでは入力が45〜99記号、正解が1〜3記号になった。値は公開入力との全件照合に基づく。</a:t>
-            </a:r>
-          </a:p>
-        </p:txBody>
-      </p:sp>
-      <p:sp>
-        <p:nvSpPr>
-          <p:cNvPr id="4" name="Title 3"/>
-          <p:cNvSpPr>
-            <a:spLocks noGrp="1"/>
-          </p:cNvSpPr>
-          <p:nvPr>
-            <p:ph type="title" idx="2"/>
-          </p:nvPr>
-        </p:nvSpPr>
-        <p:spPr>
-          <a:xfrm>
-            <a:off x="75895" y="0"/>
-            <a:ext cx="8115300" cy="480060"/>
-          </a:xfrm>
-        </p:spPr>
-        <p:txBody>
-          <a:bodyPr wrap="square" lIns="0" rIns="0" tIns="0" bIns="0" anchor="ctr">
-            <a:noAutofit/>
-          </a:bodyPr>
-          <a:lstStyle/>
-          <a:p>
-            <a:pPr algn="l">
-              <a:lnSpc>
-                <a:spcPct val="110000"/>
-              </a:lnSpc>
-              <a:buNone/>
-              <a:defRPr sz="1400" b="0">
-                <a:solidFill>
-                  <a:srgbClr val="303437"/>
-                </a:solidFill>
-                <a:latin typeface="Noto Sans"/>
-              </a:defRPr>
-            </a:pPr>
-            <a:r>
-              <a:rPr sz="1400" b="1" lang="ja-JP" altLang="en-US">
-                <a:solidFill>
-                  <a:srgbClr val="FFFEF8"/>
-                </a:solidFill>
-                <a:latin typeface="Noto Sans"/>
-                <a:ea typeface="Noto Sans CJK JP"/>
-                <a:cs typeface="Noto Sans"/>
-              </a:rPr>
-              <a:t>Appendix: 2. 生成と採点の補足</a:t>
-            </a:r>
-          </a:p>
-        </p:txBody>
-      </p:sp>
-      <p:sp>
-        <p:nvSpPr>
-          <p:cNvPr id="5" name="sources"/>
-          <p:cNvSpPr txBox="1"/>
-          <p:nvPr/>
-        </p:nvSpPr>
-        <p:spPr>
-          <a:xfrm>
-            <a:off x="502920" y="4700016"/>
-            <a:ext cx="8183879" cy="621792"/>
-          </a:xfrm>
-          <a:prstGeom prst="rect">
-            <a:avLst/>
-          </a:prstGeom>
-          <a:noFill/>
-        </p:spPr>
-        <p:txBody>
-          <a:bodyPr wrap="square" lIns="0" rIns="0" tIns="0" bIns="0">
-            <a:noAutofit/>
-          </a:bodyPr>
-          <a:lstStyle/>
-          <a:p>
-            <a:pPr algn="l">
-              <a:lnSpc>
-                <a:spcPts val="1200"/>
-              </a:lnSpc>
-              <a:spcBef>
-                <a:spcPts val="0"/>
-              </a:spcBef>
-              <a:spcAft>
-                <a:spcPts val="0"/>
-              </a:spcAft>
-              <a:buNone/>
-              <a:defRPr sz="810" b="0">
-                <a:solidFill>
-                  <a:srgbClr val="303437"/>
-                </a:solidFill>
-                <a:latin typeface="Noto Sans"/>
-              </a:defRPr>
-            </a:pPr>
-            <a:r>
-              <a:rPr sz="810" b="0" lang="ja-JP" altLang="en-US">
-                <a:solidFill>
-                  <a:srgbClr val="626669"/>
-                </a:solidFill>
-                <a:latin typeface="Noto Sans"/>
-                <a:ea typeface="Noto Sans CJK JP"/>
-                <a:cs typeface="Noto Sans"/>
-              </a:rPr>
-              <a:t>[1] HELM v0.3.0. DyckLanguageScenario.</a:t>
-            </a:r>
-            <a:r>
-              <a:rPr sz="810" b="0" lang="ja-JP" altLang="en-US">
-                <a:solidFill>
-                  <a:srgbClr val="626669"/>
-                </a:solidFill>
-                <a:latin typeface="Noto Sans"/>
-                <a:ea typeface="Noto Sans CJK JP"/>
-                <a:cs typeface="Noto Sans"/>
-              </a:rPr>
-              <a:t>  </a:t>
-            </a:r>
-            <a:r>
-              <a:rPr sz="810" b="0" lang="ja-JP" altLang="en-US">
-                <a:solidFill>
-                  <a:srgbClr val="626669"/>
-                </a:solidFill>
-                <a:latin typeface="Noto Sans"/>
-                <a:ea typeface="Noto Sans CJK JP"/>
-                <a:cs typeface="Noto Sans"/>
-                <a:hlinkClick r:id="rId2"/>
-              </a:rPr>
-              <a:t>https://github.com/stanford-crfm/helm/blob/v0.3.0/src/helm/benchmark/scenarios/dyck_language_scenario.py</a:t>
-            </a:r>
-          </a:p>
-        </p:txBody>
-      </p:sp>
-    </p:spTree>
-  </p:cSld>
-  <p:clrMapOvr>
-    <a:masterClrMapping/>
-  </p:clrMapOvr>
-</p:sld>
-</file>
-
-<file path=ppt/slides/slide46.xml><?xml version="1.0" encoding="utf-8"?>
-<p:sld xmlns:a="http://schemas.openxmlformats.org/drawingml/2006/main" xmlns:p="http://schemas.openxmlformats.org/presentationml/2006/main" xmlns:r="http://schemas.openxmlformats.org/officeDocument/2006/relationships">
-  <p:cSld>
-    <p:spTree>
-      <p:nvGrpSpPr>
-        <p:cNvPr id="1" name=""/>
-        <p:cNvGrpSpPr/>
-        <p:nvPr/>
-      </p:nvGrpSpPr>
-      <p:grpSpPr/>
-      <p:sp>
-        <p:nvSpPr>
-          <p:cNvPr id="2" name="Title 1"/>
-          <p:cNvSpPr>
-            <a:spLocks noGrp="1"/>
-          </p:cNvSpPr>
-          <p:nvPr>
-            <p:ph type="title"/>
-          </p:nvPr>
-        </p:nvSpPr>
-        <p:spPr>
-          <a:xfrm>
-            <a:off x="468172" y="650138"/>
-            <a:ext cx="8206740" cy="616305"/>
-          </a:xfrm>
-        </p:spPr>
-        <p:txBody>
-          <a:bodyPr wrap="square" lIns="0" rIns="0" tIns="0" bIns="0">
-            <a:noAutofit/>
-          </a:bodyPr>
-          <a:lstStyle/>
-          <a:p>
-            <a:pPr algn="l">
-              <a:lnSpc>
-                <a:spcPct val="110000"/>
-              </a:lnSpc>
-              <a:buNone/>
-              <a:defRPr sz="2800" b="0">
-                <a:solidFill>
-                  <a:srgbClr val="303437"/>
-                </a:solidFill>
-                <a:latin typeface="Noto Sans"/>
-              </a:defRPr>
-            </a:pPr>
-            <a:r>
-              <a:rPr sz="2800" b="1" lang="ja-JP" altLang="en-US">
-                <a:solidFill>
-                  <a:srgbClr val="303437"/>
-                </a:solidFill>
-                <a:latin typeface="Noto Sans"/>
-                <a:ea typeface="Noto Sans CJK JP"/>
-                <a:cs typeface="Noto Sans"/>
-              </a:rPr>
-              <a:t>公開成績と独自の再採点を分けて保存する</a:t>
-            </a:r>
-          </a:p>
-        </p:txBody>
-      </p:sp>
-      <p:sp>
-        <p:nvSpPr>
-          <p:cNvPr id="3" name="Text Placeholder 2"/>
-          <p:cNvSpPr>
-            <a:spLocks noGrp="1"/>
-          </p:cNvSpPr>
-          <p:nvPr>
-            <p:ph type="body" idx="1"/>
-          </p:nvPr>
-        </p:nvSpPr>
-        <p:spPr>
-          <a:xfrm>
-            <a:off x="594360" y="1463040"/>
-            <a:ext cx="7955279" cy="3044952"/>
-          </a:xfrm>
-        </p:spPr>
-        <p:txBody>
-          <a:bodyPr wrap="square" tIns="91440" bIns="91440">
-            <a:noAutofit/>
-          </a:bodyPr>
-          <a:lstStyle/>
-          <a:p>
-            <a:pPr marL="457200" indent="-355600">
-              <a:lnSpc>
-                <a:spcPts val="2379"/>
-              </a:lnSpc>
-              <a:spcAft>
-                <a:spcPts val="700"/>
-              </a:spcAft>
-              <a:buSzPct val="66500"/>
-              <a:buFont typeface="Noto Sans CJK JP"/>
-              <a:buChar char="●"/>
-              <a:defRPr sz="2000" b="0">
-                <a:solidFill>
-                  <a:srgbClr val="303437"/>
-                </a:solidFill>
-                <a:latin typeface="Noto Sans"/>
-              </a:defRPr>
-            </a:pPr>
-            <a:r>
-              <a:rPr sz="2000" b="0" lang="ja-JP" altLang="en-US">
-                <a:solidFill>
-                  <a:srgbClr val="303437"/>
-                </a:solidFill>
-                <a:latin typeface="Noto Sans"/>
-                <a:ea typeface="Noto Sans CJK JP"/>
-                <a:cs typeface="Noto Sans"/>
-              </a:rPr>
-              <a:t>3モデルの末尾要素得点は、公開stats.jsonのtest・摂動なしを参照した。全て500件、3試行。</a:t>
-            </a:r>
-          </a:p>
-          <a:p>
-            <a:pPr marL="457200" indent="-355600">
-              <a:lnSpc>
-                <a:spcPts val="2379"/>
-              </a:lnSpc>
-              <a:spcAft>
-                <a:spcPts val="700"/>
-              </a:spcAft>
-              <a:buSzPct val="66500"/>
-              <a:buFont typeface="Noto Sans CJK JP"/>
-              <a:buChar char="●"/>
-              <a:defRPr sz="2000" b="0">
-                <a:solidFill>
-                  <a:srgbClr val="303437"/>
-                </a:solidFill>
-                <a:latin typeface="Noto Sans"/>
-              </a:defRPr>
-            </a:pPr>
-            <a:r>
-              <a:rPr sz="2000" b="0" lang="ja-JP" altLang="en-US">
-                <a:solidFill>
-                  <a:srgbClr val="303437"/>
-                </a:solidFill>
-                <a:latin typeface="Noto Sans"/>
-                <a:ea typeface="Noto Sans CJK JP"/>
-                <a:cs typeface="Noto Sans"/>
-              </a:rPr>
-              <a:t>text-davinci-003の列全体得点は、公開scenario_state.jsonの1,500出力に、前後の空白を除く一致判定を適用した独自集計。</a:t>
-            </a:r>
-          </a:p>
-          <a:p>
-            <a:pPr marL="457200" indent="-355600">
-              <a:lnSpc>
-                <a:spcPts val="2379"/>
-              </a:lnSpc>
-              <a:spcAft>
-                <a:spcPts val="0"/>
-              </a:spcAft>
-              <a:buSzPct val="66500"/>
-              <a:buFont typeface="Noto Sans CJK JP"/>
-              <a:buChar char="●"/>
-              <a:defRPr sz="2000" b="0">
-                <a:solidFill>
-                  <a:srgbClr val="303437"/>
-                </a:solidFill>
-                <a:latin typeface="Noto Sans"/>
-              </a:defRPr>
-            </a:pPr>
-            <a:r>
-              <a:rPr sz="2000" b="0" lang="ja-JP" altLang="en-US">
-                <a:solidFill>
-                  <a:srgbClr val="303437"/>
-                </a:solidFill>
-                <a:latin typeface="Noto Sans"/>
-                <a:ea typeface="Noto Sans CJK JP"/>
-                <a:cs typeface="Noto Sans"/>
-              </a:rPr>
-              <a:t>公開指標の実装も同じ出力へ適用し、試行0が0.732、試行1・2が各0.760、平均0.750666…となることを再現した。</a:t>
-            </a:r>
-          </a:p>
-        </p:txBody>
-      </p:sp>
-      <p:sp>
-        <p:nvSpPr>
-          <p:cNvPr id="4" name="Title 3"/>
-          <p:cNvSpPr>
-            <a:spLocks noGrp="1"/>
-          </p:cNvSpPr>
-          <p:nvPr>
-            <p:ph type="title" idx="2"/>
-          </p:nvPr>
-        </p:nvSpPr>
-        <p:spPr>
-          <a:xfrm>
-            <a:off x="75895" y="0"/>
-            <a:ext cx="8115300" cy="480060"/>
-          </a:xfrm>
-        </p:spPr>
-        <p:txBody>
-          <a:bodyPr wrap="square" lIns="0" rIns="0" tIns="0" bIns="0" anchor="ctr">
-            <a:noAutofit/>
-          </a:bodyPr>
-          <a:lstStyle/>
-          <a:p>
-            <a:pPr algn="l">
-              <a:lnSpc>
-                <a:spcPct val="110000"/>
-              </a:lnSpc>
-              <a:buNone/>
-              <a:defRPr sz="1400" b="0">
-                <a:solidFill>
-                  <a:srgbClr val="303437"/>
-                </a:solidFill>
-                <a:latin typeface="Noto Sans"/>
-              </a:defRPr>
-            </a:pPr>
-            <a:r>
-              <a:rPr sz="1400" b="1" lang="ja-JP" altLang="en-US">
-                <a:solidFill>
-                  <a:srgbClr val="FFFEF8"/>
-                </a:solidFill>
-                <a:latin typeface="Noto Sans"/>
-                <a:ea typeface="Noto Sans CJK JP"/>
-                <a:cs typeface="Noto Sans"/>
-              </a:rPr>
-              <a:t>Appendix: 2. 生成と採点の補足</a:t>
-            </a:r>
-          </a:p>
-        </p:txBody>
-      </p:sp>
-      <p:sp>
-        <p:nvSpPr>
-          <p:cNvPr id="5" name="sources"/>
-          <p:cNvSpPr txBox="1"/>
-          <p:nvPr/>
-        </p:nvSpPr>
-        <p:spPr>
-          <a:xfrm>
-            <a:off x="502920" y="4517136"/>
-            <a:ext cx="8183879" cy="621792"/>
-          </a:xfrm>
-          <a:prstGeom prst="rect">
-            <a:avLst/>
-          </a:prstGeom>
-          <a:noFill/>
-        </p:spPr>
-        <p:txBody>
-          <a:bodyPr wrap="square" lIns="0" rIns="0" tIns="0" bIns="0">
-            <a:noAutofit/>
-          </a:bodyPr>
-          <a:lstStyle/>
-          <a:p>
-            <a:pPr algn="l">
-              <a:lnSpc>
-                <a:spcPts val="1200"/>
-              </a:lnSpc>
-              <a:spcBef>
-                <a:spcPts val="0"/>
-              </a:spcBef>
-              <a:spcAft>
-                <a:spcPts val="0"/>
-              </a:spcAft>
-              <a:buNone/>
-              <a:defRPr sz="810" b="0">
-                <a:solidFill>
-                  <a:srgbClr val="303437"/>
-                </a:solidFill>
-                <a:latin typeface="Noto Sans"/>
-              </a:defRPr>
-            </a:pPr>
-            <a:r>
-              <a:rPr sz="810" b="0" lang="ja-JP" altLang="en-US">
-                <a:solidFill>
-                  <a:srgbClr val="626669"/>
-                </a:solidFill>
-                <a:latin typeface="Noto Sans"/>
-                <a:ea typeface="Noto Sans CJK JP"/>
-                <a:cs typeface="Noto Sans"/>
-              </a:rPr>
-              <a:t>[1] HELM v0.3.0、seed=42の生成器で再現し、公開text-davinci-003入力と全500件を照合。</a:t>
-            </a:r>
-          </a:p>
-          <a:p>
-            <a:pPr>
-              <a:lnSpc>
-                <a:spcPts val="1200"/>
-              </a:lnSpc>
-              <a:buNone/>
-              <a:defRPr sz="810" b="0">
-                <a:solidFill>
-                  <a:srgbClr val="303437"/>
-                </a:solidFill>
-                <a:latin typeface="Noto Sans"/>
-              </a:defRPr>
-            </a:pPr>
-            <a:r>
-              <a:rPr sz="810" b="0" lang="ja-JP" altLang="en-US">
-                <a:solidFill>
-                  <a:srgbClr val="626669"/>
-                </a:solidFill>
-                <a:latin typeface="Noto Sans"/>
-                <a:ea typeface="Noto Sans CJK JP"/>
-                <a:cs typeface="Noto Sans"/>
-                <a:hlinkClick r:id="rId2"/>
-              </a:rPr>
-              <a:t>https://crfm.stanford.edu/helm/classic/v0.4.0/#/runs/dyck_language_np=3:model=openai_text-davinci-003</a:t>
-            </a:r>
-          </a:p>
-          <a:p>
-            <a:pPr>
-              <a:lnSpc>
-                <a:spcPts val="1200"/>
-              </a:lnSpc>
-              <a:spcAft>
-                <a:spcPts val="0"/>
-              </a:spcAft>
-              <a:buNone/>
-              <a:defRPr sz="810" b="0">
-                <a:solidFill>
-                  <a:srgbClr val="303437"/>
-                </a:solidFill>
-                <a:latin typeface="Noto Sans"/>
-              </a:defRPr>
-            </a:pPr>
-            <a:r>
-              <a:rPr sz="810" b="0" lang="ja-JP" altLang="en-US">
-                <a:solidFill>
-                  <a:srgbClr val="626669"/>
-                </a:solidFill>
-                <a:latin typeface="Noto Sans"/>
-                <a:ea typeface="Noto Sans CJK JP"/>
-                <a:cs typeface="Noto Sans"/>
-              </a:rPr>
-              <a:t>[2] HELM v0.3.0. exact_match_indicator.</a:t>
-            </a:r>
-            <a:r>
-              <a:rPr sz="810" b="0" lang="ja-JP" altLang="en-US">
-                <a:solidFill>
-                  <a:srgbClr val="626669"/>
-                </a:solidFill>
-                <a:latin typeface="Noto Sans"/>
-                <a:ea typeface="Noto Sans CJK JP"/>
-                <a:cs typeface="Noto Sans"/>
-              </a:rPr>
-              <a:t>  </a:t>
-            </a:r>
-            <a:r>
-              <a:rPr sz="810" b="0" lang="ja-JP" altLang="en-US">
-                <a:solidFill>
-                  <a:srgbClr val="626669"/>
-                </a:solidFill>
-                <a:latin typeface="Noto Sans"/>
-                <a:ea typeface="Noto Sans CJK JP"/>
-                <a:cs typeface="Noto Sans"/>
-                <a:hlinkClick r:id="rId3"/>
-              </a:rPr>
-              <a:t>https://github.com/stanford-crfm/helm/blob/v0.3.0/src/helm/benchmark/metrics/basic_metrics.py</a:t>
             </a:r>
           </a:p>
         </p:txBody>
@@ -25070,7 +20200,7 @@
                 <a:ea typeface="Noto Sans CJK JP"/>
                 <a:cs typeface="Noto Sans"/>
               </a:rPr>
-              <a:t>Appendix: 3. 研究と参考文献</a:t>
+              <a:t>Appendix: 2. 研究と参考文献</a:t>
             </a:r>
           </a:p>
         </p:txBody>
@@ -25084,7 +20214,7 @@
         <p:spPr>
           <a:xfrm>
             <a:off x="548640" y="1463040"/>
-            <a:ext cx="8046720" cy="1715008"/>
+            <a:ext cx="8046720" cy="1943608"/>
           </a:xfrm>
           <a:prstGeom prst="rect">
             <a:avLst/>
@@ -25232,7 +20362,7 @@
         <p:spPr>
           <a:xfrm>
             <a:off x="548640" y="3689096"/>
-            <a:ext cx="8046720" cy="1425448"/>
+            <a:ext cx="8046720" cy="1654048"/>
           </a:xfrm>
           <a:prstGeom prst="rect">
             <a:avLst/>
@@ -25303,7 +20433,7 @@
                 <a:ea typeface="Noto Sans CJK JP"/>
                 <a:cs typeface="Noto Sans"/>
               </a:rPr>
-              <a:t>Mirac Suzgun et al. Google BIG-bench, task documentation (2026-10-18参照)。</a:t>
+              <a:t>Mirac Suzgun et al. · n.d. · Google BIG-bench（2026-10-18参照）</a:t>
             </a:r>
           </a:p>
           <a:p>
@@ -25480,7 +20610,7 @@
                 <a:ea typeface="Noto Sans CJK JP"/>
                 <a:cs typeface="Noto Sans"/>
               </a:rPr>
-              <a:t>Appendix: 3. 研究と参考文献</a:t>
+              <a:t>Appendix: 2. 研究と参考文献</a:t>
             </a:r>
           </a:p>
         </p:txBody>
@@ -25494,7 +20624,7 @@
         <p:spPr>
           <a:xfrm>
             <a:off x="548640" y="1463040"/>
-            <a:ext cx="8046720" cy="1157605"/>
+            <a:ext cx="8046720" cy="1386205"/>
           </a:xfrm>
           <a:prstGeom prst="rect">
             <a:avLst/>
@@ -25596,7 +20726,7 @@
                 <a:ea typeface="Noto Sans CJK JP"/>
                 <a:cs typeface="Noto Sans"/>
               </a:rPr>
-              <a:t>多様なシナリオと指標でモデルを評価するHELMの枠組みを提案する。</a:t>
+              <a:t>多面的な言語モデル評価の中で、括弧列を補う課題を扱う。</a:t>
             </a:r>
           </a:p>
           <a:p>
@@ -25642,7 +20772,7 @@
         <p:spPr>
           <a:xfrm>
             <a:off x="548640" y="3131693"/>
-            <a:ext cx="8046720" cy="1425448"/>
+            <a:ext cx="8046720" cy="1654048"/>
           </a:xfrm>
           <a:prstGeom prst="rect">
             <a:avLst/>
@@ -25713,7 +20843,7 @@
                 <a:ea typeface="Noto Sans CJK JP"/>
                 <a:cs typeface="Noto Sans"/>
               </a:rPr>
-              <a:t>Stanford CRFM (2023). HELM v0.3.0, Python implementation.</a:t>
+              <a:t>Stanford CRFM (n.d.). 公開生成器。参照2026-10-19。</a:t>
             </a:r>
           </a:p>
           <a:p>
@@ -25925,7 +21055,7 @@
                 <a:ea typeface="Noto Sans CJK JP"/>
                 <a:cs typeface="Noto Sans"/>
               </a:rPr>
-              <a:t>HELMの公開設定は丸括弧( )、角括弧[ ]、波括弧{ }の3種類を使う。</a:t>
+              <a:t>ここでは丸括弧( )、角括弧[ ]、波括弧{ }の3種類を使う補完問題を紹介する。</a:t>
             </a:r>
           </a:p>
           <a:p>
@@ -25955,7 +21085,7 @@
                 <a:ea typeface="Noto Sans CJK JP"/>
                 <a:cs typeface="Noto Sans"/>
               </a:rPr>
-              <a:t>入力は閉じ括弧が欠けた列。開いたままの括弧を閉じる、最短の続きの列を生成する。</a:t>
+              <a:t>入力は閉じ括弧が欠けた列。開いたままの括弧をすべて閉じる、最短の続きを答える。</a:t>
             </a:r>
           </a:p>
         </p:txBody>
@@ -26057,19 +21187,28 @@
                 <a:ea typeface="Noto Sans CJK JP"/>
                 <a:cs typeface="Noto Sans"/>
               </a:rPr>
-              <a:t>[1] HELM v0.3.0. DyckLanguageScenario.</a:t>
-            </a:r>
-            <a:r>
-              <a:rPr sz="810" b="0" lang="ja-JP" altLang="en-US">
-                <a:solidFill>
-                  <a:srgbClr val="626669"/>
-                </a:solidFill>
-                <a:latin typeface="Noto Sans"/>
-                <a:ea typeface="Noto Sans CJK JP"/>
-                <a:cs typeface="Noto Sans"/>
-              </a:rPr>
-              <a:t>  </a:t>
-            </a:r>
+              <a:t>[1] Stanford CRFM. DyckLanguageScenario — 括弧列の生成と正解計算。</a:t>
+            </a:r>
+          </a:p>
+          <a:p>
+            <a:pPr algn="l">
+              <a:lnSpc>
+                <a:spcPts val="1200"/>
+              </a:lnSpc>
+              <a:spcBef>
+                <a:spcPts val="0"/>
+              </a:spcBef>
+              <a:spcAft>
+                <a:spcPts val="0"/>
+              </a:spcAft>
+              <a:buNone/>
+              <a:defRPr sz="810" b="0">
+                <a:solidFill>
+                  <a:srgbClr val="303437"/>
+                </a:solidFill>
+                <a:latin typeface="Noto Sans"/>
+              </a:defRPr>
+            </a:pPr>
             <a:r>
               <a:rPr sz="810" b="0" lang="ja-JP" altLang="en-US">
                 <a:solidFill>
@@ -26199,7 +21338,7 @@
                 <a:ea typeface="Noto Sans CJK JP"/>
                 <a:cs typeface="Noto Sans"/>
               </a:rPr>
-              <a:t>閉じる括弧の種類は、最後に開いたままの括弧で決まる。単に種類ごとの個数を数えるだけでは順序を復元できない。</a:t>
+              <a:t>閉じる括弧の種類は、最後に開いたままの括弧で決まる。種類ごとの個数を数えるだけでは、閉じる順序を復元できない。</a:t>
             </a:r>
           </a:p>
           <a:p>
@@ -26259,7 +21398,7 @@
                 <a:ea typeface="Noto Sans CJK JP"/>
                 <a:cs typeface="Noto Sans"/>
               </a:rPr>
-              <a:t>以下の実例は固定seedの公式HELM生成器から得た実データで、公開runの入力とも照合した。</a:t>
+              <a:t>実例は、公開生成器で作られた異なる13問。入力と正解を全文で示す。</a:t>
             </a:r>
           </a:p>
         </p:txBody>
@@ -26361,8 +21500,25 @@
                 <a:ea typeface="Noto Sans CJK JP"/>
                 <a:cs typeface="Noto Sans"/>
               </a:rPr>
-              <a:t>[1] Suzgun et al. (2019). Memory-Augmented Recurrent Neural Networks Can Learn Generalized Dyck Languages. arXiv.</a:t>
-            </a:r>
+              <a:t>[1] Suzgun et al. (2019). Memory-Augmented Recurrent Neural Networks Can Learn Generalized Dyck Languages.</a:t>
+            </a:r>
+          </a:p>
+          <a:p>
+            <a:pPr>
+              <a:lnSpc>
+                <a:spcPts val="1200"/>
+              </a:lnSpc>
+              <a:spcAft>
+                <a:spcPts val="0"/>
+              </a:spcAft>
+              <a:buNone/>
+              <a:defRPr sz="810" b="0">
+                <a:solidFill>
+                  <a:srgbClr val="303437"/>
+                </a:solidFill>
+                <a:latin typeface="Noto Sans"/>
+              </a:defRPr>
+            </a:pPr>
             <a:r>
               <a:rPr sz="810" b="0" lang="ja-JP" altLang="en-US">
                 <a:solidFill>
@@ -26371,74 +21527,9 @@
                 <a:latin typeface="Noto Sans"/>
                 <a:ea typeface="Noto Sans CJK JP"/>
                 <a:cs typeface="Noto Sans"/>
-              </a:rPr>
-              <a:t>  </a:t>
-            </a:r>
-            <a:r>
-              <a:rPr sz="810" b="0" lang="ja-JP" altLang="en-US">
-                <a:solidFill>
-                  <a:srgbClr val="626669"/>
-                </a:solidFill>
-                <a:latin typeface="Noto Sans"/>
-                <a:ea typeface="Noto Sans CJK JP"/>
-                <a:cs typeface="Noto Sans"/>
                 <a:hlinkClick r:id="rId2"/>
               </a:rPr>
               <a:t>https://arxiv.org/abs/1911.03329</a:t>
-            </a:r>
-          </a:p>
-          <a:p>
-            <a:pPr>
-              <a:lnSpc>
-                <a:spcPts val="1200"/>
-              </a:lnSpc>
-              <a:spcAft>
-                <a:spcPts val="0"/>
-              </a:spcAft>
-              <a:buNone/>
-              <a:defRPr sz="810" b="0">
-                <a:solidFill>
-                  <a:srgbClr val="303437"/>
-                </a:solidFill>
-                <a:latin typeface="Noto Sans"/>
-              </a:defRPr>
-            </a:pPr>
-            <a:r>
-              <a:rPr sz="810" b="0" lang="ja-JP" altLang="en-US">
-                <a:solidFill>
-                  <a:srgbClr val="626669"/>
-                </a:solidFill>
-                <a:latin typeface="Noto Sans"/>
-                <a:ea typeface="Noto Sans CJK JP"/>
-                <a:cs typeface="Noto Sans"/>
-              </a:rPr>
-              <a:t>[2] HELM v0.3.0、seed=42の生成器で再現し、公開text-davinci-003入力と全500件を照合。</a:t>
-            </a:r>
-          </a:p>
-          <a:p>
-            <a:pPr>
-              <a:lnSpc>
-                <a:spcPts val="1200"/>
-              </a:lnSpc>
-              <a:buNone/>
-              <a:defRPr sz="810" b="0">
-                <a:solidFill>
-                  <a:srgbClr val="303437"/>
-                </a:solidFill>
-                <a:latin typeface="Noto Sans"/>
-              </a:defRPr>
-            </a:pPr>
-            <a:r>
-              <a:rPr sz="810" b="0" lang="ja-JP" altLang="en-US">
-                <a:solidFill>
-                  <a:srgbClr val="626669"/>
-                </a:solidFill>
-                <a:latin typeface="Noto Sans"/>
-                <a:ea typeface="Noto Sans CJK JP"/>
-                <a:cs typeface="Noto Sans"/>
-                <a:hlinkClick r:id="rId3"/>
-              </a:rPr>
-              <a:t>https://crfm.stanford.edu/helm/classic/v0.4.0/#/runs/dyck_language_np=3:model=openai_text-davinci-003</a:t>
             </a:r>
           </a:p>
         </p:txBody>
@@ -26606,7 +21697,7 @@
                 <a:ea typeface="Noto Sans CJK JP"/>
                 <a:cs typeface="Noto Sans"/>
               </a:rPr>
-              <a:t>入力の全文／65記号。空白で区切り、表示上の改行だけを追加。</a:t>
+              <a:t>入力（全文）／65記号</a:t>
             </a:r>
           </a:p>
         </p:txBody>
@@ -26904,7 +21995,7 @@
                 <a:ea typeface="Noto Sans CJK JP"/>
                 <a:cs typeface="Noto Sans"/>
               </a:rPr>
-              <a:t>[1] HELM v0.3.0、seed=42の生成器で再現し、公開text-davinci-003入力と全500件を照合。 id3 / test / generator index 3</a:t>
+              <a:t>[1] Stanford CRFM (2023). Dyck Language — 公開問題と既存出力。</a:t>
             </a:r>
           </a:p>
           <a:p>
@@ -26930,7 +22021,7 @@
                 <a:cs typeface="Noto Sans"/>
                 <a:hlinkClick r:id="rId2"/>
               </a:rPr>
-              <a:t>https://crfm.stanford.edu/helm/classic/v0.4.0/#/runs/dyck_language_np=3:model=openai_text-davinci-003</a:t>
+              <a:t>https://crfm.stanford.edu/helm/classic/v0.4.0/#/groups/dyck_language</a:t>
             </a:r>
           </a:p>
         </p:txBody>
@@ -27098,7 +22189,7 @@
                 <a:ea typeface="Noto Sans CJK JP"/>
                 <a:cs typeface="Noto Sans"/>
               </a:rPr>
-              <a:t>入力の全文／89記号。空白で区切り、表示上の改行だけを追加。</a:t>
+              <a:t>入力（全文）／89記号</a:t>
             </a:r>
           </a:p>
         </p:txBody>
@@ -27427,7 +22518,7 @@
                 <a:ea typeface="Noto Sans CJK JP"/>
                 <a:cs typeface="Noto Sans"/>
               </a:rPr>
-              <a:t>[1] HELM v0.3.0、seed=42の生成器で再現し、公開text-davinci-003入力と全500件を照合。 id4 / test / generator index 4</a:t>
+              <a:t>[1] Stanford CRFM (2023). Dyck Language — 公開問題と既存出力。</a:t>
             </a:r>
           </a:p>
           <a:p>
@@ -27453,7 +22544,7 @@
                 <a:cs typeface="Noto Sans"/>
                 <a:hlinkClick r:id="rId2"/>
               </a:rPr>
-              <a:t>https://crfm.stanford.edu/helm/classic/v0.4.0/#/runs/dyck_language_np=3:model=openai_text-davinci-003</a:t>
+              <a:t>https://crfm.stanford.edu/helm/classic/v0.4.0/#/groups/dyck_language</a:t>
             </a:r>
           </a:p>
         </p:txBody>
@@ -27621,7 +22712,7 @@
                 <a:ea typeface="Noto Sans CJK JP"/>
                 <a:cs typeface="Noto Sans"/>
               </a:rPr>
-              <a:t>入力の全文／63記号。空白で区切り、表示上の改行だけを追加。</a:t>
+              <a:t>入力（全文）／63記号</a:t>
             </a:r>
           </a:p>
         </p:txBody>
@@ -27919,7 +23010,7 @@
                 <a:ea typeface="Noto Sans CJK JP"/>
                 <a:cs typeface="Noto Sans"/>
               </a:rPr>
-              <a:t>[1] HELM v0.3.0、seed=42の生成器で再現し、公開text-davinci-003入力と全500件を照合。 id9 / test / generator index 9</a:t>
+              <a:t>[1] Stanford CRFM (2023). Dyck Language — 公開問題と既存出力。</a:t>
             </a:r>
           </a:p>
           <a:p>
@@ -27945,7 +23036,7 @@
                 <a:cs typeface="Noto Sans"/>
                 <a:hlinkClick r:id="rId2"/>
               </a:rPr>
-              <a:t>https://crfm.stanford.edu/helm/classic/v0.4.0/#/runs/dyck_language_np=3:model=openai_text-davinci-003</a:t>
+              <a:t>https://crfm.stanford.edu/helm/classic/v0.4.0/#/groups/dyck_language</a:t>
             </a:r>
           </a:p>
         </p:txBody>
